--- a/presentaciones/01_Problema_Investigacion_y_Contexto.pptx
+++ b/presentaciones/01_Problema_Investigacion_y_Contexto.pptx
@@ -516,29 +516,45 @@
           <a:lstStyle/>
           <a:p>
             <a:r>
-              <a:t>APERTURA — 10 a 15 minutos</a:t>
+              <a:t>APERTURA -- 10 a 15 minutos</a:t>
             </a:r>
           </a:p>
           <a:p/>
           <a:p>
             <a:r>
-              <a:t>Comenzar preguntando a la audiencia: '¿Cuántos de ustedes saben el nombre de al menos uno de los candidatos a diputado de su distrito?' Pausa breve.</a:t>
-            </a:r>
-          </a:p>
-          <a:p>
-            <a:r>
-              <a:t>Esta presentación cuenta POR QUÉ nació este proyecto: un problema real, medible, con consecuencias democráticas concretas.</a:t>
-            </a:r>
-          </a:p>
-          <a:p>
-            <a:r>
-              <a:t>El objetivo no es explicar la aplicación. Es que la audiencia termine pensando: 'Sí, este problema existe y merece ser resuelto.'</a:t>
+              <a:t>Comenzar con una pregunta directa a la audiencia:</a:t>
+            </a:r>
+          </a:p>
+          <a:p>
+            <a:r>
+              <a:t>  '?Cuantos saben el nombre de al menos un candidato a diputado de su distrito?'</a:t>
             </a:r>
           </a:p>
           <a:p/>
           <a:p>
             <a:r>
-              <a:t>VotoAFin · UTFSM · Jenifer Castillo · 2026</a:t>
+              <a:t>Esta presentacion responde DOS preguntas:</a:t>
+            </a:r>
+          </a:p>
+          <a:p>
+            <a:r>
+              <a:t>  1. ?Por que existe el problema?</a:t>
+            </a:r>
+          </a:p>
+          <a:p>
+            <a:r>
+              <a:t>  2. ?Por que merece ser resuelto?</a:t>
+            </a:r>
+          </a:p>
+          <a:p/>
+          <a:p>
+            <a:r>
+              <a:t>No se habla de la aplicacion todavia. Solo del problema y la investigacion.</a:t>
+            </a:r>
+          </a:p>
+          <a:p>
+            <a:r>
+              <a:t>El objetivo es que la audiencia termine pensando: 'Si, este problema existe.'</a:t>
             </a:r>
           </a:p>
         </p:txBody>
@@ -608,19 +624,18 @@
           <a:lstStyle/>
           <a:p>
             <a:r>
-              <a:t>Esta fue la conclusión literal del primer trabajo de Emprendimiento — el documento que inició el proyecto.</a:t>
+              <a:t>Transicion al diagnóstico de la oportunidad de producto.</a:t>
             </a:r>
           </a:p>
           <a:p/>
           <a:p>
             <a:r>
-              <a:t>Es importante que la audiencia entienda que VotoAFin no comenzó con la decisión de construir una aplicación. Comenzó con la observación de un problema y la articulación de una oportunidad.</a:t>
-            </a:r>
-          </a:p>
-          <a:p/>
-          <a:p>
-            <a:r>
-              <a:t>La tecnología fue el medio; la democracia informada fue siempre el fin.</a:t>
+              <a:t>El problema esta documentado. El ecosistema de herramientas falla.</a:t>
+            </a:r>
+          </a:p>
+          <a:p>
+            <a:r>
+              <a:t>El espacio esta abierto. ?Por que nadie lo habia llenado?</a:t>
             </a:r>
           </a:p>
         </p:txBody>
@@ -690,31 +705,40 @@
           <a:lstStyle/>
           <a:p>
             <a:r>
-              <a:t>Al inicio del proyecto, no existía en Chile ninguna VAA activa con metodología transparente y datos actualizados.</a:t>
+              <a:t>Al inicio del proyecto, Chile no tenia ninguna VAA activa con metodologia</a:t>
+            </a:r>
+          </a:p>
+          <a:p>
+            <a:r>
+              <a:t>transparente y datos actualizados.</a:t>
             </a:r>
           </a:p>
           <a:p/>
           <a:p>
             <a:r>
-              <a:t>Voto Informado permitía comparar perfiles lado a lado pero sin producir un indicador de afinidad basado en las respuestas del usuario.</a:t>
+              <a:t>Voto Informado (SERVEL+PNUD): comparaba perfiles lado a lado pero sin</a:t>
+            </a:r>
+          </a:p>
+          <a:p>
+            <a:r>
+              <a:t>producir un indicador de afinidad. Sin algoritmo de matching.</a:t>
             </a:r>
           </a:p>
           <a:p/>
           <a:p>
             <a:r>
-              <a:t>Decide Chile fue la más cercana al concepto de VAA, pero estaba discontinuada y sin mantención.</a:t>
+              <a:t>Decide Chile: era la mas cercana al concepto de VAA, pero estaba</a:t>
+            </a:r>
+          </a:p>
+          <a:p>
+            <a:r>
+              <a:t>discontinuada y sin datos actualizados. Falta de sostenibilidad.</a:t>
             </a:r>
           </a:p>
           <a:p/>
           <a:p>
             <a:r>
-              <a:t>Internacionalmente, las VAAs consolidadas (Wahl-O-Mat, Smartvote, Vote Compass, iSideWith) no tenían cobertura del contexto chileno.</a:t>
-            </a:r>
-          </a:p>
-          <a:p/>
-          <a:p>
-            <a:r>
-              <a:t>La brecha era concreta y el espacio estaba abierto.</a:t>
+              <a:t>La brecha era concreta. El espacio estaba abierto.</a:t>
             </a:r>
           </a:p>
         </p:txBody>
@@ -784,25 +808,39 @@
           <a:lstStyle/>
           <a:p>
             <a:r>
-              <a:t>Los tres segmentos comparten una necesidad común: acceso a información confiable, estructurada y procesable en un tiempo razonable.</a:t>
+              <a:t>Los tres segmentos comparten una necesidad comun:</a:t>
+            </a:r>
+          </a:p>
+          <a:p>
+            <a:r>
+              <a:t>informacion confiable, estructurada y procesable en tiempo razonable.</a:t>
             </a:r>
           </a:p>
           <a:p/>
           <a:p>
             <a:r>
-              <a:t>El diseño de VotoAFin debía ser accesible para los tres — sin conocimiento político previo necesario para interpretarlo.</a:t>
+              <a:t>Esta segmentacion fue determinante en las decisiones de UX:</a:t>
+            </a:r>
+          </a:p>
+          <a:p>
+            <a:r>
+              <a:t>sin conocimiento politico previo necesario para usar la herramienta.</a:t>
             </a:r>
           </a:p>
           <a:p/>
           <a:p>
             <a:r>
-              <a:t>El joven es el perfil con mayor potencial de adopción de una solución tecnológica; el adulto mayor y el indeciso son los que más se beneficiarían de la reducción de carga cognitiva.</a:t>
-            </a:r>
-          </a:p>
-          <a:p/>
-          <a:p>
-            <a:r>
-              <a:t>Esta segmentación fue determinante en las decisiones de UX de la plataforma: simplificar, no complejizar. Orientar, no abrumar.</a:t>
+              <a:t>El joven es el perfil con mayor potencial de adopcion.</a:t>
+            </a:r>
+          </a:p>
+          <a:p>
+            <a:r>
+              <a:t>El adulto mayor y el indeciso son quienes mas se beneficiarian de</a:t>
+            </a:r>
+          </a:p>
+          <a:p>
+            <a:r>
+              <a:t>la reduccion de carga cognitiva.</a:t>
             </a:r>
           </a:p>
         </p:txBody>
@@ -872,31 +910,34 @@
           <a:lstStyle/>
           <a:p>
             <a:r>
-              <a:t>Este slide es el argumento de justificación técnica del proyecto.</a:t>
+              <a:t>Esta fue la hipotesis de oportunidad articulada al cierre del primer</a:t>
+            </a:r>
+          </a:p>
+          <a:p>
+            <a:r>
+              <a:t>trabajo de Emprendimiento -- el documento que dio origen al proyecto.</a:t>
             </a:r>
           </a:p>
           <a:p/>
           <a:p>
             <a:r>
-              <a:t>Un problema de 'escasez de información' requiere producir más información — eso es periodismo, no ingeniería.</a:t>
+              <a:t>Es importante que la audiencia entienda:</a:t>
+            </a:r>
+          </a:p>
+          <a:p>
+            <a:r>
+              <a:t>  - El proyecto NO comenzo con la decision de construir una app.</a:t>
+            </a:r>
+          </a:p>
+          <a:p>
+            <a:r>
+              <a:t>  - Comenzo con la OBSERVACION de un problema y la ARTICULACION de una oportunidad.</a:t>
             </a:r>
           </a:p>
           <a:p/>
           <a:p>
             <a:r>
-              <a:t>Un problema de 'intermediación' requiere un sistema que transforme la información existente en algo utilizable. Eso sí es ingeniería.</a:t>
-            </a:r>
-          </a:p>
-          <a:p/>
-          <a:p>
-            <a:r>
-              <a:t>Las posturas de los candidatos están en sus programas, sus votaciones parlamentarias registradas, sus declaraciones públicas. El problema es que el ciudadano promedio no tiene tiempo ni herramientas para procesar esa información.</a:t>
-            </a:r>
-          </a:p>
-          <a:p/>
-          <a:p>
-            <a:r>
-              <a:t>VotoAFin no produce información nueva: organiza, compara y presenta la información que ya existe.</a:t>
+              <a:t>La tecnologia fue el medio. La democracia informada fue siempre el fin.</a:t>
             </a:r>
           </a:p>
         </p:txBody>
@@ -966,25 +1007,40 @@
           <a:lstStyle/>
           <a:p>
             <a:r>
-              <a:t>Esta slide cierra el Acto I de la historia.</a:t>
+              <a:t>Este slide es el argumento central de justificacion tecnica del proyecto.</a:t>
             </a:r>
           </a:p>
           <a:p/>
           <a:p>
             <a:r>
-              <a:t>La audiencia debe llegar a este punto pensando: 'Sí, este problema existe, está documentado, tiene consecuencias medibles, y la tecnología puede hacer algo al respecto.'</a:t>
+              <a:t>Un problema de escasez requiere producir mas informacion -- eso es periodismo.</a:t>
+            </a:r>
+          </a:p>
+          <a:p>
+            <a:r>
+              <a:t>Un problema de intermediacion requiere un sistema que transforme la informacion</a:t>
+            </a:r>
+          </a:p>
+          <a:p>
+            <a:r>
+              <a:t>existente en algo utilizable para el votante promedio. Eso es ingenieria.</a:t>
             </a:r>
           </a:p>
           <a:p/>
           <a:p>
             <a:r>
-              <a:t>Las 5 dimensiones de justificación vienen directamente del primer trabajo de Emprendimiento — no fueron construidas retroactivamente para la tesis.</a:t>
+              <a:t>VotoAfin no produce informacion nueva. Organiza, compara y presenta</a:t>
+            </a:r>
+          </a:p>
+          <a:p>
+            <a:r>
+              <a:t>la informacion que ya existe en el registro publico.</a:t>
             </a:r>
           </a:p>
           <a:p/>
           <a:p>
             <a:r>
-              <a:t>El cierre de esta slide prepara la transición a la Presentación 2: cómo evolucionó la respuesta desde esa oportunidad identificada.</a:t>
+              <a:t>Este argumento es el que justifica el proyecto desde la ingenieria de software.</a:t>
             </a:r>
           </a:p>
         </p:txBody>
@@ -1054,56 +1110,50 @@
           <a:lstStyle/>
           <a:p>
             <a:r>
-              <a:t>CIERRE de la presentación 1.</a:t>
+              <a:t>CIERRE -- Tiempo estimado: 10-13 minutos con buena cadencia.</a:t>
             </a:r>
           </a:p>
           <a:p/>
           <a:p>
             <a:r>
-              <a:t>Tiempo estimado: 10–13 minutos con buena cadencia.</a:t>
+              <a:t>Mensajes de salida:</a:t>
+            </a:r>
+          </a:p>
+          <a:p>
+            <a:r>
+              <a:t>  -- El problema esta documentado con datos primarios y secundarios.</a:t>
+            </a:r>
+          </a:p>
+          <a:p>
+            <a:r>
+              <a:t>  -- El 21% informado y el +460% en votos nulos son el punto de partida.</a:t>
+            </a:r>
+          </a:p>
+          <a:p>
+            <a:r>
+              <a:t>  -- Las herramientas existentes no lo resolvian.</a:t>
+            </a:r>
+          </a:p>
+          <a:p>
+            <a:r>
+              <a:t>  -- La brecha estaba abierta.</a:t>
             </a:r>
           </a:p>
           <a:p/>
           <a:p>
             <a:r>
-              <a:t>Mensaje de salida para la audiencia:</a:t>
-            </a:r>
-          </a:p>
-          <a:p>
-            <a:r>
-              <a:t>- El problema está documentado con datos primarios y secundarios.</a:t>
-            </a:r>
-          </a:p>
-          <a:p>
-            <a:r>
-              <a:t>- No es una percepción subjetiva: es un fenómeno medible.</a:t>
-            </a:r>
-          </a:p>
-          <a:p>
-            <a:r>
-              <a:t>- Las herramientas existentes no lo resolvían.</a:t>
-            </a:r>
-          </a:p>
-          <a:p>
-            <a:r>
-              <a:t>- La brecha estaba abierta.</a:t>
+              <a:t>Pregunta para dejar en el aire:</a:t>
+            </a:r>
+          </a:p>
+          <a:p>
+            <a:r>
+              <a:t>'?Y cual fue la primera respuesta que intentamos darle al problema?'</a:t>
             </a:r>
           </a:p>
           <a:p/>
           <a:p>
             <a:r>
-              <a:t>Pregunta para dejar en el aire antes de la siguiente presentación:</a:t>
-            </a:r>
-          </a:p>
-          <a:p>
-            <a:r>
-              <a:t>'¿Y cuál fue la primera respuesta que intentamos darle?'</a:t>
-            </a:r>
-          </a:p>
-          <a:p/>
-          <a:p>
-            <a:r>
-              <a:t>Espacio para preguntas breves si el formato lo permite.</a:t>
+              <a:t>Espacio para preguntas si el formato lo permite.</a:t>
             </a:r>
           </a:p>
         </p:txBody>
@@ -1173,25 +1223,29 @@
           <a:lstStyle/>
           <a:p>
             <a:r>
-              <a:t>Establecer el contexto temporal: Chile tuvo entre 2020 y 2024 una densidad electoral sin precedentes en su historia democrática reciente.</a:t>
+              <a:t>Chile tuvo entre 2020 y 2024 una densidad electoral sin precedentes.</a:t>
+            </a:r>
+          </a:p>
+          <a:p>
+            <a:r>
+              <a:t>Ningun otro periodo de cuatro anos en la historia chilena tuvo tantos procesos consecutivos.</a:t>
             </a:r>
           </a:p>
           <a:p/>
           <a:p>
             <a:r>
-              <a:t>Ningún otro período de cuatro años en la historia chilena tuvo tantos procesos electorales consecutivos.</a:t>
+              <a:t>Los analistas comenzaron a documentar la 'fatiga electoral':</a:t>
+            </a:r>
+          </a:p>
+          <a:p>
+            <a:r>
+              <a:t>a medida que se sucedian los procesos, los ciudadanos invertian menos atencion en informarse.</a:t>
             </a:r>
           </a:p>
           <a:p/>
           <a:p>
             <a:r>
-              <a:t>Los analistas electorales comenzaron a documentar un fenómeno que llamaron 'fatiga electoral': a medida que se sucedían los procesos, los ciudadanos invertían cada vez menos atención en informarse.</a:t>
-            </a:r>
-          </a:p>
-          <a:p/>
-          <a:p>
-            <a:r>
-              <a:t>Esta acumulación es el escenario donde nace el problema que este proyecto busca resolver.</a:t>
+              <a:t>Este contexto es el escenario donde nace el problema que VotoAfin busca resolver.</a:t>
             </a:r>
           </a:p>
         </p:txBody>
@@ -1261,25 +1315,18 @@
           <a:lstStyle/>
           <a:p>
             <a:r>
-              <a:t>Esta cita encapsula la consecuencia central de la densidad electoral.</a:t>
+              <a:t>Esta cita encapsula la consecuencia de la densidad electoral: no es solo cansancio, es una reduccion activa en la disposicion a informarse.</a:t>
             </a:r>
           </a:p>
           <a:p/>
           <a:p>
             <a:r>
-              <a:t>La fatiga no es solo cansancio: es una reducción activa en la disposición a invertir tiempo y atención en informarse.</a:t>
-            </a:r>
-          </a:p>
-          <a:p/>
-          <a:p>
-            <a:r>
-              <a:t>Claudio Fuentes (UDP) identificó tres causas del fenómeno con precisión: desinformación, desinterés y desconfianza — las tres 'D'.</a:t>
-            </a:r>
-          </a:p>
-          <a:p/>
-          <a:p>
-            <a:r>
-              <a:t>Cada una de esas 'D' representa una dimensión distinta del problema que VotoAFin intentó abordar.</a:t>
+              <a:t>Claudio Fuentes (UDP) identifico tres causas: desinformacion, desinteres, desconfianza.</a:t>
+            </a:r>
+          </a:p>
+          <a:p>
+            <a:r>
+              <a:t>Las tres 'D' sintetizan el problema que VotoAfin busca abordar.</a:t>
             </a:r>
           </a:p>
         </p:txBody>
@@ -1349,31 +1396,29 @@
           <a:lstStyle/>
           <a:p>
             <a:r>
-              <a:t>Fuente: Informe Claves Ipsos N°33 — elecciones municipales octubre 2024.</a:t>
+              <a:t>Fuente: Informe Claves Ipsos N33 -- Municipales octubre 2024.</a:t>
             </a:r>
           </a:p>
           <a:p/>
           <a:p>
             <a:r>
-              <a:t>Solo el 21% 'muy informado'. Para perspectiva: el 83% sabía que se elegía alcalde, el cargo más mediático. Pero apenas el 55% sabía que también se elegían concejales.</a:t>
+              <a:t>Solo el 21% 'muy informado' -- y eso en el cargo de MAYOR visibilidad.</a:t>
+            </a:r>
+          </a:p>
+          <a:p>
+            <a:r>
+              <a:t>Para concejales: 60% indeciso. Para gobernadores: 64%. Para consejeros: 68%.</a:t>
             </a:r>
           </a:p>
           <a:p/>
           <a:p>
             <a:r>
-              <a:t>El 42% no había decidido su voto para alcalde al momento de la encuesta. Para gobernador: 64%. Para consejeros regionales: 68%.</a:t>
-            </a:r>
-          </a:p>
-          <a:p/>
-          <a:p>
-            <a:r>
-              <a:t>Conclusión directa: una proporción significativa del electorado ejercía su derecho a voto sin información adecuada sobre los candidatos.</a:t>
-            </a:r>
-          </a:p>
-          <a:p/>
-          <a:p>
-            <a:r>
-              <a:t>El voto deja de ser una decisión informada para convertirse en una decisión bajo incertidumbre.</a:t>
+              <a:t>Conclusion: una proporcion significativa del electorado voto sin informacion</a:t>
+            </a:r>
+          </a:p>
+          <a:p>
+            <a:r>
+              <a:t>adecuada sobre los candidatos. El voto se convirtio en una decision bajo incertidumbre.</a:t>
             </a:r>
           </a:p>
         </p:txBody>
@@ -1443,31 +1488,35 @@
           <a:lstStyle/>
           <a:p>
             <a:r>
-              <a:t>Fuente: estudio 'Fake News y Desinformación en Chile y LatAm' — Activa Knowledge for Action.</a:t>
+              <a:t>Fuente: Activa Knowledge for Action -- 'Fake News y Desinformacion en Chile y LatAm'.</a:t>
             </a:r>
           </a:p>
           <a:p/>
           <a:p>
             <a:r>
-              <a:t>El 52% encuentra desinformación TODOS LOS DÍAS. El 29% al menos una vez a la semana. Total semanal o más: 81%.</a:t>
+              <a:t>El 52% encuentra desinformacion TODOS LOS DIAS. 29% al menos una vez por semana.</a:t>
+            </a:r>
+          </a:p>
+          <a:p>
+            <a:r>
+              <a:t>Suma semanal o mas: 81% del electorado.</a:t>
             </a:r>
           </a:p>
           <a:p/>
           <a:p>
             <a:r>
-              <a:t>Las tres fuentes principales de información declaradas: televisión (35%), noticias online (14%), Facebook (12%). Exactamente las fuentes en que menos confían.</a:t>
+              <a:t>Paradoja: las tres fuentes mas usadas (TV 35%, noticias online 14%, Facebook 12%)</a:t>
+            </a:r>
+          </a:p>
+          <a:p>
+            <a:r>
+              <a:t>son exactamente aquellas en que menos confian.</a:t>
             </a:r>
           </a:p>
           <a:p/>
           <a:p>
             <a:r>
-              <a:t>El 79% de desconfianza en políticos como fuente es especialmente relevante: el principal emisor de mensajes electorales es el actor que menos credibilidad tiene.</a:t>
-            </a:r>
-          </a:p>
-          <a:p/>
-          <a:p>
-            <a:r>
-              <a:t>Este es el ecosistema informativo en el que el votante promedio intenta tomar una decisión de voto.</a:t>
+              <a:t>El dato del 100% proviene del levantamiento de campo propio (12 entrevistas en Valparaiso).</a:t>
             </a:r>
           </a:p>
         </p:txBody>
@@ -1537,31 +1586,39 @@
           <a:lstStyle/>
           <a:p>
             <a:r>
-              <a:t>Fuente: Servicio Electoral de Chile (SERVEL), datos comparativos 2021-2024.</a:t>
+              <a:t>El +460% en votos nulos para alcalde es el indicador mas dramatico:</a:t>
+            </a:r>
+          </a:p>
+          <a:p>
+            <a:r>
+              <a:t>mismo cargo, mismo electorado, cuatro anos despues.</a:t>
             </a:r>
           </a:p>
           <a:p/>
           <a:p>
             <a:r>
-              <a:t>El +460% en votos nulos para alcalde es el número más dramático del dataset. Es prácticamente el mismo cargo, el mismo electorado, cuatro años después.</a:t>
+              <a:t>Los expertos del SERVEL fueron explícitos:</a:t>
+            </a:r>
+          </a:p>
+          <a:p>
+            <a:r>
+              <a:t>'Los votos blancos normalmente son el resultado de la desinformacion.</a:t>
+            </a:r>
+          </a:p>
+          <a:p>
+            <a:r>
+              <a:t>En este proceso hubo poca informacion. Poca gente sabia lo que se votaba.'</a:t>
             </a:r>
           </a:p>
           <a:p/>
           <a:p>
             <a:r>
-              <a:t>La interpretación de los expertos del SERVEL fue directa: 'en este proceso hubo poca información. Poca gente sabía lo que se votaba.'</a:t>
-            </a:r>
-          </a:p>
-          <a:p/>
-          <a:p>
-            <a:r>
-              <a:t>En los procesos constitucionales, más de dos millones de personas emitieron un sufragio nulo — el equivalente de la población de Santiago y Valparaíso juntos.</a:t>
-            </a:r>
-          </a:p>
-          <a:p/>
-          <a:p>
-            <a:r>
-              <a:t>Estos números no son abstractos: son ciudadanos que llegaron a votar pero no pudieron ejercer su derecho de manera informada.</a:t>
+              <a:t>2,1 millones de sufragios nulos en los procesos constitucionales =</a:t>
+            </a:r>
+          </a:p>
+          <a:p>
+            <a:r>
+              <a:t>el equivalente a la poblacion de Santiago y Valparaiso juntos.</a:t>
             </a:r>
           </a:p>
         </p:txBody>
@@ -1631,19 +1688,34 @@
           <a:lstStyle/>
           <a:p>
             <a:r>
-              <a:t>Transición a la segunda parte de esta presentación.</a:t>
+              <a:t>La sobrecarga informativa no es solo 'mucha informacion':</a:t>
+            </a:r>
+          </a:p>
+          <a:p>
+            <a:r>
+              <a:t>es la combinacion de volumen + falta de estructura + desinformacion activa.</a:t>
             </a:r>
           </a:p>
           <a:p/>
           <a:p>
             <a:r>
-              <a:t>Hasta ahora vimos los números nacionales. Ahora vamos a los datos propios: la investigación de campo que el equipo realizó en el contexto del curso de Emprendimiento de la UTFSM.</a:t>
+              <a:t>El votante promedio no tiene tiempo de leer los programas de cada candidato</a:t>
+            </a:r>
+          </a:p>
+          <a:p>
+            <a:r>
+              <a:t>para cada uno de los multiples cargos en disputa.</a:t>
             </a:r>
           </a:p>
           <a:p/>
           <a:p>
             <a:r>
-              <a:t>La investigación no fue bibliográfica: fue a la calle, con personas reales, en comunas reales del área metropolitana de Valparaíso.</a:t>
+              <a:t>Las herramientas que existian eran pasivas: el usuario debia saber que buscar</a:t>
+            </a:r>
+          </a:p>
+          <a:p>
+            <a:r>
+              <a:t>y tener disposicion a leer extensamente. Ese es el punto de quiebre.</a:t>
             </a:r>
           </a:p>
         </p:txBody>
@@ -1713,25 +1785,39 @@
           <a:lstStyle/>
           <a:p>
             <a:r>
-              <a:t>La investigación combinó fuentes secundarias (Ipsos, Activa, SERVEL) con trabajo de campo propio.</a:t>
+              <a:t>La investigacion combino fuentes secundarias (Ipsos, Activa, SERVEL)</a:t>
+            </a:r>
+          </a:p>
+          <a:p>
+            <a:r>
+              <a:t>con trabajo de campo propio en tres comunas del Gran Valparaiso.</a:t>
             </a:r>
           </a:p>
           <a:p/>
           <a:p>
             <a:r>
-              <a:t>Las 12 entrevistas en tres comunas con perfiles distintos permitieron triangular los datos nacionales con observación directa.</a:t>
+              <a:t>Las 12 entrevistas no son estadisticamente representativas -- el equipo</a:t>
+            </a:r>
+          </a:p>
+          <a:p>
+            <a:r>
+              <a:t>fue explícito en ese punto -- pero si ofrecen triangulacion cualitativa</a:t>
+            </a:r>
+          </a:p>
+          <a:p>
+            <a:r>
+              <a:t>de los datos nacionales.</a:t>
             </a:r>
           </a:p>
           <a:p/>
           <a:p>
             <a:r>
-              <a:t>La metodología fue simple e intencional: respuestas dicotómicas para facilitar el análisis comparativo y mantener la coherencia entre entrevistadores.</a:t>
-            </a:r>
-          </a:p>
-          <a:p/>
-          <a:p>
-            <a:r>
-              <a:t>No es una muestra estadísticamente representativa — el equipo fue explícito en ese punto — pero sí un levantamiento de evidencia cualitativa con consistencia interna.</a:t>
+              <a:t>El hallazgo mas contundente: 12 de 12 entrevistados habian visto fake news</a:t>
+            </a:r>
+          </a:p>
+          <a:p>
+            <a:r>
+              <a:t>electorales. No hubo ninguna excepcion.</a:t>
             </a:r>
           </a:p>
         </p:txBody>
@@ -1801,31 +1887,39 @@
           <a:lstStyle/>
           <a:p>
             <a:r>
-              <a:t>El hallazgo más contundente: el 100% de los entrevistados — 12 de 12 — aseguró haber visto o conocer la existencia de fake news electorales.</a:t>
+              <a:t>Estos datos son coherentes con el panorama nacional:</a:t>
+            </a:r>
+          </a:p>
+          <a:p>
+            <a:r>
+              <a:t>  - 83% redes sociales (vs 35% TV + 14% online a nivel nacional)</a:t>
+            </a:r>
+          </a:p>
+          <a:p>
+            <a:r>
+              <a:t>  - 50% no conocia candidatos (vs 21% 'muy informado' a nivel nacional)</a:t>
             </a:r>
           </a:p>
           <a:p/>
           <a:p>
             <a:r>
-              <a:t>Igualmente, el 100% declaró creer que existe desinformación generalizada en Chile. No hubo ninguna persona que considerara que el fenómeno no existía.</a:t>
+              <a:t>La investigacion de campo no contradijo los datos secundarios;</a:t>
+            </a:r>
+          </a:p>
+          <a:p>
+            <a:r>
+              <a:t>los confirmo con observacion directa en el territorio.</a:t>
             </a:r>
           </a:p>
           <a:p/>
           <a:p>
             <a:r>
-              <a:t>El ~83% se informaba por redes sociales vs apenas ~25% por canales oficiales.</a:t>
-            </a:r>
-          </a:p>
-          <a:p/>
-          <a:p>
-            <a:r>
-              <a:t>La mitad de los entrevistados no conocía a los candidatos en competencia para el proceso electoral en curso.</a:t>
-            </a:r>
-          </a:p>
-          <a:p/>
-          <a:p>
-            <a:r>
-              <a:t>Estos datos son coherentes con el panorama nacional: 21% muy informado vs exposición masiva a desinformación.</a:t>
+              <a:t>Esto le da solidez empirica a la hipotesis de que el problema es real,</a:t>
+            </a:r>
+          </a:p>
+          <a:p>
+            <a:r>
+              <a:t>medible y consistente entre fuentes.</a:t>
             </a:r>
           </a:p>
         </p:txBody>
@@ -4847,8 +4941,8 @@
         </p:nvSpPr>
         <p:spPr>
           <a:xfrm>
-            <a:off x="640080" y="2011680"/>
-            <a:ext cx="54864" cy="2286000"/>
+            <a:off x="0" y="0"/>
+            <a:ext cx="12191695" cy="45720"/>
           </a:xfrm>
           <a:prstGeom prst="rect">
             <a:avLst/>
@@ -4890,8 +4984,8 @@
         </p:nvSpPr>
         <p:spPr>
           <a:xfrm>
-            <a:off x="640080" y="1463040"/>
-            <a:ext cx="10911535" cy="457200"/>
+            <a:off x="640080" y="1371600"/>
+            <a:ext cx="10911535" cy="365760"/>
           </a:xfrm>
           <a:prstGeom prst="rect">
             <a:avLst/>
@@ -4899,33 +4993,75 @@
           <a:noFill/>
         </p:spPr>
         <p:txBody>
-          <a:bodyPr wrap="square">
+          <a:bodyPr wrap="none">
             <a:spAutoFit/>
           </a:bodyPr>
           <a:lstStyle/>
           <a:p>
-            <a:pPr algn="l"/>
-            <a:r>
-              <a:rPr sz="1100" b="1" i="0">
+            <a:r>
+              <a:rPr sz="1000" b="1">
                 <a:solidFill>
                   <a:srgbClr val="3A9E7A"/>
                 </a:solidFill>
               </a:rPr>
-              <a:t>PRESENTACIÓN 1 DE 4  ·  PROBLEMA, INVESTIGACIÓN Y CONTEXTO</a:t>
-            </a:r>
-          </a:p>
-        </p:txBody>
-      </p:sp>
-      <p:sp>
-        <p:nvSpPr>
-          <p:cNvPr id="4" name="TextBox 3"/>
+              <a:t>PRESENTACION 1 DE 4  --  PROBLEMA, INVESTIGACION Y CONTEXTO</a:t>
+            </a:r>
+          </a:p>
+        </p:txBody>
+      </p:sp>
+      <p:sp>
+        <p:nvSpPr>
+          <p:cNvPr id="4" name="Rectangle 3"/>
+          <p:cNvSpPr/>
+          <p:nvPr/>
+        </p:nvSpPr>
+        <p:spPr>
+          <a:xfrm>
+            <a:off x="640080" y="1874519"/>
+            <a:ext cx="45720" cy="2560320"/>
+          </a:xfrm>
+          <a:prstGeom prst="rect">
+            <a:avLst/>
+          </a:prstGeom>
+          <a:solidFill>
+            <a:srgbClr val="3A9E7A"/>
+          </a:solidFill>
+          <a:ln>
+            <a:noFill/>
+          </a:ln>
+        </p:spPr>
+        <p:style>
+          <a:lnRef idx="1">
+            <a:schemeClr val="accent1"/>
+          </a:lnRef>
+          <a:fillRef idx="3">
+            <a:schemeClr val="accent1"/>
+          </a:fillRef>
+          <a:effectRef idx="2">
+            <a:schemeClr val="accent1"/>
+          </a:effectRef>
+          <a:fontRef idx="minor">
+            <a:schemeClr val="lt1"/>
+          </a:fontRef>
+        </p:style>
+        <p:txBody>
+          <a:bodyPr rtlCol="0" anchor="ctr"/>
+          <a:lstStyle/>
+          <a:p>
+            <a:pPr algn="ctr"/>
+          </a:p>
+        </p:txBody>
+      </p:sp>
+      <p:sp>
+        <p:nvSpPr>
+          <p:cNvPr id="5" name="TextBox 4"/>
           <p:cNvSpPr txBox="1"/>
           <p:nvPr/>
         </p:nvSpPr>
         <p:spPr>
           <a:xfrm>
-            <a:off x="640080" y="2194560"/>
-            <a:ext cx="10911535" cy="2286000"/>
+            <a:off x="822960" y="1920240"/>
+            <a:ext cx="10728655" cy="2377440"/>
           </a:xfrm>
           <a:prstGeom prst="rect">
             <a:avLst/>
@@ -4938,28 +5074,27 @@
           </a:bodyPr>
           <a:lstStyle/>
           <a:p>
-            <a:pPr algn="l"/>
-            <a:r>
-              <a:rPr sz="4400" b="1">
+            <a:r>
+              <a:rPr sz="4200" b="1">
                 <a:solidFill>
                   <a:srgbClr val="FFFFFF"/>
                 </a:solidFill>
               </a:rPr>
-              <a:t>El Voto Sin Información</a:t>
-            </a:r>
-          </a:p>
-        </p:txBody>
-      </p:sp>
-      <p:sp>
-        <p:nvSpPr>
-          <p:cNvPr id="5" name="TextBox 4"/>
+              <a:t>El Voto Sin Informacion</a:t>
+            </a:r>
+          </a:p>
+        </p:txBody>
+      </p:sp>
+      <p:sp>
+        <p:nvSpPr>
+          <p:cNvPr id="6" name="TextBox 5"/>
           <p:cNvSpPr txBox="1"/>
           <p:nvPr/>
         </p:nvSpPr>
         <p:spPr>
           <a:xfrm>
-            <a:off x="640080" y="4480560"/>
-            <a:ext cx="10911535" cy="1097280"/>
+            <a:off x="822960" y="4480560"/>
+            <a:ext cx="10728655" cy="1097280"/>
           </a:xfrm>
           <a:prstGeom prst="rect">
             <a:avLst/>
@@ -4972,28 +5107,27 @@
           </a:bodyPr>
           <a:lstStyle/>
           <a:p>
-            <a:pPr algn="l"/>
-            <a:r>
-              <a:rPr sz="1800" b="0">
+            <a:r>
+              <a:rPr sz="1700" b="0">
                 <a:solidFill>
                   <a:srgbClr val="4A9BBF"/>
                 </a:solidFill>
               </a:rPr>
-              <a:t>Desinformación electoral, participación ciudadana y la oportunidad de la tecnología cívica</a:t>
-            </a:r>
-          </a:p>
-        </p:txBody>
-      </p:sp>
-      <p:sp>
-        <p:nvSpPr>
-          <p:cNvPr id="6" name="TextBox 5"/>
+              <a:t>Desinformacion, apatia y la oportunidad de la tecnologia civica</a:t>
+            </a:r>
+          </a:p>
+        </p:txBody>
+      </p:sp>
+      <p:sp>
+        <p:nvSpPr>
+          <p:cNvPr id="7" name="TextBox 6"/>
           <p:cNvSpPr txBox="1"/>
           <p:nvPr/>
         </p:nvSpPr>
         <p:spPr>
           <a:xfrm>
-            <a:off x="640080" y="6217920"/>
-            <a:ext cx="10911535" cy="365760"/>
+            <a:off x="640080" y="6263640"/>
+            <a:ext cx="10911535" cy="320040"/>
           </a:xfrm>
           <a:prstGeom prst="rect">
             <a:avLst/>
@@ -5013,7 +5147,7 @@
                   <a:srgbClr val="7BA098"/>
                 </a:solidFill>
               </a:rPr>
-              <a:t>VotoAFin · UTFSM · Jenifer Castillo · 2026</a:t>
+              <a:t>VotoAfin  --  UTFSM  --  Jenifer Castillo  --  2026</a:t>
             </a:r>
           </a:p>
         </p:txBody>
@@ -5032,7 +5166,7 @@
     <p:bg>
       <p:bgPr>
         <a:solidFill>
-          <a:srgbClr val="244A63"/>
+          <a:srgbClr val="2E5F7E"/>
         </a:solidFill>
         <a:effectLst/>
       </p:bgPr>
@@ -5046,14 +5180,57 @@
       <p:grpSpPr/>
       <p:sp>
         <p:nvSpPr>
-          <p:cNvPr id="2" name="TextBox 1"/>
+          <p:cNvPr id="2" name="Rectangle 1"/>
+          <p:cNvSpPr/>
+          <p:nvPr/>
+        </p:nvSpPr>
+        <p:spPr>
+          <a:xfrm>
+            <a:off x="0" y="0"/>
+            <a:ext cx="12191695" cy="45720"/>
+          </a:xfrm>
+          <a:prstGeom prst="rect">
+            <a:avLst/>
+          </a:prstGeom>
+          <a:solidFill>
+            <a:srgbClr val="3A9E7A"/>
+          </a:solidFill>
+          <a:ln>
+            <a:noFill/>
+          </a:ln>
+        </p:spPr>
+        <p:style>
+          <a:lnRef idx="1">
+            <a:schemeClr val="accent1"/>
+          </a:lnRef>
+          <a:fillRef idx="3">
+            <a:schemeClr val="accent1"/>
+          </a:fillRef>
+          <a:effectRef idx="2">
+            <a:schemeClr val="accent1"/>
+          </a:effectRef>
+          <a:fontRef idx="minor">
+            <a:schemeClr val="lt1"/>
+          </a:fontRef>
+        </p:style>
+        <p:txBody>
+          <a:bodyPr rtlCol="0" anchor="ctr"/>
+          <a:lstStyle/>
+          <a:p>
+            <a:pPr algn="ctr"/>
+          </a:p>
+        </p:txBody>
+      </p:sp>
+      <p:sp>
+        <p:nvSpPr>
+          <p:cNvPr id="3" name="TextBox 2"/>
           <p:cNvSpPr txBox="1"/>
           <p:nvPr/>
         </p:nvSpPr>
         <p:spPr>
           <a:xfrm>
-            <a:off x="640080" y="457200"/>
-            <a:ext cx="1371600" cy="1371600"/>
+            <a:off x="8686800" y="457200"/>
+            <a:ext cx="3200400" cy="4572000"/>
           </a:xfrm>
           <a:prstGeom prst="rect">
             <a:avLst/>
@@ -5066,27 +5243,71 @@
           </a:bodyPr>
           <a:lstStyle/>
           <a:p>
-            <a:r>
-              <a:rPr sz="9600" b="1">
+            <a:pPr algn="r"/>
+            <a:r>
+              <a:rPr sz="16000" b="1">
                 <a:solidFill>
-                  <a:srgbClr val="3A9E7A"/>
+                  <a:srgbClr val="244A63"/>
                 </a:solidFill>
               </a:rPr>
-              <a:t>“</a:t>
-            </a:r>
-          </a:p>
-        </p:txBody>
-      </p:sp>
-      <p:sp>
-        <p:nvSpPr>
-          <p:cNvPr id="3" name="TextBox 2"/>
+              <a:t>!</a:t>
+            </a:r>
+          </a:p>
+        </p:txBody>
+      </p:sp>
+      <p:sp>
+        <p:nvSpPr>
+          <p:cNvPr id="4" name="Rectangle 3"/>
+          <p:cNvSpPr/>
+          <p:nvPr/>
+        </p:nvSpPr>
+        <p:spPr>
+          <a:xfrm>
+            <a:off x="640080" y="2560320"/>
+            <a:ext cx="54864" cy="1645920"/>
+          </a:xfrm>
+          <a:prstGeom prst="rect">
+            <a:avLst/>
+          </a:prstGeom>
+          <a:solidFill>
+            <a:srgbClr val="3A9E7A"/>
+          </a:solidFill>
+          <a:ln>
+            <a:noFill/>
+          </a:ln>
+        </p:spPr>
+        <p:style>
+          <a:lnRef idx="1">
+            <a:schemeClr val="accent1"/>
+          </a:lnRef>
+          <a:fillRef idx="3">
+            <a:schemeClr val="accent1"/>
+          </a:fillRef>
+          <a:effectRef idx="2">
+            <a:schemeClr val="accent1"/>
+          </a:effectRef>
+          <a:fontRef idx="minor">
+            <a:schemeClr val="lt1"/>
+          </a:fontRef>
+        </p:style>
+        <p:txBody>
+          <a:bodyPr rtlCol="0" anchor="ctr"/>
+          <a:lstStyle/>
+          <a:p>
+            <a:pPr algn="ctr"/>
+          </a:p>
+        </p:txBody>
+      </p:sp>
+      <p:sp>
+        <p:nvSpPr>
+          <p:cNvPr id="5" name="TextBox 4"/>
           <p:cNvSpPr txBox="1"/>
           <p:nvPr/>
         </p:nvSpPr>
         <p:spPr>
           <a:xfrm>
-            <a:off x="640080" y="1371600"/>
-            <a:ext cx="10911535" cy="3657600"/>
+            <a:off x="822960" y="2560320"/>
+            <a:ext cx="7772400" cy="1645920"/>
           </a:xfrm>
           <a:prstGeom prst="rect">
             <a:avLst/>
@@ -5099,28 +5320,27 @@
           </a:bodyPr>
           <a:lstStyle/>
           <a:p>
-            <a:pPr algn="l"/>
-            <a:r>
-              <a:rPr sz="2200" b="0" i="1">
+            <a:r>
+              <a:rPr sz="3800" b="1">
                 <a:solidFill>
                   <a:srgbClr val="FFFFFF"/>
                 </a:solidFill>
               </a:rPr>
-              <a:t>Solo un 21% de las personas se siente realmente informado y con la presencia de las fake news este número está en crecimiento. Dejando un espacio de oportunidad para encontrar una solución que reúna información confiable sobre candidatos y elecciones, accesible para todos.</a:t>
-            </a:r>
-          </a:p>
-        </p:txBody>
-      </p:sp>
-      <p:sp>
-        <p:nvSpPr>
-          <p:cNvPr id="4" name="TextBox 3"/>
+              <a:t>La Oportunidad</a:t>
+            </a:r>
+          </a:p>
+        </p:txBody>
+      </p:sp>
+      <p:sp>
+        <p:nvSpPr>
+          <p:cNvPr id="6" name="TextBox 5"/>
           <p:cNvSpPr txBox="1"/>
           <p:nvPr/>
         </p:nvSpPr>
         <p:spPr>
           <a:xfrm>
-            <a:off x="640080" y="5120640"/>
-            <a:ext cx="10911535" cy="548640"/>
+            <a:off x="822960" y="4297680"/>
+            <a:ext cx="7772400" cy="731520"/>
           </a:xfrm>
           <a:prstGeom prst="rect">
             <a:avLst/>
@@ -5128,19 +5348,18 @@
           <a:noFill/>
         </p:spPr>
         <p:txBody>
-          <a:bodyPr wrap="none">
+          <a:bodyPr wrap="square">
             <a:spAutoFit/>
           </a:bodyPr>
           <a:lstStyle/>
           <a:p>
-            <a:pPr algn="r"/>
-            <a:r>
-              <a:rPr sz="1300" b="1">
+            <a:r>
+              <a:rPr sz="1600">
                 <a:solidFill>
-                  <a:srgbClr val="7BA098"/>
+                  <a:srgbClr val="4A9BBF"/>
                 </a:solidFill>
               </a:rPr>
-              <a:t>— Castillo, De Lima y Sánchez — Emprendimiento I, UTFSM, 2024</a:t>
+              <a:t>Un espacio vacio. Una necesidad real. Un problema abordable.</a:t>
             </a:r>
           </a:p>
         </p:txBody>
@@ -5180,7 +5399,7 @@
         <p:spPr>
           <a:xfrm>
             <a:off x="0" y="0"/>
-            <a:ext cx="12191695" cy="73152"/>
+            <a:ext cx="12191695" cy="64008"/>
           </a:xfrm>
           <a:prstGeom prst="rect">
             <a:avLst/>
@@ -5222,8 +5441,8 @@
         </p:nvSpPr>
         <p:spPr>
           <a:xfrm>
-            <a:off x="640080" y="274320"/>
-            <a:ext cx="10911535" cy="731520"/>
+            <a:off x="640080" y="256032"/>
+            <a:ext cx="10911535" cy="685800"/>
           </a:xfrm>
           <a:prstGeom prst="rect">
             <a:avLst/>
@@ -5231,7 +5450,7 @@
           <a:noFill/>
         </p:spPr>
         <p:txBody>
-          <a:bodyPr wrap="square">
+          <a:bodyPr wrap="none">
             <a:spAutoFit/>
           </a:bodyPr>
           <a:lstStyle/>
@@ -5242,7 +5461,7 @@
                   <a:srgbClr val="1C3A52"/>
                 </a:solidFill>
               </a:rPr>
-              <a:t>Las herramientas existentes — y por qué fallaban</a:t>
+              <a:t>El ecosistema existente -- y por que no era suficiente</a:t>
             </a:r>
           </a:p>
         </p:txBody>
@@ -5255,14 +5474,14 @@
         </p:nvSpPr>
         <p:spPr>
           <a:xfrm>
-            <a:off x="6095847" y="1188720"/>
-            <a:ext cx="18288" cy="5303520"/>
+            <a:off x="640080" y="1188720"/>
+            <a:ext cx="5341467" cy="502920"/>
           </a:xfrm>
           <a:prstGeom prst="rect">
             <a:avLst/>
           </a:prstGeom>
           <a:solidFill>
-            <a:srgbClr val="CBD1CD"/>
+            <a:srgbClr val="DC2626"/>
           </a:solidFill>
           <a:ln>
             <a:noFill/>
@@ -5298,8 +5517,8 @@
         </p:nvSpPr>
         <p:spPr>
           <a:xfrm>
-            <a:off x="640080" y="1097280"/>
-            <a:ext cx="5272887" cy="457200"/>
+            <a:off x="777240" y="1234440"/>
+            <a:ext cx="5067147" cy="411480"/>
           </a:xfrm>
           <a:prstGeom prst="rect">
             <a:avLst/>
@@ -5312,13 +5531,14 @@
           </a:bodyPr>
           <a:lstStyle/>
           <a:p>
+            <a:pPr algn="ctr"/>
             <a:r>
               <a:rPr sz="1400" b="1">
                 <a:solidFill>
-                  <a:srgbClr val="2E5F7E"/>
+                  <a:srgbClr val="FFFFFF"/>
                 </a:solidFill>
               </a:rPr>
-              <a:t>Lo que existía en Chile</a:t>
+              <a:t>Lo que existia en Chile</a:t>
             </a:r>
           </a:p>
         </p:txBody>
@@ -5331,8 +5551,433 @@
         </p:nvSpPr>
         <p:spPr>
           <a:xfrm>
-            <a:off x="640080" y="1554480"/>
-            <a:ext cx="731520" cy="36576"/>
+            <a:off x="640080" y="1691640"/>
+            <a:ext cx="5341467" cy="4846320"/>
+          </a:xfrm>
+          <a:prstGeom prst="rect">
+            <a:avLst/>
+          </a:prstGeom>
+          <a:solidFill>
+            <a:srgbClr val="FFFFFF"/>
+          </a:solidFill>
+          <a:ln w="12700">
+            <a:solidFill>
+              <a:srgbClr val="CBD1CD"/>
+            </a:solidFill>
+          </a:ln>
+        </p:spPr>
+        <p:style>
+          <a:lnRef idx="1">
+            <a:schemeClr val="accent1"/>
+          </a:lnRef>
+          <a:fillRef idx="3">
+            <a:schemeClr val="accent1"/>
+          </a:fillRef>
+          <a:effectRef idx="2">
+            <a:schemeClr val="accent1"/>
+          </a:effectRef>
+          <a:fontRef idx="minor">
+            <a:schemeClr val="lt1"/>
+          </a:fontRef>
+        </p:style>
+        <p:txBody>
+          <a:bodyPr rtlCol="0" anchor="ctr"/>
+          <a:lstStyle/>
+          <a:p>
+            <a:pPr algn="ctr"/>
+          </a:p>
+        </p:txBody>
+      </p:sp>
+      <p:sp>
+        <p:nvSpPr>
+          <p:cNvPr id="7" name="Oval 6"/>
+          <p:cNvSpPr/>
+          <p:nvPr/>
+        </p:nvSpPr>
+        <p:spPr>
+          <a:xfrm>
+            <a:off x="822960" y="1984247"/>
+            <a:ext cx="146304" cy="146304"/>
+          </a:xfrm>
+          <a:prstGeom prst="ellipse">
+            <a:avLst/>
+          </a:prstGeom>
+          <a:solidFill>
+            <a:srgbClr val="DC2626"/>
+          </a:solidFill>
+          <a:ln>
+            <a:noFill/>
+          </a:ln>
+        </p:spPr>
+        <p:style>
+          <a:lnRef idx="1">
+            <a:schemeClr val="accent1"/>
+          </a:lnRef>
+          <a:fillRef idx="3">
+            <a:schemeClr val="accent1"/>
+          </a:fillRef>
+          <a:effectRef idx="2">
+            <a:schemeClr val="accent1"/>
+          </a:effectRef>
+          <a:fontRef idx="minor">
+            <a:schemeClr val="lt1"/>
+          </a:fontRef>
+        </p:style>
+        <p:txBody>
+          <a:bodyPr rtlCol="0" anchor="ctr"/>
+          <a:lstStyle/>
+          <a:p>
+            <a:pPr algn="ctr"/>
+          </a:p>
+        </p:txBody>
+      </p:sp>
+      <p:sp>
+        <p:nvSpPr>
+          <p:cNvPr id="8" name="TextBox 7"/>
+          <p:cNvSpPr txBox="1"/>
+          <p:nvPr/>
+        </p:nvSpPr>
+        <p:spPr>
+          <a:xfrm>
+            <a:off x="1060704" y="1874519"/>
+            <a:ext cx="4829403" cy="731520"/>
+          </a:xfrm>
+          <a:prstGeom prst="rect">
+            <a:avLst/>
+          </a:prstGeom>
+          <a:noFill/>
+        </p:spPr>
+        <p:txBody>
+          <a:bodyPr wrap="square">
+            <a:spAutoFit/>
+          </a:bodyPr>
+          <a:lstStyle/>
+          <a:p>
+            <a:r>
+              <a:rPr sz="1400" b="0">
+                <a:solidFill>
+                  <a:srgbClr val="1F2A35"/>
+                </a:solidFill>
+              </a:rPr>
+              <a:t>Guias SERVEL: extensas, pasivas, sin matching</a:t>
+            </a:r>
+          </a:p>
+        </p:txBody>
+      </p:sp>
+      <p:sp>
+        <p:nvSpPr>
+          <p:cNvPr id="9" name="Oval 8"/>
+          <p:cNvSpPr/>
+          <p:nvPr/>
+        </p:nvSpPr>
+        <p:spPr>
+          <a:xfrm>
+            <a:off x="822960" y="2761487"/>
+            <a:ext cx="146304" cy="146304"/>
+          </a:xfrm>
+          <a:prstGeom prst="ellipse">
+            <a:avLst/>
+          </a:prstGeom>
+          <a:solidFill>
+            <a:srgbClr val="DC2626"/>
+          </a:solidFill>
+          <a:ln>
+            <a:noFill/>
+          </a:ln>
+        </p:spPr>
+        <p:style>
+          <a:lnRef idx="1">
+            <a:schemeClr val="accent1"/>
+          </a:lnRef>
+          <a:fillRef idx="3">
+            <a:schemeClr val="accent1"/>
+          </a:fillRef>
+          <a:effectRef idx="2">
+            <a:schemeClr val="accent1"/>
+          </a:effectRef>
+          <a:fontRef idx="minor">
+            <a:schemeClr val="lt1"/>
+          </a:fontRef>
+        </p:style>
+        <p:txBody>
+          <a:bodyPr rtlCol="0" anchor="ctr"/>
+          <a:lstStyle/>
+          <a:p>
+            <a:pPr algn="ctr"/>
+          </a:p>
+        </p:txBody>
+      </p:sp>
+      <p:sp>
+        <p:nvSpPr>
+          <p:cNvPr id="10" name="TextBox 9"/>
+          <p:cNvSpPr txBox="1"/>
+          <p:nvPr/>
+        </p:nvSpPr>
+        <p:spPr>
+          <a:xfrm>
+            <a:off x="1060704" y="2651759"/>
+            <a:ext cx="4829403" cy="731520"/>
+          </a:xfrm>
+          <a:prstGeom prst="rect">
+            <a:avLst/>
+          </a:prstGeom>
+          <a:noFill/>
+        </p:spPr>
+        <p:txBody>
+          <a:bodyPr wrap="square">
+            <a:spAutoFit/>
+          </a:bodyPr>
+          <a:lstStyle/>
+          <a:p>
+            <a:r>
+              <a:rPr sz="1400" b="0">
+                <a:solidFill>
+                  <a:srgbClr val="1F2A35"/>
+                </a:solidFill>
+              </a:rPr>
+              <a:t>Voto Informado (SERVEL+PNUD): sin algoritmo de afinidad</a:t>
+            </a:r>
+          </a:p>
+        </p:txBody>
+      </p:sp>
+      <p:sp>
+        <p:nvSpPr>
+          <p:cNvPr id="11" name="Oval 10"/>
+          <p:cNvSpPr/>
+          <p:nvPr/>
+        </p:nvSpPr>
+        <p:spPr>
+          <a:xfrm>
+            <a:off x="822960" y="3538727"/>
+            <a:ext cx="146304" cy="146304"/>
+          </a:xfrm>
+          <a:prstGeom prst="ellipse">
+            <a:avLst/>
+          </a:prstGeom>
+          <a:solidFill>
+            <a:srgbClr val="DC2626"/>
+          </a:solidFill>
+          <a:ln>
+            <a:noFill/>
+          </a:ln>
+        </p:spPr>
+        <p:style>
+          <a:lnRef idx="1">
+            <a:schemeClr val="accent1"/>
+          </a:lnRef>
+          <a:fillRef idx="3">
+            <a:schemeClr val="accent1"/>
+          </a:fillRef>
+          <a:effectRef idx="2">
+            <a:schemeClr val="accent1"/>
+          </a:effectRef>
+          <a:fontRef idx="minor">
+            <a:schemeClr val="lt1"/>
+          </a:fontRef>
+        </p:style>
+        <p:txBody>
+          <a:bodyPr rtlCol="0" anchor="ctr"/>
+          <a:lstStyle/>
+          <a:p>
+            <a:pPr algn="ctr"/>
+          </a:p>
+        </p:txBody>
+      </p:sp>
+      <p:sp>
+        <p:nvSpPr>
+          <p:cNvPr id="12" name="TextBox 11"/>
+          <p:cNvSpPr txBox="1"/>
+          <p:nvPr/>
+        </p:nvSpPr>
+        <p:spPr>
+          <a:xfrm>
+            <a:off x="1060704" y="3428999"/>
+            <a:ext cx="4829403" cy="731520"/>
+          </a:xfrm>
+          <a:prstGeom prst="rect">
+            <a:avLst/>
+          </a:prstGeom>
+          <a:noFill/>
+        </p:spPr>
+        <p:txBody>
+          <a:bodyPr wrap="square">
+            <a:spAutoFit/>
+          </a:bodyPr>
+          <a:lstStyle/>
+          <a:p>
+            <a:r>
+              <a:rPr sz="1400" b="0">
+                <a:solidFill>
+                  <a:srgbClr val="1F2A35"/>
+                </a:solidFill>
+              </a:rPr>
+              <a:t>Decide Chile: discontinuada, sin datos actualizados</a:t>
+            </a:r>
+          </a:p>
+        </p:txBody>
+      </p:sp>
+      <p:sp>
+        <p:nvSpPr>
+          <p:cNvPr id="13" name="Oval 12"/>
+          <p:cNvSpPr/>
+          <p:nvPr/>
+        </p:nvSpPr>
+        <p:spPr>
+          <a:xfrm>
+            <a:off x="822960" y="4315967"/>
+            <a:ext cx="146304" cy="146304"/>
+          </a:xfrm>
+          <a:prstGeom prst="ellipse">
+            <a:avLst/>
+          </a:prstGeom>
+          <a:solidFill>
+            <a:srgbClr val="DC2626"/>
+          </a:solidFill>
+          <a:ln>
+            <a:noFill/>
+          </a:ln>
+        </p:spPr>
+        <p:style>
+          <a:lnRef idx="1">
+            <a:schemeClr val="accent1"/>
+          </a:lnRef>
+          <a:fillRef idx="3">
+            <a:schemeClr val="accent1"/>
+          </a:fillRef>
+          <a:effectRef idx="2">
+            <a:schemeClr val="accent1"/>
+          </a:effectRef>
+          <a:fontRef idx="minor">
+            <a:schemeClr val="lt1"/>
+          </a:fontRef>
+        </p:style>
+        <p:txBody>
+          <a:bodyPr rtlCol="0" anchor="ctr"/>
+          <a:lstStyle/>
+          <a:p>
+            <a:pPr algn="ctr"/>
+          </a:p>
+        </p:txBody>
+      </p:sp>
+      <p:sp>
+        <p:nvSpPr>
+          <p:cNvPr id="14" name="TextBox 13"/>
+          <p:cNvSpPr txBox="1"/>
+          <p:nvPr/>
+        </p:nvSpPr>
+        <p:spPr>
+          <a:xfrm>
+            <a:off x="1060704" y="4206239"/>
+            <a:ext cx="4829403" cy="731520"/>
+          </a:xfrm>
+          <a:prstGeom prst="rect">
+            <a:avLst/>
+          </a:prstGeom>
+          <a:noFill/>
+        </p:spPr>
+        <p:txBody>
+          <a:bodyPr wrap="square">
+            <a:spAutoFit/>
+          </a:bodyPr>
+          <a:lstStyle/>
+          <a:p>
+            <a:r>
+              <a:rPr sz="1400" b="0">
+                <a:solidFill>
+                  <a:srgbClr val="1F2A35"/>
+                </a:solidFill>
+              </a:rPr>
+              <a:t>Plataformas globales: sin contexto electoral chileno</a:t>
+            </a:r>
+          </a:p>
+        </p:txBody>
+      </p:sp>
+      <p:sp>
+        <p:nvSpPr>
+          <p:cNvPr id="15" name="Oval 14"/>
+          <p:cNvSpPr/>
+          <p:nvPr/>
+        </p:nvSpPr>
+        <p:spPr>
+          <a:xfrm>
+            <a:off x="822960" y="5093207"/>
+            <a:ext cx="146304" cy="146304"/>
+          </a:xfrm>
+          <a:prstGeom prst="ellipse">
+            <a:avLst/>
+          </a:prstGeom>
+          <a:solidFill>
+            <a:srgbClr val="DC2626"/>
+          </a:solidFill>
+          <a:ln>
+            <a:noFill/>
+          </a:ln>
+        </p:spPr>
+        <p:style>
+          <a:lnRef idx="1">
+            <a:schemeClr val="accent1"/>
+          </a:lnRef>
+          <a:fillRef idx="3">
+            <a:schemeClr val="accent1"/>
+          </a:fillRef>
+          <a:effectRef idx="2">
+            <a:schemeClr val="accent1"/>
+          </a:effectRef>
+          <a:fontRef idx="minor">
+            <a:schemeClr val="lt1"/>
+          </a:fontRef>
+        </p:style>
+        <p:txBody>
+          <a:bodyPr rtlCol="0" anchor="ctr"/>
+          <a:lstStyle/>
+          <a:p>
+            <a:pPr algn="ctr"/>
+          </a:p>
+        </p:txBody>
+      </p:sp>
+      <p:sp>
+        <p:nvSpPr>
+          <p:cNvPr id="16" name="TextBox 15"/>
+          <p:cNvSpPr txBox="1"/>
+          <p:nvPr/>
+        </p:nvSpPr>
+        <p:spPr>
+          <a:xfrm>
+            <a:off x="1060704" y="4983479"/>
+            <a:ext cx="4829403" cy="731520"/>
+          </a:xfrm>
+          <a:prstGeom prst="rect">
+            <a:avLst/>
+          </a:prstGeom>
+          <a:noFill/>
+        </p:spPr>
+        <p:txBody>
+          <a:bodyPr wrap="square">
+            <a:spAutoFit/>
+          </a:bodyPr>
+          <a:lstStyle/>
+          <a:p>
+            <a:r>
+              <a:rPr sz="1400" b="0">
+                <a:solidFill>
+                  <a:srgbClr val="1F2A35"/>
+                </a:solidFill>
+              </a:rPr>
+              <a:t>Redes sociales: ruido &gt; informacion verificada</a:t>
+            </a:r>
+          </a:p>
+        </p:txBody>
+      </p:sp>
+      <p:sp>
+        <p:nvSpPr>
+          <p:cNvPr id="17" name="Rectangle 16"/>
+          <p:cNvSpPr/>
+          <p:nvPr/>
+        </p:nvSpPr>
+        <p:spPr>
+          <a:xfrm>
+            <a:off x="6210147" y="1188720"/>
+            <a:ext cx="5341467" cy="502920"/>
           </a:xfrm>
           <a:prstGeom prst="rect">
             <a:avLst/>
@@ -5368,171 +6013,14 @@
       </p:sp>
       <p:sp>
         <p:nvSpPr>
-          <p:cNvPr id="7" name="TextBox 6"/>
+          <p:cNvPr id="18" name="TextBox 17"/>
           <p:cNvSpPr txBox="1"/>
           <p:nvPr/>
         </p:nvSpPr>
         <p:spPr>
           <a:xfrm>
-            <a:off x="640080" y="1691640"/>
-            <a:ext cx="5272887" cy="4663440"/>
-          </a:xfrm>
-          <a:prstGeom prst="rect">
-            <a:avLst/>
-          </a:prstGeom>
-          <a:noFill/>
-        </p:spPr>
-        <p:txBody>
-          <a:bodyPr wrap="square">
-            <a:spAutoFit/>
-          </a:bodyPr>
-          <a:lstStyle/>
-          <a:p>
-            <a:pPr>
-              <a:spcBef>
-                <a:spcPts val="500"/>
-              </a:spcBef>
-            </a:pPr>
-            <a:r>
-              <a:rPr sz="1400">
-                <a:solidFill>
-                  <a:srgbClr val="1F2A35"/>
-                </a:solidFill>
-              </a:rPr>
-              <a:t>• Guías SERVEL</a:t>
-            </a:r>
-          </a:p>
-          <a:p>
-            <a:pPr>
-              <a:spcBef>
-                <a:spcPts val="500"/>
-              </a:spcBef>
-            </a:pPr>
-            <a:r>
-              <a:rPr sz="1400">
-                <a:solidFill>
-                  <a:srgbClr val="1F2A35"/>
-                </a:solidFill>
-              </a:rPr>
-              <a:t>  → Extensas, pasivas, sin comparación</a:t>
-            </a:r>
-          </a:p>
-          <a:p>
-            <a:pPr>
-              <a:spcBef>
-                <a:spcPts val="500"/>
-              </a:spcBef>
-            </a:pPr>
-          </a:p>
-          <a:p>
-            <a:pPr>
-              <a:spcBef>
-                <a:spcPts val="500"/>
-              </a:spcBef>
-            </a:pPr>
-            <a:r>
-              <a:rPr sz="1400">
-                <a:solidFill>
-                  <a:srgbClr val="1F2A35"/>
-                </a:solidFill>
-              </a:rPr>
-              <a:t>• Voto Informado (SERVEL + PNUD)</a:t>
-            </a:r>
-          </a:p>
-          <a:p>
-            <a:pPr>
-              <a:spcBef>
-                <a:spcPts val="500"/>
-              </a:spcBef>
-            </a:pPr>
-            <a:r>
-              <a:rPr sz="1400">
-                <a:solidFill>
-                  <a:srgbClr val="1F2A35"/>
-                </a:solidFill>
-              </a:rPr>
-              <a:t>  → Sin algoritmo de matching</a:t>
-            </a:r>
-          </a:p>
-          <a:p>
-            <a:pPr>
-              <a:spcBef>
-                <a:spcPts val="500"/>
-              </a:spcBef>
-            </a:pPr>
-            <a:r>
-              <a:rPr sz="1400">
-                <a:solidFill>
-                  <a:srgbClr val="1F2A35"/>
-                </a:solidFill>
-              </a:rPr>
-              <a:t>  → Operación intermitente</a:t>
-            </a:r>
-          </a:p>
-          <a:p>
-            <a:pPr>
-              <a:spcBef>
-                <a:spcPts val="500"/>
-              </a:spcBef>
-            </a:pPr>
-          </a:p>
-          <a:p>
-            <a:pPr>
-              <a:spcBef>
-                <a:spcPts val="500"/>
-              </a:spcBef>
-            </a:pPr>
-            <a:r>
-              <a:rPr sz="1400">
-                <a:solidFill>
-                  <a:srgbClr val="1F2A35"/>
-                </a:solidFill>
-              </a:rPr>
-              <a:t>• Decide Chile</a:t>
-            </a:r>
-          </a:p>
-          <a:p>
-            <a:pPr>
-              <a:spcBef>
-                <a:spcPts val="500"/>
-              </a:spcBef>
-            </a:pPr>
-            <a:r>
-              <a:rPr sz="1400">
-                <a:solidFill>
-                  <a:srgbClr val="1F2A35"/>
-                </a:solidFill>
-              </a:rPr>
-              <a:t>  → Discontinuada, sin datos actualizados</a:t>
-            </a:r>
-          </a:p>
-          <a:p>
-            <a:pPr>
-              <a:spcBef>
-                <a:spcPts val="500"/>
-              </a:spcBef>
-            </a:pPr>
-            <a:r>
-              <a:rPr sz="1400">
-                <a:solidFill>
-                  <a:srgbClr val="1F2A35"/>
-                </a:solidFill>
-              </a:rPr>
-              <a:t>  → Inactiva al inicio del proyecto</a:t>
-            </a:r>
-          </a:p>
-        </p:txBody>
-      </p:sp>
-      <p:sp>
-        <p:nvSpPr>
-          <p:cNvPr id="8" name="TextBox 7"/>
-          <p:cNvSpPr txBox="1"/>
-          <p:nvPr/>
-        </p:nvSpPr>
-        <p:spPr>
-          <a:xfrm>
-            <a:off x="6297015" y="1097280"/>
-            <a:ext cx="5272887" cy="457200"/>
+            <a:off x="6347307" y="1234440"/>
+            <a:ext cx="5067147" cy="411480"/>
           </a:xfrm>
           <a:prstGeom prst="rect">
             <a:avLst/>
@@ -5545,10 +6033,11 @@
           </a:bodyPr>
           <a:lstStyle/>
           <a:p>
+            <a:pPr algn="ctr"/>
             <a:r>
               <a:rPr sz="1400" b="1">
                 <a:solidFill>
-                  <a:srgbClr val="2E5F7E"/>
+                  <a:srgbClr val="FFFFFF"/>
                 </a:solidFill>
               </a:rPr>
               <a:t>Lo que faltaba</a:t>
@@ -5558,16 +6047,61 @@
       </p:sp>
       <p:sp>
         <p:nvSpPr>
-          <p:cNvPr id="9" name="Rectangle 8"/>
+          <p:cNvPr id="19" name="Rectangle 18"/>
           <p:cNvSpPr/>
           <p:nvPr/>
         </p:nvSpPr>
         <p:spPr>
           <a:xfrm>
-            <a:off x="6297015" y="1554480"/>
-            <a:ext cx="731520" cy="36576"/>
-          </a:xfrm>
-          <a:prstGeom prst="rect">
+            <a:off x="6210147" y="1691640"/>
+            <a:ext cx="5341467" cy="4846320"/>
+          </a:xfrm>
+          <a:prstGeom prst="rect">
+            <a:avLst/>
+          </a:prstGeom>
+          <a:solidFill>
+            <a:srgbClr val="FFFFFF"/>
+          </a:solidFill>
+          <a:ln w="12700">
+            <a:solidFill>
+              <a:srgbClr val="CBD1CD"/>
+            </a:solidFill>
+          </a:ln>
+        </p:spPr>
+        <p:style>
+          <a:lnRef idx="1">
+            <a:schemeClr val="accent1"/>
+          </a:lnRef>
+          <a:fillRef idx="3">
+            <a:schemeClr val="accent1"/>
+          </a:fillRef>
+          <a:effectRef idx="2">
+            <a:schemeClr val="accent1"/>
+          </a:effectRef>
+          <a:fontRef idx="minor">
+            <a:schemeClr val="lt1"/>
+          </a:fontRef>
+        </p:style>
+        <p:txBody>
+          <a:bodyPr rtlCol="0" anchor="ctr"/>
+          <a:lstStyle/>
+          <a:p>
+            <a:pPr algn="ctr"/>
+          </a:p>
+        </p:txBody>
+      </p:sp>
+      <p:sp>
+        <p:nvSpPr>
+          <p:cNvPr id="20" name="Oval 19"/>
+          <p:cNvSpPr/>
+          <p:nvPr/>
+        </p:nvSpPr>
+        <p:spPr>
+          <a:xfrm>
+            <a:off x="6393027" y="1984247"/>
+            <a:ext cx="146304" cy="146304"/>
+          </a:xfrm>
+          <a:prstGeom prst="ellipse">
             <a:avLst/>
           </a:prstGeom>
           <a:solidFill>
@@ -5601,14 +6135,14 @@
       </p:sp>
       <p:sp>
         <p:nvSpPr>
-          <p:cNvPr id="10" name="TextBox 9"/>
+          <p:cNvPr id="21" name="TextBox 20"/>
           <p:cNvSpPr txBox="1"/>
           <p:nvPr/>
         </p:nvSpPr>
         <p:spPr>
           <a:xfrm>
-            <a:off x="6297015" y="1691640"/>
-            <a:ext cx="5272887" cy="4663440"/>
+            <a:off x="6630771" y="1874519"/>
+            <a:ext cx="4829403" cy="731520"/>
           </a:xfrm>
           <a:prstGeom prst="rect">
             <a:avLst/>
@@ -5621,100 +6155,317 @@
           </a:bodyPr>
           <a:lstStyle/>
           <a:p>
-            <a:pPr>
-              <a:spcBef>
-                <a:spcPts val="500"/>
-              </a:spcBef>
-            </a:pPr>
-            <a:r>
-              <a:rPr sz="1400">
+            <a:r>
+              <a:rPr sz="1400" b="0">
                 <a:solidFill>
                   <a:srgbClr val="1F2A35"/>
                 </a:solidFill>
               </a:rPr>
-              <a:t> VAA activa con metodología transparente</a:t>
-            </a:r>
-          </a:p>
-          <a:p>
-            <a:pPr>
-              <a:spcBef>
-                <a:spcPts val="500"/>
-              </a:spcBef>
-            </a:pPr>
-            <a:r>
-              <a:rPr sz="1400">
+              <a:t>VAA activa con metodologia transparente</a:t>
+            </a:r>
+          </a:p>
+        </p:txBody>
+      </p:sp>
+      <p:sp>
+        <p:nvSpPr>
+          <p:cNvPr id="22" name="Oval 21"/>
+          <p:cNvSpPr/>
+          <p:nvPr/>
+        </p:nvSpPr>
+        <p:spPr>
+          <a:xfrm>
+            <a:off x="6393027" y="2761487"/>
+            <a:ext cx="146304" cy="146304"/>
+          </a:xfrm>
+          <a:prstGeom prst="ellipse">
+            <a:avLst/>
+          </a:prstGeom>
+          <a:solidFill>
+            <a:srgbClr val="3A9E7A"/>
+          </a:solidFill>
+          <a:ln>
+            <a:noFill/>
+          </a:ln>
+        </p:spPr>
+        <p:style>
+          <a:lnRef idx="1">
+            <a:schemeClr val="accent1"/>
+          </a:lnRef>
+          <a:fillRef idx="3">
+            <a:schemeClr val="accent1"/>
+          </a:fillRef>
+          <a:effectRef idx="2">
+            <a:schemeClr val="accent1"/>
+          </a:effectRef>
+          <a:fontRef idx="minor">
+            <a:schemeClr val="lt1"/>
+          </a:fontRef>
+        </p:style>
+        <p:txBody>
+          <a:bodyPr rtlCol="0" anchor="ctr"/>
+          <a:lstStyle/>
+          <a:p>
+            <a:pPr algn="ctr"/>
+          </a:p>
+        </p:txBody>
+      </p:sp>
+      <p:sp>
+        <p:nvSpPr>
+          <p:cNvPr id="23" name="TextBox 22"/>
+          <p:cNvSpPr txBox="1"/>
+          <p:nvPr/>
+        </p:nvSpPr>
+        <p:spPr>
+          <a:xfrm>
+            <a:off x="6630771" y="2651759"/>
+            <a:ext cx="4829403" cy="731520"/>
+          </a:xfrm>
+          <a:prstGeom prst="rect">
+            <a:avLst/>
+          </a:prstGeom>
+          <a:noFill/>
+        </p:spPr>
+        <p:txBody>
+          <a:bodyPr wrap="square">
+            <a:spAutoFit/>
+          </a:bodyPr>
+          <a:lstStyle/>
+          <a:p>
+            <a:r>
+              <a:rPr sz="1400" b="0">
                 <a:solidFill>
                   <a:srgbClr val="1F2A35"/>
                 </a:solidFill>
               </a:rPr>
-              <a:t> Algoritmo de matching auditable</a:t>
-            </a:r>
-          </a:p>
-          <a:p>
-            <a:pPr>
-              <a:spcBef>
-                <a:spcPts val="500"/>
-              </a:spcBef>
-            </a:pPr>
-            <a:r>
-              <a:rPr sz="1400">
+              <a:t>Algoritmo de matching auditable</a:t>
+            </a:r>
+          </a:p>
+        </p:txBody>
+      </p:sp>
+      <p:sp>
+        <p:nvSpPr>
+          <p:cNvPr id="24" name="Oval 23"/>
+          <p:cNvSpPr/>
+          <p:nvPr/>
+        </p:nvSpPr>
+        <p:spPr>
+          <a:xfrm>
+            <a:off x="6393027" y="3538727"/>
+            <a:ext cx="146304" cy="146304"/>
+          </a:xfrm>
+          <a:prstGeom prst="ellipse">
+            <a:avLst/>
+          </a:prstGeom>
+          <a:solidFill>
+            <a:srgbClr val="3A9E7A"/>
+          </a:solidFill>
+          <a:ln>
+            <a:noFill/>
+          </a:ln>
+        </p:spPr>
+        <p:style>
+          <a:lnRef idx="1">
+            <a:schemeClr val="accent1"/>
+          </a:lnRef>
+          <a:fillRef idx="3">
+            <a:schemeClr val="accent1"/>
+          </a:fillRef>
+          <a:effectRef idx="2">
+            <a:schemeClr val="accent1"/>
+          </a:effectRef>
+          <a:fontRef idx="minor">
+            <a:schemeClr val="lt1"/>
+          </a:fontRef>
+        </p:style>
+        <p:txBody>
+          <a:bodyPr rtlCol="0" anchor="ctr"/>
+          <a:lstStyle/>
+          <a:p>
+            <a:pPr algn="ctr"/>
+          </a:p>
+        </p:txBody>
+      </p:sp>
+      <p:sp>
+        <p:nvSpPr>
+          <p:cNvPr id="25" name="TextBox 24"/>
+          <p:cNvSpPr txBox="1"/>
+          <p:nvPr/>
+        </p:nvSpPr>
+        <p:spPr>
+          <a:xfrm>
+            <a:off x="6630771" y="3428999"/>
+            <a:ext cx="4829403" cy="731520"/>
+          </a:xfrm>
+          <a:prstGeom prst="rect">
+            <a:avLst/>
+          </a:prstGeom>
+          <a:noFill/>
+        </p:spPr>
+        <p:txBody>
+          <a:bodyPr wrap="square">
+            <a:spAutoFit/>
+          </a:bodyPr>
+          <a:lstStyle/>
+          <a:p>
+            <a:r>
+              <a:rPr sz="1400" b="0">
                 <a:solidFill>
                   <a:srgbClr val="1F2A35"/>
                 </a:solidFill>
               </a:rPr>
-              <a:t> Datos verificados y trazables</a:t>
-            </a:r>
-          </a:p>
-          <a:p>
-            <a:pPr>
-              <a:spcBef>
-                <a:spcPts val="500"/>
-              </a:spcBef>
-            </a:pPr>
-            <a:r>
-              <a:rPr sz="1400">
+              <a:t>Datos verificados con fuentes primarias</a:t>
+            </a:r>
+          </a:p>
+        </p:txBody>
+      </p:sp>
+      <p:sp>
+        <p:nvSpPr>
+          <p:cNvPr id="26" name="Oval 25"/>
+          <p:cNvSpPr/>
+          <p:nvPr/>
+        </p:nvSpPr>
+        <p:spPr>
+          <a:xfrm>
+            <a:off x="6393027" y="4315967"/>
+            <a:ext cx="146304" cy="146304"/>
+          </a:xfrm>
+          <a:prstGeom prst="ellipse">
+            <a:avLst/>
+          </a:prstGeom>
+          <a:solidFill>
+            <a:srgbClr val="3A9E7A"/>
+          </a:solidFill>
+          <a:ln>
+            <a:noFill/>
+          </a:ln>
+        </p:spPr>
+        <p:style>
+          <a:lnRef idx="1">
+            <a:schemeClr val="accent1"/>
+          </a:lnRef>
+          <a:fillRef idx="3">
+            <a:schemeClr val="accent1"/>
+          </a:fillRef>
+          <a:effectRef idx="2">
+            <a:schemeClr val="accent1"/>
+          </a:effectRef>
+          <a:fontRef idx="minor">
+            <a:schemeClr val="lt1"/>
+          </a:fontRef>
+        </p:style>
+        <p:txBody>
+          <a:bodyPr rtlCol="0" anchor="ctr"/>
+          <a:lstStyle/>
+          <a:p>
+            <a:pPr algn="ctr"/>
+          </a:p>
+        </p:txBody>
+      </p:sp>
+      <p:sp>
+        <p:nvSpPr>
+          <p:cNvPr id="27" name="TextBox 26"/>
+          <p:cNvSpPr txBox="1"/>
+          <p:nvPr/>
+        </p:nvSpPr>
+        <p:spPr>
+          <a:xfrm>
+            <a:off x="6630771" y="4206239"/>
+            <a:ext cx="4829403" cy="731520"/>
+          </a:xfrm>
+          <a:prstGeom prst="rect">
+            <a:avLst/>
+          </a:prstGeom>
+          <a:noFill/>
+        </p:spPr>
+        <p:txBody>
+          <a:bodyPr wrap="square">
+            <a:spAutoFit/>
+          </a:bodyPr>
+          <a:lstStyle/>
+          <a:p>
+            <a:r>
+              <a:rPr sz="1400" b="0">
                 <a:solidFill>
                   <a:srgbClr val="1F2A35"/>
                 </a:solidFill>
               </a:rPr>
-              <a:t> Diseño mobile-first</a:t>
-            </a:r>
-          </a:p>
-          <a:p>
-            <a:pPr>
-              <a:spcBef>
-                <a:spcPts val="500"/>
-              </a:spcBef>
-            </a:pPr>
-            <a:r>
-              <a:rPr sz="1400">
+              <a:t>Diseno mobile-first para el usuario chileno</a:t>
+            </a:r>
+          </a:p>
+        </p:txBody>
+      </p:sp>
+      <p:sp>
+        <p:nvSpPr>
+          <p:cNvPr id="28" name="Oval 27"/>
+          <p:cNvSpPr/>
+          <p:nvPr/>
+        </p:nvSpPr>
+        <p:spPr>
+          <a:xfrm>
+            <a:off x="6393027" y="5093207"/>
+            <a:ext cx="146304" cy="146304"/>
+          </a:xfrm>
+          <a:prstGeom prst="ellipse">
+            <a:avLst/>
+          </a:prstGeom>
+          <a:solidFill>
+            <a:srgbClr val="3A9E7A"/>
+          </a:solidFill>
+          <a:ln>
+            <a:noFill/>
+          </a:ln>
+        </p:spPr>
+        <p:style>
+          <a:lnRef idx="1">
+            <a:schemeClr val="accent1"/>
+          </a:lnRef>
+          <a:fillRef idx="3">
+            <a:schemeClr val="accent1"/>
+          </a:fillRef>
+          <a:effectRef idx="2">
+            <a:schemeClr val="accent1"/>
+          </a:effectRef>
+          <a:fontRef idx="minor">
+            <a:schemeClr val="lt1"/>
+          </a:fontRef>
+        </p:style>
+        <p:txBody>
+          <a:bodyPr rtlCol="0" anchor="ctr"/>
+          <a:lstStyle/>
+          <a:p>
+            <a:pPr algn="ctr"/>
+          </a:p>
+        </p:txBody>
+      </p:sp>
+      <p:sp>
+        <p:nvSpPr>
+          <p:cNvPr id="29" name="TextBox 28"/>
+          <p:cNvSpPr txBox="1"/>
+          <p:nvPr/>
+        </p:nvSpPr>
+        <p:spPr>
+          <a:xfrm>
+            <a:off x="6630771" y="4983479"/>
+            <a:ext cx="4829403" cy="731520"/>
+          </a:xfrm>
+          <a:prstGeom prst="rect">
+            <a:avLst/>
+          </a:prstGeom>
+          <a:noFill/>
+        </p:spPr>
+        <p:txBody>
+          <a:bodyPr wrap="square">
+            <a:spAutoFit/>
+          </a:bodyPr>
+          <a:lstStyle/>
+          <a:p>
+            <a:r>
+              <a:rPr sz="1400" b="0">
                 <a:solidFill>
                   <a:srgbClr val="1F2A35"/>
                 </a:solidFill>
               </a:rPr>
-              <a:t> Código abierto</a:t>
-            </a:r>
-          </a:p>
-          <a:p>
-            <a:pPr>
-              <a:spcBef>
-                <a:spcPts val="500"/>
-              </a:spcBef>
-            </a:pPr>
-          </a:p>
-          <a:p>
-            <a:pPr>
-              <a:spcBef>
-                <a:spcPts val="500"/>
-              </a:spcBef>
-            </a:pPr>
-            <a:r>
-              <a:rPr sz="1400">
-                <a:solidFill>
-                  <a:srgbClr val="1F2A35"/>
-                </a:solidFill>
-              </a:rPr>
-              <a:t>→ La brecha estaba vacante.</a:t>
+              <a:t>Codigo abierto y sostenible</a:t>
             </a:r>
           </a:p>
         </p:txBody>
@@ -5754,7 +6505,7 @@
         <p:spPr>
           <a:xfrm>
             <a:off x="0" y="0"/>
-            <a:ext cx="12191695" cy="73152"/>
+            <a:ext cx="12191695" cy="64008"/>
           </a:xfrm>
           <a:prstGeom prst="rect">
             <a:avLst/>
@@ -5796,8 +6547,8 @@
         </p:nvSpPr>
         <p:spPr>
           <a:xfrm>
-            <a:off x="640080" y="320040"/>
-            <a:ext cx="10911535" cy="777240"/>
+            <a:off x="640080" y="256032"/>
+            <a:ext cx="10911535" cy="685800"/>
           </a:xfrm>
           <a:prstGeom prst="rect">
             <a:avLst/>
@@ -5805,18 +6556,18 @@
           <a:noFill/>
         </p:spPr>
         <p:txBody>
-          <a:bodyPr wrap="square">
+          <a:bodyPr wrap="none">
             <a:spAutoFit/>
           </a:bodyPr>
           <a:lstStyle/>
           <a:p>
             <a:r>
-              <a:rPr sz="2800" b="1">
+              <a:rPr sz="2600" b="1">
                 <a:solidFill>
                   <a:srgbClr val="1C3A52"/>
                 </a:solidFill>
               </a:rPr>
-              <a:t>¿Quiénes son más vulnerables?</a:t>
+              <a:t>?Quienes son mas vulnerables al deficit informativo?</a:t>
             </a:r>
           </a:p>
         </p:txBody>
@@ -5829,14 +6580,14 @@
         </p:nvSpPr>
         <p:spPr>
           <a:xfrm>
-            <a:off x="640080" y="1143000"/>
-            <a:ext cx="1371600" cy="36576"/>
+            <a:off x="640080" y="1188720"/>
+            <a:ext cx="3515258" cy="1188720"/>
           </a:xfrm>
           <a:prstGeom prst="rect">
             <a:avLst/>
           </a:prstGeom>
           <a:solidFill>
-            <a:srgbClr val="3A9E7A"/>
+            <a:srgbClr val="1D4ED8"/>
           </a:solidFill>
           <a:ln>
             <a:noFill/>
@@ -5872,8 +6623,8 @@
         </p:nvSpPr>
         <p:spPr>
           <a:xfrm>
-            <a:off x="640080" y="1371600"/>
-            <a:ext cx="10911535" cy="640080"/>
+            <a:off x="749808" y="1325880"/>
+            <a:ext cx="3295802" cy="1051560"/>
           </a:xfrm>
           <a:prstGeom prst="rect">
             <a:avLst/>
@@ -5886,27 +6637,73 @@
           </a:bodyPr>
           <a:lstStyle/>
           <a:p>
-            <a:r>
-              <a:rPr sz="1700" b="1">
+            <a:pPr algn="ctr"/>
+            <a:r>
+              <a:rPr sz="1600" b="1">
                 <a:solidFill>
-                  <a:srgbClr val="2E5F7E"/>
+                  <a:srgbClr val="FFFFFF"/>
                 </a:solidFill>
               </a:rPr>
-              <a:t>Tres segmentos identificados con mayor déficit informativo</a:t>
-            </a:r>
-          </a:p>
-        </p:txBody>
-      </p:sp>
-      <p:sp>
-        <p:nvSpPr>
-          <p:cNvPr id="6" name="TextBox 5"/>
+              <a:t>Jovenes Votantes</a:t>
+            </a:r>
+          </a:p>
+        </p:txBody>
+      </p:sp>
+      <p:sp>
+        <p:nvSpPr>
+          <p:cNvPr id="6" name="Rectangle 5"/>
+          <p:cNvSpPr/>
+          <p:nvPr/>
+        </p:nvSpPr>
+        <p:spPr>
+          <a:xfrm>
+            <a:off x="640080" y="2377440"/>
+            <a:ext cx="3515258" cy="3749040"/>
+          </a:xfrm>
+          <a:prstGeom prst="rect">
+            <a:avLst/>
+          </a:prstGeom>
+          <a:solidFill>
+            <a:srgbClr val="FFFFFF"/>
+          </a:solidFill>
+          <a:ln w="12700">
+            <a:solidFill>
+              <a:srgbClr val="CBD1CD"/>
+            </a:solidFill>
+          </a:ln>
+        </p:spPr>
+        <p:style>
+          <a:lnRef idx="1">
+            <a:schemeClr val="accent1"/>
+          </a:lnRef>
+          <a:fillRef idx="3">
+            <a:schemeClr val="accent1"/>
+          </a:fillRef>
+          <a:effectRef idx="2">
+            <a:schemeClr val="accent1"/>
+          </a:effectRef>
+          <a:fontRef idx="minor">
+            <a:schemeClr val="lt1"/>
+          </a:fontRef>
+        </p:style>
+        <p:txBody>
+          <a:bodyPr rtlCol="0" anchor="ctr"/>
+          <a:lstStyle/>
+          <a:p>
+            <a:pPr algn="ctr"/>
+          </a:p>
+        </p:txBody>
+      </p:sp>
+      <p:sp>
+        <p:nvSpPr>
+          <p:cNvPr id="7" name="TextBox 6"/>
           <p:cNvSpPr txBox="1"/>
           <p:nvPr/>
         </p:nvSpPr>
         <p:spPr>
           <a:xfrm>
-            <a:off x="640080" y="2011680"/>
-            <a:ext cx="10911535" cy="4389120"/>
+            <a:off x="777240" y="2560320"/>
+            <a:ext cx="3240938" cy="3474720"/>
           </a:xfrm>
           <a:prstGeom prst="rect">
             <a:avLst/>
@@ -5919,152 +6716,378 @@
           </a:bodyPr>
           <a:lstStyle/>
           <a:p>
-            <a:pPr>
-              <a:spcBef>
-                <a:spcPts val="400"/>
-              </a:spcBef>
-            </a:pPr>
-            <a:r>
-              <a:rPr sz="1600">
+            <a:pPr algn="l"/>
+            <a:r>
+              <a:rPr sz="1300" b="0">
                 <a:solidFill>
                   <a:srgbClr val="1F2A35"/>
                 </a:solidFill>
               </a:rPr>
-              <a:t> JÓVENES VOTANTES</a:t>
-            </a:r>
-          </a:p>
-          <a:p>
-            <a:pPr>
-              <a:spcBef>
-                <a:spcPts val="400"/>
-              </a:spcBef>
-            </a:pPr>
-            <a:r>
-              <a:rPr sz="1600">
+              <a:t>Alta exposicion a redes sociales.</a:t>
+            </a:r>
+            <a:br/>
+            <a:r>
+              <a:t>Bajo consumo de medios verificados.</a:t>
+            </a:r>
+            <a:br/>
+            <a:br/>
+            <a:r>
+              <a:t>Mayor potencial de adopcion</a:t>
+            </a:r>
+            <a:br/>
+            <a:r>
+              <a:t>de una solucion tecnologica</a:t>
+            </a:r>
+            <a:br/>
+            <a:r>
+              <a:t>mobile-first.</a:t>
+            </a:r>
+          </a:p>
+        </p:txBody>
+      </p:sp>
+      <p:sp>
+        <p:nvSpPr>
+          <p:cNvPr id="8" name="Rectangle 7"/>
+          <p:cNvSpPr/>
+          <p:nvPr/>
+        </p:nvSpPr>
+        <p:spPr>
+          <a:xfrm>
+            <a:off x="4338218" y="1188720"/>
+            <a:ext cx="3515258" cy="1188720"/>
+          </a:xfrm>
+          <a:prstGeom prst="rect">
+            <a:avLst/>
+          </a:prstGeom>
+          <a:solidFill>
+            <a:srgbClr val="244A63"/>
+          </a:solidFill>
+          <a:ln>
+            <a:noFill/>
+          </a:ln>
+        </p:spPr>
+        <p:style>
+          <a:lnRef idx="1">
+            <a:schemeClr val="accent1"/>
+          </a:lnRef>
+          <a:fillRef idx="3">
+            <a:schemeClr val="accent1"/>
+          </a:fillRef>
+          <a:effectRef idx="2">
+            <a:schemeClr val="accent1"/>
+          </a:effectRef>
+          <a:fontRef idx="minor">
+            <a:schemeClr val="lt1"/>
+          </a:fontRef>
+        </p:style>
+        <p:txBody>
+          <a:bodyPr rtlCol="0" anchor="ctr"/>
+          <a:lstStyle/>
+          <a:p>
+            <a:pPr algn="ctr"/>
+          </a:p>
+        </p:txBody>
+      </p:sp>
+      <p:sp>
+        <p:nvSpPr>
+          <p:cNvPr id="9" name="TextBox 8"/>
+          <p:cNvSpPr txBox="1"/>
+          <p:nvPr/>
+        </p:nvSpPr>
+        <p:spPr>
+          <a:xfrm>
+            <a:off x="4447946" y="1325880"/>
+            <a:ext cx="3295802" cy="1051560"/>
+          </a:xfrm>
+          <a:prstGeom prst="rect">
+            <a:avLst/>
+          </a:prstGeom>
+          <a:noFill/>
+        </p:spPr>
+        <p:txBody>
+          <a:bodyPr wrap="square">
+            <a:spAutoFit/>
+          </a:bodyPr>
+          <a:lstStyle/>
+          <a:p>
+            <a:pPr algn="ctr"/>
+            <a:r>
+              <a:rPr sz="1600" b="1">
+                <a:solidFill>
+                  <a:srgbClr val="FFFFFF"/>
+                </a:solidFill>
+              </a:rPr>
+              <a:t>Adultos Mayores</a:t>
+            </a:r>
+          </a:p>
+        </p:txBody>
+      </p:sp>
+      <p:sp>
+        <p:nvSpPr>
+          <p:cNvPr id="10" name="Rectangle 9"/>
+          <p:cNvSpPr/>
+          <p:nvPr/>
+        </p:nvSpPr>
+        <p:spPr>
+          <a:xfrm>
+            <a:off x="4338218" y="2377440"/>
+            <a:ext cx="3515258" cy="3749040"/>
+          </a:xfrm>
+          <a:prstGeom prst="rect">
+            <a:avLst/>
+          </a:prstGeom>
+          <a:solidFill>
+            <a:srgbClr val="FFFFFF"/>
+          </a:solidFill>
+          <a:ln w="12700">
+            <a:solidFill>
+              <a:srgbClr val="CBD1CD"/>
+            </a:solidFill>
+          </a:ln>
+        </p:spPr>
+        <p:style>
+          <a:lnRef idx="1">
+            <a:schemeClr val="accent1"/>
+          </a:lnRef>
+          <a:fillRef idx="3">
+            <a:schemeClr val="accent1"/>
+          </a:fillRef>
+          <a:effectRef idx="2">
+            <a:schemeClr val="accent1"/>
+          </a:effectRef>
+          <a:fontRef idx="minor">
+            <a:schemeClr val="lt1"/>
+          </a:fontRef>
+        </p:style>
+        <p:txBody>
+          <a:bodyPr rtlCol="0" anchor="ctr"/>
+          <a:lstStyle/>
+          <a:p>
+            <a:pPr algn="ctr"/>
+          </a:p>
+        </p:txBody>
+      </p:sp>
+      <p:sp>
+        <p:nvSpPr>
+          <p:cNvPr id="11" name="TextBox 10"/>
+          <p:cNvSpPr txBox="1"/>
+          <p:nvPr/>
+        </p:nvSpPr>
+        <p:spPr>
+          <a:xfrm>
+            <a:off x="4475378" y="2560320"/>
+            <a:ext cx="3240938" cy="3474720"/>
+          </a:xfrm>
+          <a:prstGeom prst="rect">
+            <a:avLst/>
+          </a:prstGeom>
+          <a:noFill/>
+        </p:spPr>
+        <p:txBody>
+          <a:bodyPr wrap="square">
+            <a:spAutoFit/>
+          </a:bodyPr>
+          <a:lstStyle/>
+          <a:p>
+            <a:pPr algn="l"/>
+            <a:r>
+              <a:rPr sz="1300" b="0">
                 <a:solidFill>
                   <a:srgbClr val="1F2A35"/>
                 </a:solidFill>
               </a:rPr>
-              <a:t>  Alta exposición a redes sociales · Bajo consumo de medios verificados</a:t>
-            </a:r>
-          </a:p>
-          <a:p>
-            <a:pPr>
-              <a:spcBef>
-                <a:spcPts val="400"/>
-              </a:spcBef>
-            </a:pPr>
-            <a:r>
-              <a:rPr sz="1600">
+              <a:t>Dificultad para evaluar</a:t>
+            </a:r>
+            <a:br/>
+            <a:r>
+              <a:t>confiabilidad en plataformas digitales.</a:t>
+            </a:r>
+            <a:br/>
+            <a:br/>
+            <a:r>
+              <a:t>Alta exposicion a fake news +</a:t>
+            </a:r>
+            <a:br/>
+            <a:r>
+              <a:t>menor capacidad de verificacion</a:t>
+            </a:r>
+            <a:br/>
+            <a:r>
+              <a:t>independiente.</a:t>
+            </a:r>
+          </a:p>
+        </p:txBody>
+      </p:sp>
+      <p:sp>
+        <p:nvSpPr>
+          <p:cNvPr id="12" name="Rectangle 11"/>
+          <p:cNvSpPr/>
+          <p:nvPr/>
+        </p:nvSpPr>
+        <p:spPr>
+          <a:xfrm>
+            <a:off x="8036356" y="1188720"/>
+            <a:ext cx="3515258" cy="1188720"/>
+          </a:xfrm>
+          <a:prstGeom prst="rect">
+            <a:avLst/>
+          </a:prstGeom>
+          <a:solidFill>
+            <a:srgbClr val="D97706"/>
+          </a:solidFill>
+          <a:ln>
+            <a:noFill/>
+          </a:ln>
+        </p:spPr>
+        <p:style>
+          <a:lnRef idx="1">
+            <a:schemeClr val="accent1"/>
+          </a:lnRef>
+          <a:fillRef idx="3">
+            <a:schemeClr val="accent1"/>
+          </a:fillRef>
+          <a:effectRef idx="2">
+            <a:schemeClr val="accent1"/>
+          </a:effectRef>
+          <a:fontRef idx="minor">
+            <a:schemeClr val="lt1"/>
+          </a:fontRef>
+        </p:style>
+        <p:txBody>
+          <a:bodyPr rtlCol="0" anchor="ctr"/>
+          <a:lstStyle/>
+          <a:p>
+            <a:pPr algn="ctr"/>
+          </a:p>
+        </p:txBody>
+      </p:sp>
+      <p:sp>
+        <p:nvSpPr>
+          <p:cNvPr id="13" name="TextBox 12"/>
+          <p:cNvSpPr txBox="1"/>
+          <p:nvPr/>
+        </p:nvSpPr>
+        <p:spPr>
+          <a:xfrm>
+            <a:off x="8146084" y="1325880"/>
+            <a:ext cx="3295802" cy="1051560"/>
+          </a:xfrm>
+          <a:prstGeom prst="rect">
+            <a:avLst/>
+          </a:prstGeom>
+          <a:noFill/>
+        </p:spPr>
+        <p:txBody>
+          <a:bodyPr wrap="square">
+            <a:spAutoFit/>
+          </a:bodyPr>
+          <a:lstStyle/>
+          <a:p>
+            <a:pPr algn="ctr"/>
+            <a:r>
+              <a:rPr sz="1600" b="1">
+                <a:solidFill>
+                  <a:srgbClr val="FFFFFF"/>
+                </a:solidFill>
+              </a:rPr>
+              <a:t>Votantes Indecisos</a:t>
+            </a:r>
+          </a:p>
+        </p:txBody>
+      </p:sp>
+      <p:sp>
+        <p:nvSpPr>
+          <p:cNvPr id="14" name="Rectangle 13"/>
+          <p:cNvSpPr/>
+          <p:nvPr/>
+        </p:nvSpPr>
+        <p:spPr>
+          <a:xfrm>
+            <a:off x="8036356" y="2377440"/>
+            <a:ext cx="3515258" cy="3749040"/>
+          </a:xfrm>
+          <a:prstGeom prst="rect">
+            <a:avLst/>
+          </a:prstGeom>
+          <a:solidFill>
+            <a:srgbClr val="FFFFFF"/>
+          </a:solidFill>
+          <a:ln w="12700">
+            <a:solidFill>
+              <a:srgbClr val="CBD1CD"/>
+            </a:solidFill>
+          </a:ln>
+        </p:spPr>
+        <p:style>
+          <a:lnRef idx="1">
+            <a:schemeClr val="accent1"/>
+          </a:lnRef>
+          <a:fillRef idx="3">
+            <a:schemeClr val="accent1"/>
+          </a:fillRef>
+          <a:effectRef idx="2">
+            <a:schemeClr val="accent1"/>
+          </a:effectRef>
+          <a:fontRef idx="minor">
+            <a:schemeClr val="lt1"/>
+          </a:fontRef>
+        </p:style>
+        <p:txBody>
+          <a:bodyPr rtlCol="0" anchor="ctr"/>
+          <a:lstStyle/>
+          <a:p>
+            <a:pPr algn="ctr"/>
+          </a:p>
+        </p:txBody>
+      </p:sp>
+      <p:sp>
+        <p:nvSpPr>
+          <p:cNvPr id="15" name="TextBox 14"/>
+          <p:cNvSpPr txBox="1"/>
+          <p:nvPr/>
+        </p:nvSpPr>
+        <p:spPr>
+          <a:xfrm>
+            <a:off x="8173516" y="2560320"/>
+            <a:ext cx="3240938" cy="3474720"/>
+          </a:xfrm>
+          <a:prstGeom prst="rect">
+            <a:avLst/>
+          </a:prstGeom>
+          <a:noFill/>
+        </p:spPr>
+        <p:txBody>
+          <a:bodyPr wrap="square">
+            <a:spAutoFit/>
+          </a:bodyPr>
+          <a:lstStyle/>
+          <a:p>
+            <a:pPr algn="l"/>
+            <a:r>
+              <a:rPr sz="1300" b="0">
                 <a:solidFill>
                   <a:srgbClr val="1F2A35"/>
                 </a:solidFill>
               </a:rPr>
-              <a:t>  Mayor potencial de adopción de una solución tecnológica mobile-first</a:t>
-            </a:r>
-          </a:p>
-          <a:p>
-            <a:pPr>
-              <a:spcBef>
-                <a:spcPts val="400"/>
-              </a:spcBef>
-            </a:pPr>
-          </a:p>
-          <a:p>
-            <a:pPr>
-              <a:spcBef>
-                <a:spcPts val="400"/>
-              </a:spcBef>
-            </a:pPr>
-            <a:r>
-              <a:rPr sz="1600">
-                <a:solidFill>
-                  <a:srgbClr val="1F2A35"/>
-                </a:solidFill>
-              </a:rPr>
-              <a:t> ADULTOS MAYORES</a:t>
-            </a:r>
-          </a:p>
-          <a:p>
-            <a:pPr>
-              <a:spcBef>
-                <a:spcPts val="400"/>
-              </a:spcBef>
-            </a:pPr>
-            <a:r>
-              <a:rPr sz="1600">
-                <a:solidFill>
-                  <a:srgbClr val="1F2A35"/>
-                </a:solidFill>
-              </a:rPr>
-              <a:t>  Dificultad para evaluar confiabilidad en plataformas digitales</a:t>
-            </a:r>
-          </a:p>
-          <a:p>
-            <a:pPr>
-              <a:spcBef>
-                <a:spcPts val="400"/>
-              </a:spcBef>
-            </a:pPr>
-            <a:r>
-              <a:rPr sz="1600">
-                <a:solidFill>
-                  <a:srgbClr val="1F2A35"/>
-                </a:solidFill>
-              </a:rPr>
-              <a:t>  Alta exposición + menor capacidad de verificación independiente</a:t>
-            </a:r>
-          </a:p>
-          <a:p>
-            <a:pPr>
-              <a:spcBef>
-                <a:spcPts val="400"/>
-              </a:spcBef>
-            </a:pPr>
-          </a:p>
-          <a:p>
-            <a:pPr>
-              <a:spcBef>
-                <a:spcPts val="400"/>
-              </a:spcBef>
-            </a:pPr>
-            <a:r>
-              <a:rPr sz="1600">
-                <a:solidFill>
-                  <a:srgbClr val="1F2A35"/>
-                </a:solidFill>
-              </a:rPr>
-              <a:t> VOTANTES INDECISOS</a:t>
-            </a:r>
-          </a:p>
-          <a:p>
-            <a:pPr>
-              <a:spcBef>
-                <a:spcPts val="400"/>
-              </a:spcBef>
-            </a:pPr>
-            <a:r>
-              <a:rPr sz="1600">
-                <a:solidFill>
-                  <a:srgbClr val="1F2A35"/>
-                </a:solidFill>
-              </a:rPr>
-              <a:t>  Buscan información en el período previo inmediato a la elección</a:t>
-            </a:r>
-          </a:p>
-          <a:p>
-            <a:pPr>
-              <a:spcBef>
-                <a:spcPts val="400"/>
-              </a:spcBef>
-            </a:pPr>
-            <a:r>
-              <a:rPr sz="1600">
-                <a:solidFill>
-                  <a:srgbClr val="1F2A35"/>
-                </a:solidFill>
-              </a:rPr>
-              <a:t>  Momento de mayor flujo de contenido partidario y desinformativo</a:t>
+              <a:t>Buscan informacion en el</a:t>
+            </a:r>
+            <a:br/>
+            <a:r>
+              <a:t>periodo previo inmediato.</a:t>
+            </a:r>
+            <a:br/>
+            <a:br/>
+            <a:r>
+              <a:t>Moment de mayor flujo de</a:t>
+            </a:r>
+            <a:br/>
+            <a:r>
+              <a:t>contenido desinformativo.</a:t>
+            </a:r>
+            <a:br/>
+            <a:br/>
+            <a:r>
+              <a:t>42% no decidido para alcalde.</a:t>
             </a:r>
           </a:p>
         </p:txBody>
@@ -6104,7 +7127,7 @@
         <p:spPr>
           <a:xfrm>
             <a:off x="0" y="0"/>
-            <a:ext cx="12191695" cy="54864"/>
+            <a:ext cx="12191695" cy="45720"/>
           </a:xfrm>
           <a:prstGeom prst="rect">
             <a:avLst/>
@@ -6140,14 +7163,57 @@
       </p:sp>
       <p:sp>
         <p:nvSpPr>
-          <p:cNvPr id="3" name="TextBox 2"/>
+          <p:cNvPr id="3" name="Rectangle 2"/>
+          <p:cNvSpPr/>
+          <p:nvPr/>
+        </p:nvSpPr>
+        <p:spPr>
+          <a:xfrm>
+            <a:off x="3200400" y="1645920"/>
+            <a:ext cx="5760720" cy="36576"/>
+          </a:xfrm>
+          <a:prstGeom prst="rect">
+            <a:avLst/>
+          </a:prstGeom>
+          <a:solidFill>
+            <a:srgbClr val="4A9BBF"/>
+          </a:solidFill>
+          <a:ln>
+            <a:noFill/>
+          </a:ln>
+        </p:spPr>
+        <p:style>
+          <a:lnRef idx="1">
+            <a:schemeClr val="accent1"/>
+          </a:lnRef>
+          <a:fillRef idx="3">
+            <a:schemeClr val="accent1"/>
+          </a:fillRef>
+          <a:effectRef idx="2">
+            <a:schemeClr val="accent1"/>
+          </a:effectRef>
+          <a:fontRef idx="minor">
+            <a:schemeClr val="lt1"/>
+          </a:fontRef>
+        </p:style>
+        <p:txBody>
+          <a:bodyPr rtlCol="0" anchor="ctr"/>
+          <a:lstStyle/>
+          <a:p>
+            <a:pPr algn="ctr"/>
+          </a:p>
+        </p:txBody>
+      </p:sp>
+      <p:sp>
+        <p:nvSpPr>
+          <p:cNvPr id="4" name="TextBox 3"/>
           <p:cNvSpPr txBox="1"/>
           <p:nvPr/>
         </p:nvSpPr>
         <p:spPr>
           <a:xfrm>
-            <a:off x="640080" y="274320"/>
-            <a:ext cx="10911535" cy="731520"/>
+            <a:off x="640080" y="1828800"/>
+            <a:ext cx="10911535" cy="2560320"/>
           </a:xfrm>
           <a:prstGeom prst="rect">
             <a:avLst/>
@@ -6160,60 +7226,75 @@
           </a:bodyPr>
           <a:lstStyle/>
           <a:p>
-            <a:r>
-              <a:rPr sz="2400" b="1">
-                <a:solidFill>
-                  <a:srgbClr val="4A9BBF"/>
-                </a:solidFill>
-              </a:rPr>
-              <a:t>¿Por qué el problema merece ser abordado desde la ingeniería?</a:t>
-            </a:r>
-          </a:p>
-        </p:txBody>
-      </p:sp>
-      <p:sp>
-        <p:nvSpPr>
-          <p:cNvPr id="4" name="TextBox 3"/>
-          <p:cNvSpPr txBox="1"/>
-          <p:nvPr/>
-        </p:nvSpPr>
-        <p:spPr>
-          <a:xfrm>
-            <a:off x="640080" y="1188720"/>
-            <a:ext cx="10911535" cy="1371600"/>
-          </a:xfrm>
-          <a:prstGeom prst="rect">
-            <a:avLst/>
-          </a:prstGeom>
-          <a:noFill/>
-        </p:spPr>
-        <p:txBody>
-          <a:bodyPr wrap="square">
-            <a:spAutoFit/>
-          </a:bodyPr>
-          <a:lstStyle/>
-          <a:p>
-            <a:r>
-              <a:rPr sz="3400" b="1">
+            <a:pPr algn="ctr"/>
+            <a:r>
+              <a:rPr sz="3000" b="1">
                 <a:solidFill>
                   <a:srgbClr val="FFFFFF"/>
                 </a:solidFill>
               </a:rPr>
-              <a:t>Es un problema de intermediación, no de escasez.</a:t>
-            </a:r>
-          </a:p>
-        </p:txBody>
-      </p:sp>
-      <p:sp>
-        <p:nvSpPr>
-          <p:cNvPr id="5" name="TextBox 4"/>
+              <a:t>?Existe espacio para una herramienta que reuna informacion confiable</a:t>
+            </a:r>
+            <a:br/>
+            <a:r>
+              <a:t>sobre candidatos y elecciones, accesible para todos?</a:t>
+            </a:r>
+          </a:p>
+        </p:txBody>
+      </p:sp>
+      <p:sp>
+        <p:nvSpPr>
+          <p:cNvPr id="5" name="Rectangle 4"/>
+          <p:cNvSpPr/>
+          <p:nvPr/>
+        </p:nvSpPr>
+        <p:spPr>
+          <a:xfrm>
+            <a:off x="3200400" y="4480560"/>
+            <a:ext cx="5760720" cy="36576"/>
+          </a:xfrm>
+          <a:prstGeom prst="rect">
+            <a:avLst/>
+          </a:prstGeom>
+          <a:solidFill>
+            <a:srgbClr val="3A9E7A"/>
+          </a:solidFill>
+          <a:ln>
+            <a:noFill/>
+          </a:ln>
+        </p:spPr>
+        <p:style>
+          <a:lnRef idx="1">
+            <a:schemeClr val="accent1"/>
+          </a:lnRef>
+          <a:fillRef idx="3">
+            <a:schemeClr val="accent1"/>
+          </a:fillRef>
+          <a:effectRef idx="2">
+            <a:schemeClr val="accent1"/>
+          </a:effectRef>
+          <a:fontRef idx="minor">
+            <a:schemeClr val="lt1"/>
+          </a:fontRef>
+        </p:style>
+        <p:txBody>
+          <a:bodyPr rtlCol="0" anchor="ctr"/>
+          <a:lstStyle/>
+          <a:p>
+            <a:pPr algn="ctr"/>
+          </a:p>
+        </p:txBody>
+      </p:sp>
+      <p:sp>
+        <p:nvSpPr>
+          <p:cNvPr id="6" name="TextBox 5"/>
           <p:cNvSpPr txBox="1"/>
           <p:nvPr/>
         </p:nvSpPr>
         <p:spPr>
           <a:xfrm>
-            <a:off x="640080" y="2651760"/>
-            <a:ext cx="10911535" cy="3840480"/>
+            <a:off x="640080" y="4663440"/>
+            <a:ext cx="10911535" cy="1371600"/>
           </a:xfrm>
           <a:prstGeom prst="rect">
             <a:avLst/>
@@ -6226,122 +7307,14 @@
           </a:bodyPr>
           <a:lstStyle/>
           <a:p>
-            <a:pPr>
-              <a:spcBef>
-                <a:spcPts val="400"/>
-              </a:spcBef>
-            </a:pPr>
-            <a:r>
-              <a:rPr sz="1600">
+            <a:pPr algn="ctr"/>
+            <a:r>
+              <a:rPr sz="2200" b="0">
                 <a:solidFill>
-                  <a:srgbClr val="4A9BBF"/>
+                  <a:srgbClr val="3A9E7A"/>
                 </a:solidFill>
               </a:rPr>
-              <a:t>Las posturas de los candidatos existen en el registro público.</a:t>
-            </a:r>
-          </a:p>
-          <a:p>
-            <a:pPr>
-              <a:spcBef>
-                <a:spcPts val="400"/>
-              </a:spcBef>
-            </a:pPr>
-            <a:r>
-              <a:rPr sz="1600">
-                <a:solidFill>
-                  <a:srgbClr val="4A9BBF"/>
-                </a:solidFill>
-              </a:rPr>
-              <a:t>La información electoral primaria está disponible.</a:t>
-            </a:r>
-          </a:p>
-          <a:p>
-            <a:pPr>
-              <a:spcBef>
-                <a:spcPts val="400"/>
-              </a:spcBef>
-            </a:pPr>
-            <a:r>
-              <a:rPr sz="1600">
-                <a:solidFill>
-                  <a:srgbClr val="4A9BBF"/>
-                </a:solidFill>
-              </a:rPr>
-              <a:t>El problema no es la ausencia de datos.</a:t>
-            </a:r>
-          </a:p>
-          <a:p>
-            <a:pPr>
-              <a:spcBef>
-                <a:spcPts val="400"/>
-              </a:spcBef>
-            </a:pPr>
-          </a:p>
-          <a:p>
-            <a:pPr>
-              <a:spcBef>
-                <a:spcPts val="400"/>
-              </a:spcBef>
-            </a:pPr>
-            <a:r>
-              <a:rPr sz="1600">
-                <a:solidFill>
-                  <a:srgbClr val="4A9BBF"/>
-                </a:solidFill>
-              </a:rPr>
-              <a:t>El problema es la transformación:</a:t>
-            </a:r>
-          </a:p>
-          <a:p>
-            <a:pPr>
-              <a:spcBef>
-                <a:spcPts val="400"/>
-              </a:spcBef>
-            </a:pPr>
-            <a:r>
-              <a:rPr sz="1600">
-                <a:solidFill>
-                  <a:srgbClr val="4A9BBF"/>
-                </a:solidFill>
-              </a:rPr>
-              <a:t>  Información bruta  →  Conocimiento accionable para el votante promedio.</a:t>
-            </a:r>
-          </a:p>
-          <a:p>
-            <a:pPr>
-              <a:spcBef>
-                <a:spcPts val="400"/>
-              </a:spcBef>
-            </a:pPr>
-          </a:p>
-          <a:p>
-            <a:pPr>
-              <a:spcBef>
-                <a:spcPts val="400"/>
-              </a:spcBef>
-            </a:pPr>
-            <a:r>
-              <a:rPr sz="1600">
-                <a:solidFill>
-                  <a:srgbClr val="4A9BBF"/>
-                </a:solidFill>
-              </a:rPr>
-              <a:t>Este es exactamente el tipo de problema que la ingeniería de software puede resolver:</a:t>
-            </a:r>
-          </a:p>
-          <a:p>
-            <a:pPr>
-              <a:spcBef>
-                <a:spcPts val="400"/>
-              </a:spcBef>
-            </a:pPr>
-            <a:r>
-              <a:rPr sz="1600">
-                <a:solidFill>
-                  <a:srgbClr val="4A9BBF"/>
-                </a:solidFill>
-              </a:rPr>
-              <a:t>  Acceso · Procesamiento · Presentación.</a:t>
+              <a:t>Emprendimiento I, UTFSM 2024 -- Conclusion del levantamiento</a:t>
             </a:r>
           </a:p>
         </p:txBody>
@@ -6360,7 +7333,7 @@
     <p:bg>
       <p:bgPr>
         <a:solidFill>
-          <a:srgbClr val="F7F8F7"/>
+          <a:srgbClr val="1C3A52"/>
         </a:solidFill>
         <a:effectLst/>
       </p:bgPr>
@@ -6381,83 +7354,7 @@
         <p:spPr>
           <a:xfrm>
             <a:off x="0" y="0"/>
-            <a:ext cx="12191695" cy="73152"/>
-          </a:xfrm>
-          <a:prstGeom prst="rect">
-            <a:avLst/>
-          </a:prstGeom>
-          <a:solidFill>
-            <a:srgbClr val="2E5F7E"/>
-          </a:solidFill>
-          <a:ln>
-            <a:noFill/>
-          </a:ln>
-        </p:spPr>
-        <p:style>
-          <a:lnRef idx="1">
-            <a:schemeClr val="accent1"/>
-          </a:lnRef>
-          <a:fillRef idx="3">
-            <a:schemeClr val="accent1"/>
-          </a:fillRef>
-          <a:effectRef idx="2">
-            <a:schemeClr val="accent1"/>
-          </a:effectRef>
-          <a:fontRef idx="minor">
-            <a:schemeClr val="lt1"/>
-          </a:fontRef>
-        </p:style>
-        <p:txBody>
-          <a:bodyPr rtlCol="0" anchor="ctr"/>
-          <a:lstStyle/>
-          <a:p>
-            <a:pPr algn="ctr"/>
-          </a:p>
-        </p:txBody>
-      </p:sp>
-      <p:sp>
-        <p:nvSpPr>
-          <p:cNvPr id="3" name="TextBox 2"/>
-          <p:cNvSpPr txBox="1"/>
-          <p:nvPr/>
-        </p:nvSpPr>
-        <p:spPr>
-          <a:xfrm>
-            <a:off x="640080" y="320040"/>
-            <a:ext cx="10911535" cy="777240"/>
-          </a:xfrm>
-          <a:prstGeom prst="rect">
-            <a:avLst/>
-          </a:prstGeom>
-          <a:noFill/>
-        </p:spPr>
-        <p:txBody>
-          <a:bodyPr wrap="square">
-            <a:spAutoFit/>
-          </a:bodyPr>
-          <a:lstStyle/>
-          <a:p>
-            <a:r>
-              <a:rPr sz="2800" b="1">
-                <a:solidFill>
-                  <a:srgbClr val="1C3A52"/>
-                </a:solidFill>
-              </a:rPr>
-              <a:t>La oportunidad identificada</a:t>
-            </a:r>
-          </a:p>
-        </p:txBody>
-      </p:sp>
-      <p:sp>
-        <p:nvSpPr>
-          <p:cNvPr id="4" name="Rectangle 3"/>
-          <p:cNvSpPr/>
-          <p:nvPr/>
-        </p:nvSpPr>
-        <p:spPr>
-          <a:xfrm>
-            <a:off x="640080" y="1143000"/>
-            <a:ext cx="1371600" cy="36576"/>
+            <a:ext cx="12191695" cy="45720"/>
           </a:xfrm>
           <a:prstGeom prst="rect">
             <a:avLst/>
@@ -6493,14 +7390,14 @@
       </p:sp>
       <p:sp>
         <p:nvSpPr>
-          <p:cNvPr id="5" name="TextBox 4"/>
+          <p:cNvPr id="3" name="TextBox 2"/>
           <p:cNvSpPr txBox="1"/>
           <p:nvPr/>
         </p:nvSpPr>
         <p:spPr>
           <a:xfrm>
-            <a:off x="640080" y="1371600"/>
-            <a:ext cx="10911535" cy="640080"/>
+            <a:off x="640080" y="1920240"/>
+            <a:ext cx="10911535" cy="2560320"/>
           </a:xfrm>
           <a:prstGeom prst="rect">
             <a:avLst/>
@@ -6513,27 +7410,32 @@
           </a:bodyPr>
           <a:lstStyle/>
           <a:p>
-            <a:r>
-              <a:rPr sz="1700" b="1">
+            <a:pPr algn="ctr"/>
+            <a:r>
+              <a:rPr sz="3600" b="1">
                 <a:solidFill>
-                  <a:srgbClr val="2E5F7E"/>
+                  <a:srgbClr val="FFFFFF"/>
                 </a:solidFill>
               </a:rPr>
-              <a:t>"Diseñar una herramienta que permita a los ciudadanos acceder a información confiable, clara y oportuna."</a:t>
-            </a:r>
-          </a:p>
-        </p:txBody>
-      </p:sp>
-      <p:sp>
-        <p:nvSpPr>
-          <p:cNvPr id="6" name="TextBox 5"/>
+              <a:t>No es un problema de escasez de informacion.</a:t>
+            </a:r>
+            <a:br/>
+            <a:r>
+              <a:t>Es un problema de intermediacion.</a:t>
+            </a:r>
+          </a:p>
+        </p:txBody>
+      </p:sp>
+      <p:sp>
+        <p:nvSpPr>
+          <p:cNvPr id="4" name="TextBox 3"/>
           <p:cNvSpPr txBox="1"/>
           <p:nvPr/>
         </p:nvSpPr>
         <p:spPr>
           <a:xfrm>
-            <a:off x="640080" y="2011680"/>
-            <a:ext cx="10911535" cy="4389120"/>
+            <a:off x="640080" y="4297680"/>
+            <a:ext cx="10911535" cy="1280160"/>
           </a:xfrm>
           <a:prstGeom prst="rect">
             <a:avLst/>
@@ -6546,122 +7448,18 @@
           </a:bodyPr>
           <a:lstStyle/>
           <a:p>
-            <a:pPr>
-              <a:spcBef>
-                <a:spcPts val="400"/>
-              </a:spcBef>
-            </a:pPr>
-            <a:r>
-              <a:rPr sz="1600">
+            <a:pPr algn="ctr"/>
+            <a:r>
+              <a:rPr sz="1800" b="0">
                 <a:solidFill>
-                  <a:srgbClr val="1F2A35"/>
+                  <a:srgbClr val="4A9BBF"/>
                 </a:solidFill>
               </a:rPr>
-              <a:t>La justificación emerge en 5 dimensiones:</a:t>
-            </a:r>
-          </a:p>
-          <a:p>
-            <a:pPr>
-              <a:spcBef>
-                <a:spcPts val="400"/>
-              </a:spcBef>
-            </a:pPr>
-          </a:p>
-          <a:p>
-            <a:pPr>
-              <a:spcBef>
-                <a:spcPts val="400"/>
-              </a:spcBef>
-            </a:pPr>
-            <a:r>
-              <a:rPr sz="1600">
-                <a:solidFill>
-                  <a:srgbClr val="1F2A35"/>
-                </a:solidFill>
-              </a:rPr>
-              <a:t>  1. Preservar la integridad de la democracia</a:t>
-            </a:r>
-          </a:p>
-          <a:p>
-            <a:pPr>
-              <a:spcBef>
-                <a:spcPts val="400"/>
-              </a:spcBef>
-            </a:pPr>
-            <a:r>
-              <a:rPr sz="1600">
-                <a:solidFill>
-                  <a:srgbClr val="1F2A35"/>
-                </a:solidFill>
-              </a:rPr>
-              <a:t>  2. Fomentar el voto informado</a:t>
-            </a:r>
-          </a:p>
-          <a:p>
-            <a:pPr>
-              <a:spcBef>
-                <a:spcPts val="400"/>
-              </a:spcBef>
-            </a:pPr>
-            <a:r>
-              <a:rPr sz="1600">
-                <a:solidFill>
-                  <a:srgbClr val="1F2A35"/>
-                </a:solidFill>
-              </a:rPr>
-              <a:t>  3. Fortalecer la confianza en las instituciones</a:t>
-            </a:r>
-          </a:p>
-          <a:p>
-            <a:pPr>
-              <a:spcBef>
-                <a:spcPts val="400"/>
-              </a:spcBef>
-            </a:pPr>
-            <a:r>
-              <a:rPr sz="1600">
-                <a:solidFill>
-                  <a:srgbClr val="1F2A35"/>
-                </a:solidFill>
-              </a:rPr>
-              <a:t>  4. Evitar impactos negativos en la participación electoral</a:t>
-            </a:r>
-          </a:p>
-          <a:p>
-            <a:pPr>
-              <a:spcBef>
-                <a:spcPts val="400"/>
-              </a:spcBef>
-            </a:pPr>
-            <a:r>
-              <a:rPr sz="1600">
-                <a:solidFill>
-                  <a:srgbClr val="1F2A35"/>
-                </a:solidFill>
-              </a:rPr>
-              <a:t>  5. Adaptarse a un entorno digital cambiante</a:t>
-            </a:r>
-          </a:p>
-          <a:p>
-            <a:pPr>
-              <a:spcBef>
-                <a:spcPts val="400"/>
-              </a:spcBef>
-            </a:pPr>
-          </a:p>
-          <a:p>
-            <a:pPr>
-              <a:spcBef>
-                <a:spcPts val="400"/>
-              </a:spcBef>
-            </a:pPr>
-            <a:r>
-              <a:rPr sz="1600">
-                <a:solidFill>
-                  <a:srgbClr val="1F2A35"/>
-                </a:solidFill>
-              </a:rPr>
-              <a:t>→ Un espacio vacante · Una necesidad real · Un problema abordable.</a:t>
+              <a:t>Las posturas de los candidatos existen en el registro publico.</a:t>
+            </a:r>
+            <a:br/>
+            <a:r>
+              <a:t>El problema es transformar esa informacion bruta en conocimiento accionable.</a:t>
             </a:r>
           </a:p>
         </p:txBody>
@@ -6700,8 +7498,8 @@
         </p:nvSpPr>
         <p:spPr>
           <a:xfrm>
-            <a:off x="640080" y="2011680"/>
-            <a:ext cx="54864" cy="2286000"/>
+            <a:off x="0" y="0"/>
+            <a:ext cx="12191695" cy="45720"/>
           </a:xfrm>
           <a:prstGeom prst="rect">
             <a:avLst/>
@@ -6743,8 +7541,8 @@
         </p:nvSpPr>
         <p:spPr>
           <a:xfrm>
-            <a:off x="640080" y="1463040"/>
-            <a:ext cx="10911535" cy="457200"/>
+            <a:off x="640080" y="1371600"/>
+            <a:ext cx="10911535" cy="365760"/>
           </a:xfrm>
           <a:prstGeom prst="rect">
             <a:avLst/>
@@ -6752,33 +7550,75 @@
           <a:noFill/>
         </p:spPr>
         <p:txBody>
-          <a:bodyPr wrap="square">
+          <a:bodyPr wrap="none">
             <a:spAutoFit/>
           </a:bodyPr>
           <a:lstStyle/>
           <a:p>
-            <a:pPr algn="l"/>
-            <a:r>
-              <a:rPr sz="1100" b="1" i="0">
+            <a:r>
+              <a:rPr sz="1000" b="1">
                 <a:solidFill>
                   <a:srgbClr val="3A9E7A"/>
                 </a:solidFill>
               </a:rPr>
-              <a:t>CIERRE — PRESENTACIÓN 1 DE 4</a:t>
-            </a:r>
-          </a:p>
-        </p:txBody>
-      </p:sp>
-      <p:sp>
-        <p:nvSpPr>
-          <p:cNvPr id="4" name="TextBox 3"/>
+              <a:t>CIERRE -- PRESENTACION 1 DE 4</a:t>
+            </a:r>
+          </a:p>
+        </p:txBody>
+      </p:sp>
+      <p:sp>
+        <p:nvSpPr>
+          <p:cNvPr id="4" name="Rectangle 3"/>
+          <p:cNvSpPr/>
+          <p:nvPr/>
+        </p:nvSpPr>
+        <p:spPr>
+          <a:xfrm>
+            <a:off x="640080" y="1874519"/>
+            <a:ext cx="45720" cy="2560320"/>
+          </a:xfrm>
+          <a:prstGeom prst="rect">
+            <a:avLst/>
+          </a:prstGeom>
+          <a:solidFill>
+            <a:srgbClr val="3A9E7A"/>
+          </a:solidFill>
+          <a:ln>
+            <a:noFill/>
+          </a:ln>
+        </p:spPr>
+        <p:style>
+          <a:lnRef idx="1">
+            <a:schemeClr val="accent1"/>
+          </a:lnRef>
+          <a:fillRef idx="3">
+            <a:schemeClr val="accent1"/>
+          </a:fillRef>
+          <a:effectRef idx="2">
+            <a:schemeClr val="accent1"/>
+          </a:effectRef>
+          <a:fontRef idx="minor">
+            <a:schemeClr val="lt1"/>
+          </a:fontRef>
+        </p:style>
+        <p:txBody>
+          <a:bodyPr rtlCol="0" anchor="ctr"/>
+          <a:lstStyle/>
+          <a:p>
+            <a:pPr algn="ctr"/>
+          </a:p>
+        </p:txBody>
+      </p:sp>
+      <p:sp>
+        <p:nvSpPr>
+          <p:cNvPr id="5" name="TextBox 4"/>
           <p:cNvSpPr txBox="1"/>
           <p:nvPr/>
         </p:nvSpPr>
         <p:spPr>
           <a:xfrm>
-            <a:off x="640080" y="2194560"/>
-            <a:ext cx="10911535" cy="2286000"/>
+            <a:off x="822960" y="1920240"/>
+            <a:ext cx="10728655" cy="2377440"/>
           </a:xfrm>
           <a:prstGeom prst="rect">
             <a:avLst/>
@@ -6791,28 +7631,27 @@
           </a:bodyPr>
           <a:lstStyle/>
           <a:p>
-            <a:pPr algn="l"/>
-            <a:r>
-              <a:rPr sz="4400" b="1">
+            <a:r>
+              <a:rPr sz="4200" b="1">
                 <a:solidFill>
                   <a:srgbClr val="FFFFFF"/>
                 </a:solidFill>
               </a:rPr>
-              <a:t>Un problema real. Una brecha concreta. Una oportunidad verificada.</a:t>
-            </a:r>
-          </a:p>
-        </p:txBody>
-      </p:sp>
-      <p:sp>
-        <p:nvSpPr>
-          <p:cNvPr id="5" name="TextBox 4"/>
+              <a:t>Un problema real. Una brecha concreta. Una hipotesis verificada.</a:t>
+            </a:r>
+          </a:p>
+        </p:txBody>
+      </p:sp>
+      <p:sp>
+        <p:nvSpPr>
+          <p:cNvPr id="6" name="TextBox 5"/>
           <p:cNvSpPr txBox="1"/>
           <p:nvPr/>
         </p:nvSpPr>
         <p:spPr>
           <a:xfrm>
-            <a:off x="640080" y="4480560"/>
-            <a:ext cx="10911535" cy="1097280"/>
+            <a:off x="822960" y="4480560"/>
+            <a:ext cx="10728655" cy="1097280"/>
           </a:xfrm>
           <a:prstGeom prst="rect">
             <a:avLst/>
@@ -6825,32 +7664,27 @@
           </a:bodyPr>
           <a:lstStyle/>
           <a:p>
-            <a:pPr algn="l"/>
-            <a:r>
-              <a:rPr sz="1800" b="0">
+            <a:r>
+              <a:rPr sz="1700" b="0">
                 <a:solidFill>
                   <a:srgbClr val="4A9BBF"/>
                 </a:solidFill>
               </a:rPr>
-              <a:t>Continuación → Presentación 2: La Evolución de la Idea</a:t>
-            </a:r>
-            <a:br/>
-            <a:r>
-              <a:t>Cómo una observación empírica se transformó en un sistema.</a:t>
-            </a:r>
-          </a:p>
-        </p:txBody>
-      </p:sp>
-      <p:sp>
-        <p:nvSpPr>
-          <p:cNvPr id="6" name="TextBox 5"/>
+              <a:t>Continuacion -&gt; P2: Como evoluciono la idea hacia la solucion actual.</a:t>
+            </a:r>
+          </a:p>
+        </p:txBody>
+      </p:sp>
+      <p:sp>
+        <p:nvSpPr>
+          <p:cNvPr id="7" name="TextBox 6"/>
           <p:cNvSpPr txBox="1"/>
           <p:nvPr/>
         </p:nvSpPr>
         <p:spPr>
           <a:xfrm>
-            <a:off x="640080" y="6217920"/>
-            <a:ext cx="10911535" cy="365760"/>
+            <a:off x="640080" y="6263640"/>
+            <a:ext cx="10911535" cy="320040"/>
           </a:xfrm>
           <a:prstGeom prst="rect">
             <a:avLst/>
@@ -6870,7 +7704,7 @@
                   <a:srgbClr val="7BA098"/>
                 </a:solidFill>
               </a:rPr>
-              <a:t>VotoAFin · UTFSM · Jenifer Castillo · 2026</a:t>
+              <a:t>VotoAfin  --  UTFSM  --  Jenifer Castillo  --  2026</a:t>
             </a:r>
           </a:p>
         </p:txBody>
@@ -6889,7 +7723,7 @@
     <p:bg>
       <p:bgPr>
         <a:solidFill>
-          <a:srgbClr val="1C3A52"/>
+          <a:srgbClr val="F7F8F7"/>
         </a:solidFill>
         <a:effectLst/>
       </p:bgPr>
@@ -6910,9 +7744,358 @@
         <p:spPr>
           <a:xfrm>
             <a:off x="0" y="0"/>
-            <a:ext cx="12191695" cy="54864"/>
-          </a:xfrm>
-          <a:prstGeom prst="rect">
+            <a:ext cx="12191695" cy="64008"/>
+          </a:xfrm>
+          <a:prstGeom prst="rect">
+            <a:avLst/>
+          </a:prstGeom>
+          <a:solidFill>
+            <a:srgbClr val="2E5F7E"/>
+          </a:solidFill>
+          <a:ln>
+            <a:noFill/>
+          </a:ln>
+        </p:spPr>
+        <p:style>
+          <a:lnRef idx="1">
+            <a:schemeClr val="accent1"/>
+          </a:lnRef>
+          <a:fillRef idx="3">
+            <a:schemeClr val="accent1"/>
+          </a:fillRef>
+          <a:effectRef idx="2">
+            <a:schemeClr val="accent1"/>
+          </a:effectRef>
+          <a:fontRef idx="minor">
+            <a:schemeClr val="lt1"/>
+          </a:fontRef>
+        </p:style>
+        <p:txBody>
+          <a:bodyPr rtlCol="0" anchor="ctr"/>
+          <a:lstStyle/>
+          <a:p>
+            <a:pPr algn="ctr"/>
+          </a:p>
+        </p:txBody>
+      </p:sp>
+      <p:sp>
+        <p:nvSpPr>
+          <p:cNvPr id="3" name="TextBox 2"/>
+          <p:cNvSpPr txBox="1"/>
+          <p:nvPr/>
+        </p:nvSpPr>
+        <p:spPr>
+          <a:xfrm>
+            <a:off x="640080" y="256032"/>
+            <a:ext cx="10911535" cy="685800"/>
+          </a:xfrm>
+          <a:prstGeom prst="rect">
+            <a:avLst/>
+          </a:prstGeom>
+          <a:noFill/>
+        </p:spPr>
+        <p:txBody>
+          <a:bodyPr wrap="none">
+            <a:spAutoFit/>
+          </a:bodyPr>
+          <a:lstStyle/>
+          <a:p>
+            <a:r>
+              <a:rPr sz="2600" b="1">
+                <a:solidFill>
+                  <a:srgbClr val="1C3A52"/>
+                </a:solidFill>
+              </a:rPr>
+              <a:t>Chile 2020-2024 -- 8 procesos electorales en 4 anos</a:t>
+            </a:r>
+          </a:p>
+        </p:txBody>
+      </p:sp>
+      <p:sp>
+        <p:nvSpPr>
+          <p:cNvPr id="4" name="Rectangle 3"/>
+          <p:cNvSpPr/>
+          <p:nvPr/>
+        </p:nvSpPr>
+        <p:spPr>
+          <a:xfrm>
+            <a:off x="640080" y="3172968"/>
+            <a:ext cx="10911535" cy="54864"/>
+          </a:xfrm>
+          <a:prstGeom prst="rect">
+            <a:avLst/>
+          </a:prstGeom>
+          <a:solidFill>
+            <a:srgbClr val="CBD1CD"/>
+          </a:solidFill>
+          <a:ln>
+            <a:noFill/>
+          </a:ln>
+        </p:spPr>
+        <p:style>
+          <a:lnRef idx="1">
+            <a:schemeClr val="accent1"/>
+          </a:lnRef>
+          <a:fillRef idx="3">
+            <a:schemeClr val="accent1"/>
+          </a:fillRef>
+          <a:effectRef idx="2">
+            <a:schemeClr val="accent1"/>
+          </a:effectRef>
+          <a:fontRef idx="minor">
+            <a:schemeClr val="lt1"/>
+          </a:fontRef>
+        </p:style>
+        <p:txBody>
+          <a:bodyPr rtlCol="0" anchor="ctr"/>
+          <a:lstStyle/>
+          <a:p>
+            <a:pPr algn="ctr"/>
+          </a:p>
+        </p:txBody>
+      </p:sp>
+      <p:sp>
+        <p:nvSpPr>
+          <p:cNvPr id="5" name="Oval 4"/>
+          <p:cNvSpPr/>
+          <p:nvPr/>
+        </p:nvSpPr>
+        <p:spPr>
+          <a:xfrm>
+            <a:off x="1575785" y="3044952"/>
+            <a:ext cx="310896" cy="310896"/>
+          </a:xfrm>
+          <a:prstGeom prst="ellipse">
+            <a:avLst/>
+          </a:prstGeom>
+          <a:solidFill>
+            <a:srgbClr val="2E5F7E"/>
+          </a:solidFill>
+          <a:ln>
+            <a:noFill/>
+          </a:ln>
+        </p:spPr>
+        <p:style>
+          <a:lnRef idx="1">
+            <a:schemeClr val="accent1"/>
+          </a:lnRef>
+          <a:fillRef idx="3">
+            <a:schemeClr val="accent1"/>
+          </a:fillRef>
+          <a:effectRef idx="2">
+            <a:schemeClr val="accent1"/>
+          </a:effectRef>
+          <a:fontRef idx="minor">
+            <a:schemeClr val="lt1"/>
+          </a:fontRef>
+        </p:style>
+        <p:txBody>
+          <a:bodyPr rtlCol="0" anchor="ctr"/>
+          <a:lstStyle/>
+          <a:p>
+            <a:pPr algn="ctr"/>
+          </a:p>
+        </p:txBody>
+      </p:sp>
+      <p:sp>
+        <p:nvSpPr>
+          <p:cNvPr id="6" name="TextBox 5"/>
+          <p:cNvSpPr txBox="1"/>
+          <p:nvPr/>
+        </p:nvSpPr>
+        <p:spPr>
+          <a:xfrm>
+            <a:off x="1091153" y="2377440"/>
+            <a:ext cx="1280160" cy="457200"/>
+          </a:xfrm>
+          <a:prstGeom prst="rect">
+            <a:avLst/>
+          </a:prstGeom>
+          <a:noFill/>
+        </p:spPr>
+        <p:txBody>
+          <a:bodyPr wrap="none">
+            <a:spAutoFit/>
+          </a:bodyPr>
+          <a:lstStyle/>
+          <a:p>
+            <a:pPr algn="ctr"/>
+            <a:r>
+              <a:rPr sz="1400" b="1">
+                <a:solidFill>
+                  <a:srgbClr val="2E5F7E"/>
+                </a:solidFill>
+              </a:rPr>
+              <a:t>Oct 2020</a:t>
+            </a:r>
+          </a:p>
+        </p:txBody>
+      </p:sp>
+      <p:sp>
+        <p:nvSpPr>
+          <p:cNvPr id="7" name="TextBox 6"/>
+          <p:cNvSpPr txBox="1"/>
+          <p:nvPr/>
+        </p:nvSpPr>
+        <p:spPr>
+          <a:xfrm>
+            <a:off x="862553" y="3566160"/>
+            <a:ext cx="1737360" cy="2194560"/>
+          </a:xfrm>
+          <a:prstGeom prst="rect">
+            <a:avLst/>
+          </a:prstGeom>
+          <a:noFill/>
+        </p:spPr>
+        <p:txBody>
+          <a:bodyPr wrap="square">
+            <a:spAutoFit/>
+          </a:bodyPr>
+          <a:lstStyle/>
+          <a:p>
+            <a:pPr algn="ctr"/>
+            <a:r>
+              <a:rPr sz="1300" b="0">
+                <a:solidFill>
+                  <a:srgbClr val="4A5568"/>
+                </a:solidFill>
+              </a:rPr>
+              <a:t>Plebiscito</a:t>
+            </a:r>
+            <a:br/>
+            <a:r>
+              <a:t>de entrada</a:t>
+            </a:r>
+          </a:p>
+        </p:txBody>
+      </p:sp>
+      <p:sp>
+        <p:nvSpPr>
+          <p:cNvPr id="8" name="Oval 7"/>
+          <p:cNvSpPr/>
+          <p:nvPr/>
+        </p:nvSpPr>
+        <p:spPr>
+          <a:xfrm>
+            <a:off x="3758092" y="3044952"/>
+            <a:ext cx="310896" cy="310896"/>
+          </a:xfrm>
+          <a:prstGeom prst="ellipse">
+            <a:avLst/>
+          </a:prstGeom>
+          <a:solidFill>
+            <a:srgbClr val="244A63"/>
+          </a:solidFill>
+          <a:ln>
+            <a:noFill/>
+          </a:ln>
+        </p:spPr>
+        <p:style>
+          <a:lnRef idx="1">
+            <a:schemeClr val="accent1"/>
+          </a:lnRef>
+          <a:fillRef idx="3">
+            <a:schemeClr val="accent1"/>
+          </a:fillRef>
+          <a:effectRef idx="2">
+            <a:schemeClr val="accent1"/>
+          </a:effectRef>
+          <a:fontRef idx="minor">
+            <a:schemeClr val="lt1"/>
+          </a:fontRef>
+        </p:style>
+        <p:txBody>
+          <a:bodyPr rtlCol="0" anchor="ctr"/>
+          <a:lstStyle/>
+          <a:p>
+            <a:pPr algn="ctr"/>
+          </a:p>
+        </p:txBody>
+      </p:sp>
+      <p:sp>
+        <p:nvSpPr>
+          <p:cNvPr id="9" name="TextBox 8"/>
+          <p:cNvSpPr txBox="1"/>
+          <p:nvPr/>
+        </p:nvSpPr>
+        <p:spPr>
+          <a:xfrm>
+            <a:off x="3273460" y="2377440"/>
+            <a:ext cx="1280160" cy="457200"/>
+          </a:xfrm>
+          <a:prstGeom prst="rect">
+            <a:avLst/>
+          </a:prstGeom>
+          <a:noFill/>
+        </p:spPr>
+        <p:txBody>
+          <a:bodyPr wrap="none">
+            <a:spAutoFit/>
+          </a:bodyPr>
+          <a:lstStyle/>
+          <a:p>
+            <a:pPr algn="ctr"/>
+            <a:r>
+              <a:rPr sz="1400" b="1">
+                <a:solidFill>
+                  <a:srgbClr val="244A63"/>
+                </a:solidFill>
+              </a:rPr>
+              <a:t>Nov 2021</a:t>
+            </a:r>
+          </a:p>
+        </p:txBody>
+      </p:sp>
+      <p:sp>
+        <p:nvSpPr>
+          <p:cNvPr id="10" name="TextBox 9"/>
+          <p:cNvSpPr txBox="1"/>
+          <p:nvPr/>
+        </p:nvSpPr>
+        <p:spPr>
+          <a:xfrm>
+            <a:off x="3044860" y="3566160"/>
+            <a:ext cx="1737360" cy="2194560"/>
+          </a:xfrm>
+          <a:prstGeom prst="rect">
+            <a:avLst/>
+          </a:prstGeom>
+          <a:noFill/>
+        </p:spPr>
+        <p:txBody>
+          <a:bodyPr wrap="square">
+            <a:spAutoFit/>
+          </a:bodyPr>
+          <a:lstStyle/>
+          <a:p>
+            <a:pPr algn="ctr"/>
+            <a:r>
+              <a:rPr sz="1300" b="0">
+                <a:solidFill>
+                  <a:srgbClr val="4A5568"/>
+                </a:solidFill>
+              </a:rPr>
+              <a:t>Presidencial</a:t>
+            </a:r>
+            <a:br/>
+            <a:r>
+              <a:t>+ Convencionales</a:t>
+            </a:r>
+          </a:p>
+        </p:txBody>
+      </p:sp>
+      <p:sp>
+        <p:nvSpPr>
+          <p:cNvPr id="11" name="Oval 10"/>
+          <p:cNvSpPr/>
+          <p:nvPr/>
+        </p:nvSpPr>
+        <p:spPr>
+          <a:xfrm>
+            <a:off x="5940399" y="3044952"/>
+            <a:ext cx="310896" cy="310896"/>
+          </a:xfrm>
+          <a:prstGeom prst="ellipse">
             <a:avLst/>
           </a:prstGeom>
           <a:solidFill>
@@ -6946,14 +8129,48 @@
       </p:sp>
       <p:sp>
         <p:nvSpPr>
-          <p:cNvPr id="3" name="TextBox 2"/>
+          <p:cNvPr id="12" name="TextBox 11"/>
           <p:cNvSpPr txBox="1"/>
           <p:nvPr/>
         </p:nvSpPr>
         <p:spPr>
           <a:xfrm>
-            <a:off x="640080" y="274320"/>
-            <a:ext cx="10911535" cy="731520"/>
+            <a:off x="5455767" y="2377440"/>
+            <a:ext cx="1280160" cy="457200"/>
+          </a:xfrm>
+          <a:prstGeom prst="rect">
+            <a:avLst/>
+          </a:prstGeom>
+          <a:noFill/>
+        </p:spPr>
+        <p:txBody>
+          <a:bodyPr wrap="none">
+            <a:spAutoFit/>
+          </a:bodyPr>
+          <a:lstStyle/>
+          <a:p>
+            <a:pPr algn="ctr"/>
+            <a:r>
+              <a:rPr sz="1400" b="1">
+                <a:solidFill>
+                  <a:srgbClr val="3A9E7A"/>
+                </a:solidFill>
+              </a:rPr>
+              <a:t>Sep 2022</a:t>
+            </a:r>
+          </a:p>
+        </p:txBody>
+      </p:sp>
+      <p:sp>
+        <p:nvSpPr>
+          <p:cNvPr id="13" name="TextBox 12"/>
+          <p:cNvSpPr txBox="1"/>
+          <p:nvPr/>
+        </p:nvSpPr>
+        <p:spPr>
+          <a:xfrm>
+            <a:off x="5227167" y="3566160"/>
+            <a:ext cx="1737360" cy="2194560"/>
           </a:xfrm>
           <a:prstGeom prst="rect">
             <a:avLst/>
@@ -6966,27 +8183,109 @@
           </a:bodyPr>
           <a:lstStyle/>
           <a:p>
-            <a:r>
-              <a:rPr sz="2400" b="1">
+            <a:pPr algn="ctr"/>
+            <a:r>
+              <a:rPr sz="1300" b="0">
                 <a:solidFill>
-                  <a:srgbClr val="4A9BBF"/>
+                  <a:srgbClr val="4A5568"/>
                 </a:solidFill>
               </a:rPr>
-              <a:t>Chile 2020–2024</a:t>
-            </a:r>
-          </a:p>
-        </p:txBody>
-      </p:sp>
-      <p:sp>
-        <p:nvSpPr>
-          <p:cNvPr id="4" name="TextBox 3"/>
+              <a:t>Plebiscito</a:t>
+            </a:r>
+            <a:br/>
+            <a:r>
+              <a:t>constitucional</a:t>
+            </a:r>
+          </a:p>
+        </p:txBody>
+      </p:sp>
+      <p:sp>
+        <p:nvSpPr>
+          <p:cNvPr id="14" name="Oval 13"/>
+          <p:cNvSpPr/>
+          <p:nvPr/>
+        </p:nvSpPr>
+        <p:spPr>
+          <a:xfrm>
+            <a:off x="8122706" y="3044952"/>
+            <a:ext cx="310896" cy="310896"/>
+          </a:xfrm>
+          <a:prstGeom prst="ellipse">
+            <a:avLst/>
+          </a:prstGeom>
+          <a:solidFill>
+            <a:srgbClr val="D97706"/>
+          </a:solidFill>
+          <a:ln>
+            <a:noFill/>
+          </a:ln>
+        </p:spPr>
+        <p:style>
+          <a:lnRef idx="1">
+            <a:schemeClr val="accent1"/>
+          </a:lnRef>
+          <a:fillRef idx="3">
+            <a:schemeClr val="accent1"/>
+          </a:fillRef>
+          <a:effectRef idx="2">
+            <a:schemeClr val="accent1"/>
+          </a:effectRef>
+          <a:fontRef idx="minor">
+            <a:schemeClr val="lt1"/>
+          </a:fontRef>
+        </p:style>
+        <p:txBody>
+          <a:bodyPr rtlCol="0" anchor="ctr"/>
+          <a:lstStyle/>
+          <a:p>
+            <a:pPr algn="ctr"/>
+          </a:p>
+        </p:txBody>
+      </p:sp>
+      <p:sp>
+        <p:nvSpPr>
+          <p:cNvPr id="15" name="TextBox 14"/>
           <p:cNvSpPr txBox="1"/>
           <p:nvPr/>
         </p:nvSpPr>
         <p:spPr>
           <a:xfrm>
-            <a:off x="640080" y="1188720"/>
-            <a:ext cx="10911535" cy="1371600"/>
+            <a:off x="7638074" y="2377440"/>
+            <a:ext cx="1280160" cy="457200"/>
+          </a:xfrm>
+          <a:prstGeom prst="rect">
+            <a:avLst/>
+          </a:prstGeom>
+          <a:noFill/>
+        </p:spPr>
+        <p:txBody>
+          <a:bodyPr wrap="none">
+            <a:spAutoFit/>
+          </a:bodyPr>
+          <a:lstStyle/>
+          <a:p>
+            <a:pPr algn="ctr"/>
+            <a:r>
+              <a:rPr sz="1400" b="1">
+                <a:solidFill>
+                  <a:srgbClr val="D97706"/>
+                </a:solidFill>
+              </a:rPr>
+              <a:t>May-Dic 2023</a:t>
+            </a:r>
+          </a:p>
+        </p:txBody>
+      </p:sp>
+      <p:sp>
+        <p:nvSpPr>
+          <p:cNvPr id="16" name="TextBox 15"/>
+          <p:cNvSpPr txBox="1"/>
+          <p:nvPr/>
+        </p:nvSpPr>
+        <p:spPr>
+          <a:xfrm>
+            <a:off x="7409474" y="3566160"/>
+            <a:ext cx="1737360" cy="2194560"/>
           </a:xfrm>
           <a:prstGeom prst="rect">
             <a:avLst/>
@@ -6999,27 +8298,109 @@
           </a:bodyPr>
           <a:lstStyle/>
           <a:p>
-            <a:r>
-              <a:rPr sz="3400" b="1">
+            <a:pPr algn="ctr"/>
+            <a:r>
+              <a:rPr sz="1300" b="0">
                 <a:solidFill>
-                  <a:srgbClr val="FFFFFF"/>
+                  <a:srgbClr val="4A5568"/>
                 </a:solidFill>
               </a:rPr>
-              <a:t>8 procesos electorales en 4 años</a:t>
-            </a:r>
-          </a:p>
-        </p:txBody>
-      </p:sp>
-      <p:sp>
-        <p:nvSpPr>
-          <p:cNvPr id="5" name="TextBox 4"/>
+              <a:t>Consejo</a:t>
+            </a:r>
+            <a:br/>
+            <a:r>
+              <a:t>Constitucional</a:t>
+            </a:r>
+          </a:p>
+        </p:txBody>
+      </p:sp>
+      <p:sp>
+        <p:nvSpPr>
+          <p:cNvPr id="17" name="Oval 16"/>
+          <p:cNvSpPr/>
+          <p:nvPr/>
+        </p:nvSpPr>
+        <p:spPr>
+          <a:xfrm>
+            <a:off x="10305013" y="3044952"/>
+            <a:ext cx="310896" cy="310896"/>
+          </a:xfrm>
+          <a:prstGeom prst="ellipse">
+            <a:avLst/>
+          </a:prstGeom>
+          <a:solidFill>
+            <a:srgbClr val="DC2626"/>
+          </a:solidFill>
+          <a:ln>
+            <a:noFill/>
+          </a:ln>
+        </p:spPr>
+        <p:style>
+          <a:lnRef idx="1">
+            <a:schemeClr val="accent1"/>
+          </a:lnRef>
+          <a:fillRef idx="3">
+            <a:schemeClr val="accent1"/>
+          </a:fillRef>
+          <a:effectRef idx="2">
+            <a:schemeClr val="accent1"/>
+          </a:effectRef>
+          <a:fontRef idx="minor">
+            <a:schemeClr val="lt1"/>
+          </a:fontRef>
+        </p:style>
+        <p:txBody>
+          <a:bodyPr rtlCol="0" anchor="ctr"/>
+          <a:lstStyle/>
+          <a:p>
+            <a:pPr algn="ctr"/>
+          </a:p>
+        </p:txBody>
+      </p:sp>
+      <p:sp>
+        <p:nvSpPr>
+          <p:cNvPr id="18" name="TextBox 17"/>
           <p:cNvSpPr txBox="1"/>
           <p:nvPr/>
         </p:nvSpPr>
         <p:spPr>
           <a:xfrm>
-            <a:off x="640080" y="2651760"/>
-            <a:ext cx="10911535" cy="3840480"/>
+            <a:off x="9820381" y="2377440"/>
+            <a:ext cx="1280160" cy="457200"/>
+          </a:xfrm>
+          <a:prstGeom prst="rect">
+            <a:avLst/>
+          </a:prstGeom>
+          <a:noFill/>
+        </p:spPr>
+        <p:txBody>
+          <a:bodyPr wrap="none">
+            <a:spAutoFit/>
+          </a:bodyPr>
+          <a:lstStyle/>
+          <a:p>
+            <a:pPr algn="ctr"/>
+            <a:r>
+              <a:rPr sz="1400" b="1">
+                <a:solidFill>
+                  <a:srgbClr val="DC2626"/>
+                </a:solidFill>
+              </a:rPr>
+              <a:t>Oct 2024</a:t>
+            </a:r>
+          </a:p>
+        </p:txBody>
+      </p:sp>
+      <p:sp>
+        <p:nvSpPr>
+          <p:cNvPr id="19" name="TextBox 18"/>
+          <p:cNvSpPr txBox="1"/>
+          <p:nvPr/>
+        </p:nvSpPr>
+        <p:spPr>
+          <a:xfrm>
+            <a:off x="9591781" y="3566160"/>
+            <a:ext cx="1737360" cy="2194560"/>
           </a:xfrm>
           <a:prstGeom prst="rect">
             <a:avLst/>
@@ -7032,123 +8413,18 @@
           </a:bodyPr>
           <a:lstStyle/>
           <a:p>
-            <a:pPr>
-              <a:spcBef>
-                <a:spcPts val="400"/>
-              </a:spcBef>
-            </a:pPr>
-            <a:r>
-              <a:rPr sz="1600">
+            <a:pPr algn="ctr"/>
+            <a:r>
+              <a:rPr sz="1300" b="0">
                 <a:solidFill>
-                  <a:srgbClr val="4A9BBF"/>
+                  <a:srgbClr val="4A5568"/>
                 </a:solidFill>
               </a:rPr>
-              <a:t>• Plebiscito de entrada (oct 2020)</a:t>
-            </a:r>
-          </a:p>
-          <a:p>
-            <a:pPr>
-              <a:spcBef>
-                <a:spcPts val="400"/>
-              </a:spcBef>
-            </a:pPr>
-            <a:r>
-              <a:rPr sz="1600">
-                <a:solidFill>
-                  <a:srgbClr val="4A9BBF"/>
-                </a:solidFill>
-              </a:rPr>
-              <a:t>• Convencionales + primera vuelta presidencial (nov 2021)</a:t>
-            </a:r>
-          </a:p>
-          <a:p>
-            <a:pPr>
-              <a:spcBef>
-                <a:spcPts val="400"/>
-              </a:spcBef>
-            </a:pPr>
-            <a:r>
-              <a:rPr sz="1600">
-                <a:solidFill>
-                  <a:srgbClr val="4A9BBF"/>
-                </a:solidFill>
-              </a:rPr>
-              <a:t>• Segunda vuelta presidencial (dic 2021)</a:t>
-            </a:r>
-          </a:p>
-          <a:p>
-            <a:pPr>
-              <a:spcBef>
-                <a:spcPts val="400"/>
-              </a:spcBef>
-            </a:pPr>
-            <a:r>
-              <a:rPr sz="1600">
-                <a:solidFill>
-                  <a:srgbClr val="4A9BBF"/>
-                </a:solidFill>
-              </a:rPr>
-              <a:t>• Plebiscito de salida del 1er proceso constitucional (sep 2022)</a:t>
-            </a:r>
-          </a:p>
-          <a:p>
-            <a:pPr>
-              <a:spcBef>
-                <a:spcPts val="400"/>
-              </a:spcBef>
-            </a:pPr>
-            <a:r>
-              <a:rPr sz="1600">
-                <a:solidFill>
-                  <a:srgbClr val="4A9BBF"/>
-                </a:solidFill>
-              </a:rPr>
-              <a:t>• Consejo Constitucional (may 2023)</a:t>
-            </a:r>
-          </a:p>
-          <a:p>
-            <a:pPr>
-              <a:spcBef>
-                <a:spcPts val="400"/>
-              </a:spcBef>
-            </a:pPr>
-            <a:r>
-              <a:rPr sz="1600">
-                <a:solidFill>
-                  <a:srgbClr val="4A9BBF"/>
-                </a:solidFill>
-              </a:rPr>
-              <a:t>• Plebiscito de salida del 2do proceso constitucional (dic 2023)</a:t>
-            </a:r>
-          </a:p>
-          <a:p>
-            <a:pPr>
-              <a:spcBef>
-                <a:spcPts val="400"/>
-              </a:spcBef>
-            </a:pPr>
-            <a:r>
-              <a:rPr sz="1600">
-                <a:solidFill>
-                  <a:srgbClr val="4A9BBF"/>
-                </a:solidFill>
-              </a:rPr>
-              <a:t>• Elecciones municipales y regionales (oct 2024)</a:t>
-            </a:r>
-          </a:p>
-          <a:p>
-            <a:pPr>
-              <a:spcBef>
-                <a:spcPts val="400"/>
-              </a:spcBef>
-            </a:pPr>
-            <a:r>
-              <a:rPr sz="1600">
-                <a:solidFill>
-                  <a:srgbClr val="4A9BBF"/>
-                </a:solidFill>
-              </a:rPr>
-              <a:t>• Segundas vueltas municipales (nov 2024)</a:t>
+              <a:t>Municipales</a:t>
+            </a:r>
+            <a:br/>
+            <a:r>
+              <a:t>y Regionales</a:t>
             </a:r>
           </a:p>
         </p:txBody>
@@ -7181,14 +8457,57 @@
       <p:grpSpPr/>
       <p:sp>
         <p:nvSpPr>
-          <p:cNvPr id="2" name="TextBox 1"/>
+          <p:cNvPr id="2" name="Rectangle 1"/>
+          <p:cNvSpPr/>
+          <p:nvPr/>
+        </p:nvSpPr>
+        <p:spPr>
+          <a:xfrm>
+            <a:off x="0" y="0"/>
+            <a:ext cx="12191695" cy="45720"/>
+          </a:xfrm>
+          <a:prstGeom prst="rect">
+            <a:avLst/>
+          </a:prstGeom>
+          <a:solidFill>
+            <a:srgbClr val="3A9E7A"/>
+          </a:solidFill>
+          <a:ln>
+            <a:noFill/>
+          </a:ln>
+        </p:spPr>
+        <p:style>
+          <a:lnRef idx="1">
+            <a:schemeClr val="accent1"/>
+          </a:lnRef>
+          <a:fillRef idx="3">
+            <a:schemeClr val="accent1"/>
+          </a:fillRef>
+          <a:effectRef idx="2">
+            <a:schemeClr val="accent1"/>
+          </a:effectRef>
+          <a:fontRef idx="minor">
+            <a:schemeClr val="lt1"/>
+          </a:fontRef>
+        </p:style>
+        <p:txBody>
+          <a:bodyPr rtlCol="0" anchor="ctr"/>
+          <a:lstStyle/>
+          <a:p>
+            <a:pPr algn="ctr"/>
+          </a:p>
+        </p:txBody>
+      </p:sp>
+      <p:sp>
+        <p:nvSpPr>
+          <p:cNvPr id="3" name="TextBox 2"/>
           <p:cNvSpPr txBox="1"/>
           <p:nvPr/>
         </p:nvSpPr>
         <p:spPr>
           <a:xfrm>
-            <a:off x="640080" y="457200"/>
-            <a:ext cx="1371600" cy="1371600"/>
+            <a:off x="640080" y="274320"/>
+            <a:ext cx="1097280" cy="1097280"/>
           </a:xfrm>
           <a:prstGeom prst="rect">
             <a:avLst/>
@@ -7202,7 +8521,7 @@
           <a:lstStyle/>
           <a:p>
             <a:r>
-              <a:rPr sz="9600" b="1">
+              <a:rPr sz="8000" b="1">
                 <a:solidFill>
                   <a:srgbClr val="3A9E7A"/>
                 </a:solidFill>
@@ -7214,14 +8533,14 @@
       </p:sp>
       <p:sp>
         <p:nvSpPr>
-          <p:cNvPr id="3" name="TextBox 2"/>
+          <p:cNvPr id="4" name="TextBox 3"/>
           <p:cNvSpPr txBox="1"/>
           <p:nvPr/>
         </p:nvSpPr>
         <p:spPr>
           <a:xfrm>
-            <a:off x="640080" y="1371600"/>
-            <a:ext cx="10911535" cy="3657600"/>
+            <a:off x="640080" y="1234440"/>
+            <a:ext cx="10911535" cy="3840480"/>
           </a:xfrm>
           <a:prstGeom prst="rect">
             <a:avLst/>
@@ -7236,26 +8555,69 @@
           <a:p>
             <a:pPr algn="l"/>
             <a:r>
-              <a:rPr sz="2200" b="0" i="1">
+              <a:rPr sz="2200" i="1">
                 <a:solidFill>
                   <a:srgbClr val="FFFFFF"/>
                 </a:solidFill>
               </a:rPr>
-              <a:t>Es cierto que se observa una fatiga electoral. Ello tiene como correlato que la gente evita informarse e invertir mucho tiempo en estar expuesto a material de campaña.</a:t>
-            </a:r>
-          </a:p>
-        </p:txBody>
-      </p:sp>
-      <p:sp>
-        <p:nvSpPr>
-          <p:cNvPr id="4" name="TextBox 3"/>
+              <a:t>Es cierto que se observa una fatiga electoral. Ello tiene como correlato que la gente evita informarse e invertir mucho tiempo en estar expuesto a material de campana.</a:t>
+            </a:r>
+          </a:p>
+        </p:txBody>
+      </p:sp>
+      <p:sp>
+        <p:nvSpPr>
+          <p:cNvPr id="5" name="Rectangle 4"/>
+          <p:cNvSpPr/>
+          <p:nvPr/>
+        </p:nvSpPr>
+        <p:spPr>
+          <a:xfrm>
+            <a:off x="640080" y="5257800"/>
+            <a:ext cx="1828800" cy="36576"/>
+          </a:xfrm>
+          <a:prstGeom prst="rect">
+            <a:avLst/>
+          </a:prstGeom>
+          <a:solidFill>
+            <a:srgbClr val="3A9E7A"/>
+          </a:solidFill>
+          <a:ln>
+            <a:noFill/>
+          </a:ln>
+        </p:spPr>
+        <p:style>
+          <a:lnRef idx="1">
+            <a:schemeClr val="accent1"/>
+          </a:lnRef>
+          <a:fillRef idx="3">
+            <a:schemeClr val="accent1"/>
+          </a:fillRef>
+          <a:effectRef idx="2">
+            <a:schemeClr val="accent1"/>
+          </a:effectRef>
+          <a:fontRef idx="minor">
+            <a:schemeClr val="lt1"/>
+          </a:fontRef>
+        </p:style>
+        <p:txBody>
+          <a:bodyPr rtlCol="0" anchor="ctr"/>
+          <a:lstStyle/>
+          <a:p>
+            <a:pPr algn="ctr"/>
+          </a:p>
+        </p:txBody>
+      </p:sp>
+      <p:sp>
+        <p:nvSpPr>
+          <p:cNvPr id="6" name="TextBox 5"/>
           <p:cNvSpPr txBox="1"/>
           <p:nvPr/>
         </p:nvSpPr>
         <p:spPr>
           <a:xfrm>
-            <a:off x="640080" y="5120640"/>
-            <a:ext cx="10911535" cy="548640"/>
+            <a:off x="640080" y="5394960"/>
+            <a:ext cx="10911535" cy="502920"/>
           </a:xfrm>
           <a:prstGeom prst="rect">
             <a:avLst/>
@@ -7268,14 +8630,14 @@
           </a:bodyPr>
           <a:lstStyle/>
           <a:p>
-            <a:pPr algn="r"/>
-            <a:r>
-              <a:rPr sz="1300" b="1">
+            <a:pPr algn="l"/>
+            <a:r>
+              <a:rPr sz="1200" b="1">
                 <a:solidFill>
                   <a:srgbClr val="7BA098"/>
                 </a:solidFill>
               </a:rPr>
-              <a:t>— Prof. René Jara, Universidad de Santiago de Chile</a:t>
+              <a:t>-- Prof. Rene Jara, Universidad de Santiago de Chile</a:t>
             </a:r>
           </a:p>
         </p:txBody>
@@ -7358,7 +8720,7 @@
         <p:spPr>
           <a:xfrm>
             <a:off x="640080" y="228600"/>
-            <a:ext cx="10911535" cy="685800"/>
+            <a:ext cx="10911535" cy="640080"/>
           </a:xfrm>
           <a:prstGeom prst="rect">
             <a:avLst/>
@@ -7366,32 +8728,75 @@
           <a:noFill/>
         </p:spPr>
         <p:txBody>
-          <a:bodyPr wrap="square">
+          <a:bodyPr wrap="none">
             <a:spAutoFit/>
           </a:bodyPr>
           <a:lstStyle/>
           <a:p>
             <a:r>
-              <a:rPr sz="2400" b="1">
+              <a:rPr sz="2000" b="1">
                 <a:solidFill>
-                  <a:srgbClr val="FFFFFF"/>
+                  <a:srgbClr val="4A9BBF"/>
                 </a:solidFill>
               </a:rPr>
-              <a:t>Nivel real de información del electorado — Municipales 2024 (Ipsos)</a:t>
-            </a:r>
-          </a:p>
-        </p:txBody>
-      </p:sp>
-      <p:sp>
-        <p:nvSpPr>
-          <p:cNvPr id="4" name="TextBox 3"/>
+              <a:t>?Que tan informado esta el electorado chileno?  (Ipsos, Municipales 2024)</a:t>
+            </a:r>
+          </a:p>
+        </p:txBody>
+      </p:sp>
+      <p:sp>
+        <p:nvSpPr>
+          <p:cNvPr id="4" name="Rectangle 3"/>
+          <p:cNvSpPr/>
+          <p:nvPr/>
+        </p:nvSpPr>
+        <p:spPr>
+          <a:xfrm>
+            <a:off x="731520" y="1051560"/>
+            <a:ext cx="2545003" cy="5303520"/>
+          </a:xfrm>
+          <a:prstGeom prst="rect">
+            <a:avLst/>
+          </a:prstGeom>
+          <a:solidFill>
+            <a:srgbClr val="244A63"/>
+          </a:solidFill>
+          <a:ln>
+            <a:noFill/>
+          </a:ln>
+        </p:spPr>
+        <p:style>
+          <a:lnRef idx="1">
+            <a:schemeClr val="accent1"/>
+          </a:lnRef>
+          <a:fillRef idx="3">
+            <a:schemeClr val="accent1"/>
+          </a:fillRef>
+          <a:effectRef idx="2">
+            <a:schemeClr val="accent1"/>
+          </a:effectRef>
+          <a:fontRef idx="minor">
+            <a:schemeClr val="lt1"/>
+          </a:fontRef>
+        </p:style>
+        <p:txBody>
+          <a:bodyPr rtlCol="0" anchor="ctr"/>
+          <a:lstStyle/>
+          <a:p>
+            <a:pPr algn="ctr"/>
+          </a:p>
+        </p:txBody>
+      </p:sp>
+      <p:sp>
+        <p:nvSpPr>
+          <p:cNvPr id="5" name="TextBox 4"/>
           <p:cNvSpPr txBox="1"/>
           <p:nvPr/>
         </p:nvSpPr>
         <p:spPr>
           <a:xfrm>
-            <a:off x="640080" y="1280160"/>
-            <a:ext cx="2727883" cy="2286000"/>
+            <a:off x="731520" y="1371600"/>
+            <a:ext cx="2545003" cy="2560320"/>
           </a:xfrm>
           <a:prstGeom prst="rect">
             <a:avLst/>
@@ -7399,14 +8804,14 @@
           <a:noFill/>
         </p:spPr>
         <p:txBody>
-          <a:bodyPr wrap="square">
+          <a:bodyPr wrap="none">
             <a:spAutoFit/>
           </a:bodyPr>
           <a:lstStyle/>
           <a:p>
             <a:pPr algn="ctr"/>
             <a:r>
-              <a:rPr sz="6000" b="1">
+              <a:rPr sz="6400" b="1">
                 <a:solidFill>
                   <a:srgbClr val="DC2626"/>
                 </a:solidFill>
@@ -7418,14 +8823,14 @@
       </p:sp>
       <p:sp>
         <p:nvSpPr>
-          <p:cNvPr id="5" name="TextBox 4"/>
+          <p:cNvPr id="6" name="TextBox 5"/>
           <p:cNvSpPr txBox="1"/>
           <p:nvPr/>
         </p:nvSpPr>
         <p:spPr>
           <a:xfrm>
-            <a:off x="640080" y="3566160"/>
-            <a:ext cx="2727883" cy="1645920"/>
+            <a:off x="777240" y="3931920"/>
+            <a:ext cx="2453563" cy="2011680"/>
           </a:xfrm>
           <a:prstGeom prst="rect">
             <a:avLst/>
@@ -7440,12 +8845,12 @@
           <a:p>
             <a:pPr algn="ctr"/>
             <a:r>
-              <a:rPr sz="1400" b="0">
+              <a:rPr sz="1300" b="0">
                 <a:solidFill>
                   <a:srgbClr val="4A9BBF"/>
                 </a:solidFill>
               </a:rPr>
-              <a:t>se reconocía como</a:t>
+              <a:t>se sentia</a:t>
             </a:r>
             <a:br/>
             <a:r>
@@ -7456,14 +8861,57 @@
       </p:sp>
       <p:sp>
         <p:nvSpPr>
-          <p:cNvPr id="6" name="TextBox 5"/>
+          <p:cNvPr id="7" name="Rectangle 6"/>
+          <p:cNvSpPr/>
+          <p:nvPr/>
+        </p:nvSpPr>
+        <p:spPr>
+          <a:xfrm>
+            <a:off x="3459403" y="1051560"/>
+            <a:ext cx="2545003" cy="5303520"/>
+          </a:xfrm>
+          <a:prstGeom prst="rect">
+            <a:avLst/>
+          </a:prstGeom>
+          <a:solidFill>
+            <a:srgbClr val="244A63"/>
+          </a:solidFill>
+          <a:ln>
+            <a:noFill/>
+          </a:ln>
+        </p:spPr>
+        <p:style>
+          <a:lnRef idx="1">
+            <a:schemeClr val="accent1"/>
+          </a:lnRef>
+          <a:fillRef idx="3">
+            <a:schemeClr val="accent1"/>
+          </a:fillRef>
+          <a:effectRef idx="2">
+            <a:schemeClr val="accent1"/>
+          </a:effectRef>
+          <a:fontRef idx="minor">
+            <a:schemeClr val="lt1"/>
+          </a:fontRef>
+        </p:style>
+        <p:txBody>
+          <a:bodyPr rtlCol="0" anchor="ctr"/>
+          <a:lstStyle/>
+          <a:p>
+            <a:pPr algn="ctr"/>
+          </a:p>
+        </p:txBody>
+      </p:sp>
+      <p:sp>
+        <p:nvSpPr>
+          <p:cNvPr id="8" name="TextBox 7"/>
           <p:cNvSpPr txBox="1"/>
           <p:nvPr/>
         </p:nvSpPr>
         <p:spPr>
           <a:xfrm>
-            <a:off x="3367963" y="1280160"/>
-            <a:ext cx="2727883" cy="2286000"/>
+            <a:off x="3459403" y="1371600"/>
+            <a:ext cx="2545003" cy="2560320"/>
           </a:xfrm>
           <a:prstGeom prst="rect">
             <a:avLst/>
@@ -7471,14 +8919,14 @@
           <a:noFill/>
         </p:spPr>
         <p:txBody>
-          <a:bodyPr wrap="square">
+          <a:bodyPr wrap="none">
             <a:spAutoFit/>
           </a:bodyPr>
           <a:lstStyle/>
           <a:p>
             <a:pPr algn="ctr"/>
             <a:r>
-              <a:rPr sz="6000" b="1">
+              <a:rPr sz="6400" b="1">
                 <a:solidFill>
                   <a:srgbClr val="D97706"/>
                 </a:solidFill>
@@ -7490,14 +8938,14 @@
       </p:sp>
       <p:sp>
         <p:nvSpPr>
-          <p:cNvPr id="7" name="TextBox 6"/>
+          <p:cNvPr id="9" name="TextBox 8"/>
           <p:cNvSpPr txBox="1"/>
           <p:nvPr/>
         </p:nvSpPr>
         <p:spPr>
           <a:xfrm>
-            <a:off x="3367963" y="3566160"/>
-            <a:ext cx="2727883" cy="1645920"/>
+            <a:off x="3505123" y="3931920"/>
+            <a:ext cx="2453563" cy="2011680"/>
           </a:xfrm>
           <a:prstGeom prst="rect">
             <a:avLst/>
@@ -7512,12 +8960,12 @@
           <a:p>
             <a:pPr algn="ctr"/>
             <a:r>
-              <a:rPr sz="1400" b="0">
+              <a:rPr sz="1300" b="0">
                 <a:solidFill>
                   <a:srgbClr val="4A9BBF"/>
                 </a:solidFill>
               </a:rPr>
-              <a:t>aún no había decidido</a:t>
+              <a:t>no habia decidido</a:t>
             </a:r>
             <a:br/>
             <a:r>
@@ -7528,14 +8976,57 @@
       </p:sp>
       <p:sp>
         <p:nvSpPr>
-          <p:cNvPr id="8" name="TextBox 7"/>
+          <p:cNvPr id="10" name="Rectangle 9"/>
+          <p:cNvSpPr/>
+          <p:nvPr/>
+        </p:nvSpPr>
+        <p:spPr>
+          <a:xfrm>
+            <a:off x="6187287" y="1051560"/>
+            <a:ext cx="2545003" cy="5303520"/>
+          </a:xfrm>
+          <a:prstGeom prst="rect">
+            <a:avLst/>
+          </a:prstGeom>
+          <a:solidFill>
+            <a:srgbClr val="244A63"/>
+          </a:solidFill>
+          <a:ln>
+            <a:noFill/>
+          </a:ln>
+        </p:spPr>
+        <p:style>
+          <a:lnRef idx="1">
+            <a:schemeClr val="accent1"/>
+          </a:lnRef>
+          <a:fillRef idx="3">
+            <a:schemeClr val="accent1"/>
+          </a:fillRef>
+          <a:effectRef idx="2">
+            <a:schemeClr val="accent1"/>
+          </a:effectRef>
+          <a:fontRef idx="minor">
+            <a:schemeClr val="lt1"/>
+          </a:fontRef>
+        </p:style>
+        <p:txBody>
+          <a:bodyPr rtlCol="0" anchor="ctr"/>
+          <a:lstStyle/>
+          <a:p>
+            <a:pPr algn="ctr"/>
+          </a:p>
+        </p:txBody>
+      </p:sp>
+      <p:sp>
+        <p:nvSpPr>
+          <p:cNvPr id="11" name="TextBox 10"/>
           <p:cNvSpPr txBox="1"/>
           <p:nvPr/>
         </p:nvSpPr>
         <p:spPr>
           <a:xfrm>
-            <a:off x="6095847" y="1280160"/>
-            <a:ext cx="2727883" cy="2286000"/>
+            <a:off x="6187287" y="1371600"/>
+            <a:ext cx="2545003" cy="2560320"/>
           </a:xfrm>
           <a:prstGeom prst="rect">
             <a:avLst/>
@@ -7543,33 +9034,33 @@
           <a:noFill/>
         </p:spPr>
         <p:txBody>
-          <a:bodyPr wrap="square">
+          <a:bodyPr wrap="none">
             <a:spAutoFit/>
           </a:bodyPr>
           <a:lstStyle/>
           <a:p>
             <a:pPr algn="ctr"/>
             <a:r>
-              <a:rPr sz="6000" b="1">
+              <a:rPr sz="6400" b="1">
                 <a:solidFill>
                   <a:srgbClr val="4A9BBF"/>
                 </a:solidFill>
               </a:rPr>
-              <a:t>55%</a:t>
-            </a:r>
-          </a:p>
-        </p:txBody>
-      </p:sp>
-      <p:sp>
-        <p:nvSpPr>
-          <p:cNvPr id="9" name="TextBox 8"/>
+              <a:t>45%</a:t>
+            </a:r>
+          </a:p>
+        </p:txBody>
+      </p:sp>
+      <p:sp>
+        <p:nvSpPr>
+          <p:cNvPr id="12" name="TextBox 11"/>
           <p:cNvSpPr txBox="1"/>
           <p:nvPr/>
         </p:nvSpPr>
         <p:spPr>
           <a:xfrm>
-            <a:off x="6095847" y="3566160"/>
-            <a:ext cx="2727883" cy="1645920"/>
+            <a:off x="6233007" y="3931920"/>
+            <a:ext cx="2453563" cy="2011680"/>
           </a:xfrm>
           <a:prstGeom prst="rect">
             <a:avLst/>
@@ -7584,30 +9075,77 @@
           <a:p>
             <a:pPr algn="ctr"/>
             <a:r>
-              <a:rPr sz="1400" b="0">
+              <a:rPr sz="1300" b="0">
                 <a:solidFill>
                   <a:srgbClr val="4A9BBF"/>
                 </a:solidFill>
               </a:rPr>
-              <a:t>sabía que se</a:t>
+              <a:t>sabia que se</a:t>
             </a:r>
             <a:br/>
             <a:r>
-              <a:t>elegían concejales</a:t>
-            </a:r>
-          </a:p>
-        </p:txBody>
-      </p:sp>
-      <p:sp>
-        <p:nvSpPr>
-          <p:cNvPr id="10" name="TextBox 9"/>
+              <a:t>elegian consejeros</a:t>
+            </a:r>
+            <a:br/>
+            <a:r>
+              <a:t>regionales</a:t>
+            </a:r>
+          </a:p>
+        </p:txBody>
+      </p:sp>
+      <p:sp>
+        <p:nvSpPr>
+          <p:cNvPr id="13" name="Rectangle 12"/>
+          <p:cNvSpPr/>
+          <p:nvPr/>
+        </p:nvSpPr>
+        <p:spPr>
+          <a:xfrm>
+            <a:off x="8915171" y="1051560"/>
+            <a:ext cx="2545003" cy="5303520"/>
+          </a:xfrm>
+          <a:prstGeom prst="rect">
+            <a:avLst/>
+          </a:prstGeom>
+          <a:solidFill>
+            <a:srgbClr val="244A63"/>
+          </a:solidFill>
+          <a:ln>
+            <a:noFill/>
+          </a:ln>
+        </p:spPr>
+        <p:style>
+          <a:lnRef idx="1">
+            <a:schemeClr val="accent1"/>
+          </a:lnRef>
+          <a:fillRef idx="3">
+            <a:schemeClr val="accent1"/>
+          </a:fillRef>
+          <a:effectRef idx="2">
+            <a:schemeClr val="accent1"/>
+          </a:effectRef>
+          <a:fontRef idx="minor">
+            <a:schemeClr val="lt1"/>
+          </a:fontRef>
+        </p:style>
+        <p:txBody>
+          <a:bodyPr rtlCol="0" anchor="ctr"/>
+          <a:lstStyle/>
+          <a:p>
+            <a:pPr algn="ctr"/>
+          </a:p>
+        </p:txBody>
+      </p:sp>
+      <p:sp>
+        <p:nvSpPr>
+          <p:cNvPr id="14" name="TextBox 13"/>
           <p:cNvSpPr txBox="1"/>
           <p:nvPr/>
         </p:nvSpPr>
         <p:spPr>
           <a:xfrm>
-            <a:off x="8823731" y="1280160"/>
-            <a:ext cx="2727883" cy="2286000"/>
+            <a:off x="8915171" y="1371600"/>
+            <a:ext cx="2545003" cy="2560320"/>
           </a:xfrm>
           <a:prstGeom prst="rect">
             <a:avLst/>
@@ -7615,33 +9153,33 @@
           <a:noFill/>
         </p:spPr>
         <p:txBody>
-          <a:bodyPr wrap="square">
+          <a:bodyPr wrap="none">
             <a:spAutoFit/>
           </a:bodyPr>
           <a:lstStyle/>
           <a:p>
             <a:pPr algn="ctr"/>
             <a:r>
-              <a:rPr sz="6000" b="1">
+              <a:rPr sz="6400" b="1">
                 <a:solidFill>
                   <a:srgbClr val="7BA098"/>
                 </a:solidFill>
               </a:rPr>
-              <a:t>45%</a:t>
-            </a:r>
-          </a:p>
-        </p:txBody>
-      </p:sp>
-      <p:sp>
-        <p:nvSpPr>
-          <p:cNvPr id="11" name="TextBox 10"/>
+              <a:t>16%</a:t>
+            </a:r>
+          </a:p>
+        </p:txBody>
+      </p:sp>
+      <p:sp>
+        <p:nvSpPr>
+          <p:cNvPr id="15" name="TextBox 14"/>
           <p:cNvSpPr txBox="1"/>
           <p:nvPr/>
         </p:nvSpPr>
         <p:spPr>
           <a:xfrm>
-            <a:off x="8823731" y="3566160"/>
-            <a:ext cx="2727883" cy="1645920"/>
+            <a:off x="8960891" y="3931920"/>
+            <a:ext cx="2453563" cy="2011680"/>
           </a:xfrm>
           <a:prstGeom prst="rect">
             <a:avLst/>
@@ -7656,16 +9194,16 @@
           <a:p>
             <a:pPr algn="ctr"/>
             <a:r>
-              <a:rPr sz="1400" b="0">
+              <a:rPr sz="1300" b="0">
                 <a:solidFill>
                   <a:srgbClr val="4A9BBF"/>
                 </a:solidFill>
               </a:rPr>
-              <a:t>sabía de la elección</a:t>
+              <a:t>se declaraba</a:t>
             </a:r>
             <a:br/>
             <a:r>
-              <a:t>de consejeros regionales</a:t>
+              <a:t>'nada informado'</a:t>
             </a:r>
           </a:p>
         </p:txBody>
@@ -7748,7 +9286,7 @@
         <p:spPr>
           <a:xfrm>
             <a:off x="640080" y="228600"/>
-            <a:ext cx="10911535" cy="685800"/>
+            <a:ext cx="10911535" cy="640080"/>
           </a:xfrm>
           <a:prstGeom prst="rect">
             <a:avLst/>
@@ -7756,32 +9294,75 @@
           <a:noFill/>
         </p:spPr>
         <p:txBody>
-          <a:bodyPr wrap="square">
+          <a:bodyPr wrap="none">
             <a:spAutoFit/>
           </a:bodyPr>
           <a:lstStyle/>
           <a:p>
             <a:r>
-              <a:rPr sz="2400" b="1">
+              <a:rPr sz="2000" b="1">
                 <a:solidFill>
-                  <a:srgbClr val="FFFFFF"/>
+                  <a:srgbClr val="4A9BBF"/>
                 </a:solidFill>
               </a:rPr>
-              <a:t>La desinformación como factor agravante — Activa Knowledge for Action</a:t>
-            </a:r>
-          </a:p>
-        </p:txBody>
-      </p:sp>
-      <p:sp>
-        <p:nvSpPr>
-          <p:cNvPr id="4" name="TextBox 3"/>
+              <a:t>La desinformacion como amplificador del deficit</a:t>
+            </a:r>
+          </a:p>
+        </p:txBody>
+      </p:sp>
+      <p:sp>
+        <p:nvSpPr>
+          <p:cNvPr id="4" name="Rectangle 3"/>
+          <p:cNvSpPr/>
+          <p:nvPr/>
+        </p:nvSpPr>
+        <p:spPr>
+          <a:xfrm>
+            <a:off x="731520" y="1051560"/>
+            <a:ext cx="2545003" cy="5303520"/>
+          </a:xfrm>
+          <a:prstGeom prst="rect">
+            <a:avLst/>
+          </a:prstGeom>
+          <a:solidFill>
+            <a:srgbClr val="244A63"/>
+          </a:solidFill>
+          <a:ln>
+            <a:noFill/>
+          </a:ln>
+        </p:spPr>
+        <p:style>
+          <a:lnRef idx="1">
+            <a:schemeClr val="accent1"/>
+          </a:lnRef>
+          <a:fillRef idx="3">
+            <a:schemeClr val="accent1"/>
+          </a:fillRef>
+          <a:effectRef idx="2">
+            <a:schemeClr val="accent1"/>
+          </a:effectRef>
+          <a:fontRef idx="minor">
+            <a:schemeClr val="lt1"/>
+          </a:fontRef>
+        </p:style>
+        <p:txBody>
+          <a:bodyPr rtlCol="0" anchor="ctr"/>
+          <a:lstStyle/>
+          <a:p>
+            <a:pPr algn="ctr"/>
+          </a:p>
+        </p:txBody>
+      </p:sp>
+      <p:sp>
+        <p:nvSpPr>
+          <p:cNvPr id="5" name="TextBox 4"/>
           <p:cNvSpPr txBox="1"/>
           <p:nvPr/>
         </p:nvSpPr>
         <p:spPr>
           <a:xfrm>
-            <a:off x="640080" y="1280160"/>
-            <a:ext cx="2727883" cy="2286000"/>
+            <a:off x="731520" y="1371600"/>
+            <a:ext cx="2545003" cy="2560320"/>
           </a:xfrm>
           <a:prstGeom prst="rect">
             <a:avLst/>
@@ -7789,14 +9370,14 @@
           <a:noFill/>
         </p:spPr>
         <p:txBody>
-          <a:bodyPr wrap="square">
+          <a:bodyPr wrap="none">
             <a:spAutoFit/>
           </a:bodyPr>
           <a:lstStyle/>
           <a:p>
             <a:pPr algn="ctr"/>
             <a:r>
-              <a:rPr sz="6000" b="1">
+              <a:rPr sz="6400" b="1">
                 <a:solidFill>
                   <a:srgbClr val="DC2626"/>
                 </a:solidFill>
@@ -7808,14 +9389,14 @@
       </p:sp>
       <p:sp>
         <p:nvSpPr>
-          <p:cNvPr id="5" name="TextBox 4"/>
+          <p:cNvPr id="6" name="TextBox 5"/>
           <p:cNvSpPr txBox="1"/>
           <p:nvPr/>
         </p:nvSpPr>
         <p:spPr>
           <a:xfrm>
-            <a:off x="640080" y="3566160"/>
-            <a:ext cx="2727883" cy="1645920"/>
+            <a:off x="777240" y="3931920"/>
+            <a:ext cx="2453563" cy="2011680"/>
           </a:xfrm>
           <a:prstGeom prst="rect">
             <a:avLst/>
@@ -7830,30 +9411,77 @@
           <a:p>
             <a:pPr algn="ctr"/>
             <a:r>
-              <a:rPr sz="1400" b="0">
+              <a:rPr sz="1300" b="0">
                 <a:solidFill>
                   <a:srgbClr val="4A9BBF"/>
                 </a:solidFill>
               </a:rPr>
-              <a:t>del electorado expuesto</a:t>
+              <a:t>expuesto a desinformacion</a:t>
             </a:r>
             <a:br/>
             <a:r>
-              <a:t>a desinformación semanal</a:t>
-            </a:r>
-          </a:p>
-        </p:txBody>
-      </p:sp>
-      <p:sp>
-        <p:nvSpPr>
-          <p:cNvPr id="6" name="TextBox 5"/>
+              <a:t>con frecuencia semanal</a:t>
+            </a:r>
+            <a:br/>
+            <a:r>
+              <a:t>o mayor</a:t>
+            </a:r>
+          </a:p>
+        </p:txBody>
+      </p:sp>
+      <p:sp>
+        <p:nvSpPr>
+          <p:cNvPr id="7" name="Rectangle 6"/>
+          <p:cNvSpPr/>
+          <p:nvPr/>
+        </p:nvSpPr>
+        <p:spPr>
+          <a:xfrm>
+            <a:off x="3459403" y="1051560"/>
+            <a:ext cx="2545003" cy="5303520"/>
+          </a:xfrm>
+          <a:prstGeom prst="rect">
+            <a:avLst/>
+          </a:prstGeom>
+          <a:solidFill>
+            <a:srgbClr val="244A63"/>
+          </a:solidFill>
+          <a:ln>
+            <a:noFill/>
+          </a:ln>
+        </p:spPr>
+        <p:style>
+          <a:lnRef idx="1">
+            <a:schemeClr val="accent1"/>
+          </a:lnRef>
+          <a:fillRef idx="3">
+            <a:schemeClr val="accent1"/>
+          </a:fillRef>
+          <a:effectRef idx="2">
+            <a:schemeClr val="accent1"/>
+          </a:effectRef>
+          <a:fontRef idx="minor">
+            <a:schemeClr val="lt1"/>
+          </a:fontRef>
+        </p:style>
+        <p:txBody>
+          <a:bodyPr rtlCol="0" anchor="ctr"/>
+          <a:lstStyle/>
+          <a:p>
+            <a:pPr algn="ctr"/>
+          </a:p>
+        </p:txBody>
+      </p:sp>
+      <p:sp>
+        <p:nvSpPr>
+          <p:cNvPr id="8" name="TextBox 7"/>
           <p:cNvSpPr txBox="1"/>
           <p:nvPr/>
         </p:nvSpPr>
         <p:spPr>
           <a:xfrm>
-            <a:off x="3367963" y="1280160"/>
-            <a:ext cx="2727883" cy="2286000"/>
+            <a:off x="3459403" y="1371600"/>
+            <a:ext cx="2545003" cy="2560320"/>
           </a:xfrm>
           <a:prstGeom prst="rect">
             <a:avLst/>
@@ -7861,14 +9489,14 @@
           <a:noFill/>
         </p:spPr>
         <p:txBody>
-          <a:bodyPr wrap="square">
+          <a:bodyPr wrap="none">
             <a:spAutoFit/>
           </a:bodyPr>
           <a:lstStyle/>
           <a:p>
             <a:pPr algn="ctr"/>
             <a:r>
-              <a:rPr sz="6000" b="1">
+              <a:rPr sz="6400" b="1">
                 <a:solidFill>
                   <a:srgbClr val="D97706"/>
                 </a:solidFill>
@@ -7880,14 +9508,14 @@
       </p:sp>
       <p:sp>
         <p:nvSpPr>
-          <p:cNvPr id="7" name="TextBox 6"/>
+          <p:cNvPr id="9" name="TextBox 8"/>
           <p:cNvSpPr txBox="1"/>
           <p:nvPr/>
         </p:nvSpPr>
         <p:spPr>
           <a:xfrm>
-            <a:off x="3367963" y="3566160"/>
-            <a:ext cx="2727883" cy="1645920"/>
+            <a:off x="3505123" y="3931920"/>
+            <a:ext cx="2453563" cy="2011680"/>
           </a:xfrm>
           <a:prstGeom prst="rect">
             <a:avLst/>
@@ -7902,30 +9530,77 @@
           <a:p>
             <a:pPr algn="ctr"/>
             <a:r>
-              <a:rPr sz="1400" b="0">
+              <a:rPr sz="1300" b="0">
                 <a:solidFill>
                   <a:srgbClr val="4A9BBF"/>
                 </a:solidFill>
               </a:rPr>
-              <a:t>cree que la desinformación</a:t>
+              <a:t>cree que la</a:t>
             </a:r>
             <a:br/>
             <a:r>
-              <a:t>amena la democracia</a:t>
-            </a:r>
-          </a:p>
-        </p:txBody>
-      </p:sp>
-      <p:sp>
-        <p:nvSpPr>
-          <p:cNvPr id="8" name="TextBox 7"/>
+              <a:t>desinformacion amenaza</a:t>
+            </a:r>
+            <a:br/>
+            <a:r>
+              <a:t>la democracia</a:t>
+            </a:r>
+          </a:p>
+        </p:txBody>
+      </p:sp>
+      <p:sp>
+        <p:nvSpPr>
+          <p:cNvPr id="10" name="Rectangle 9"/>
+          <p:cNvSpPr/>
+          <p:nvPr/>
+        </p:nvSpPr>
+        <p:spPr>
+          <a:xfrm>
+            <a:off x="6187287" y="1051560"/>
+            <a:ext cx="2545003" cy="5303520"/>
+          </a:xfrm>
+          <a:prstGeom prst="rect">
+            <a:avLst/>
+          </a:prstGeom>
+          <a:solidFill>
+            <a:srgbClr val="244A63"/>
+          </a:solidFill>
+          <a:ln>
+            <a:noFill/>
+          </a:ln>
+        </p:spPr>
+        <p:style>
+          <a:lnRef idx="1">
+            <a:schemeClr val="accent1"/>
+          </a:lnRef>
+          <a:fillRef idx="3">
+            <a:schemeClr val="accent1"/>
+          </a:fillRef>
+          <a:effectRef idx="2">
+            <a:schemeClr val="accent1"/>
+          </a:effectRef>
+          <a:fontRef idx="minor">
+            <a:schemeClr val="lt1"/>
+          </a:fontRef>
+        </p:style>
+        <p:txBody>
+          <a:bodyPr rtlCol="0" anchor="ctr"/>
+          <a:lstStyle/>
+          <a:p>
+            <a:pPr algn="ctr"/>
+          </a:p>
+        </p:txBody>
+      </p:sp>
+      <p:sp>
+        <p:nvSpPr>
+          <p:cNvPr id="11" name="TextBox 10"/>
           <p:cNvSpPr txBox="1"/>
           <p:nvPr/>
         </p:nvSpPr>
         <p:spPr>
           <a:xfrm>
-            <a:off x="6095847" y="1280160"/>
-            <a:ext cx="2727883" cy="2286000"/>
+            <a:off x="6187287" y="1371600"/>
+            <a:ext cx="2545003" cy="2560320"/>
           </a:xfrm>
           <a:prstGeom prst="rect">
             <a:avLst/>
@@ -7933,33 +9608,33 @@
           <a:noFill/>
         </p:spPr>
         <p:txBody>
-          <a:bodyPr wrap="square">
+          <a:bodyPr wrap="none">
             <a:spAutoFit/>
           </a:bodyPr>
           <a:lstStyle/>
           <a:p>
             <a:pPr algn="ctr"/>
             <a:r>
-              <a:rPr sz="6000" b="1">
+              <a:rPr sz="6400" b="1">
                 <a:solidFill>
                   <a:srgbClr val="4A9BBF"/>
                 </a:solidFill>
               </a:rPr>
-              <a:t>68%</a:t>
-            </a:r>
-          </a:p>
-        </p:txBody>
-      </p:sp>
-      <p:sp>
-        <p:nvSpPr>
-          <p:cNvPr id="9" name="TextBox 8"/>
+              <a:t>79%</a:t>
+            </a:r>
+          </a:p>
+        </p:txBody>
+      </p:sp>
+      <p:sp>
+        <p:nvSpPr>
+          <p:cNvPr id="12" name="TextBox 11"/>
           <p:cNvSpPr txBox="1"/>
           <p:nvPr/>
         </p:nvSpPr>
         <p:spPr>
           <a:xfrm>
-            <a:off x="6095847" y="3566160"/>
-            <a:ext cx="2727883" cy="1645920"/>
+            <a:off x="6233007" y="3931920"/>
+            <a:ext cx="2453563" cy="2011680"/>
           </a:xfrm>
           <a:prstGeom prst="rect">
             <a:avLst/>
@@ -7974,30 +9649,111 @@
           <a:p>
             <a:pPr algn="ctr"/>
             <a:r>
-              <a:rPr sz="1400" b="0">
+              <a:rPr sz="1300" b="0">
                 <a:solidFill>
                   <a:srgbClr val="4A9BBF"/>
                 </a:solidFill>
               </a:rPr>
-              <a:t>dice que debilita</a:t>
+              <a:t>no confia en</a:t>
             </a:r>
             <a:br/>
             <a:r>
-              <a:t>el proceso electoral</a:t>
-            </a:r>
-          </a:p>
-        </p:txBody>
-      </p:sp>
-      <p:sp>
-        <p:nvSpPr>
-          <p:cNvPr id="10" name="TextBox 9"/>
+              <a:t>los politicos como</a:t>
+            </a:r>
+            <a:br/>
+            <a:r>
+              <a:t>fuente de informacion</a:t>
+            </a:r>
+          </a:p>
+        </p:txBody>
+      </p:sp>
+      <p:sp>
+        <p:nvSpPr>
+          <p:cNvPr id="13" name="Rectangle 12"/>
+          <p:cNvSpPr/>
+          <p:nvPr/>
+        </p:nvSpPr>
+        <p:spPr>
+          <a:xfrm>
+            <a:off x="8915171" y="1051560"/>
+            <a:ext cx="2545003" cy="5303520"/>
+          </a:xfrm>
+          <a:prstGeom prst="rect">
+            <a:avLst/>
+          </a:prstGeom>
+          <a:solidFill>
+            <a:srgbClr val="244A63"/>
+          </a:solidFill>
+          <a:ln>
+            <a:noFill/>
+          </a:ln>
+        </p:spPr>
+        <p:style>
+          <a:lnRef idx="1">
+            <a:schemeClr val="accent1"/>
+          </a:lnRef>
+          <a:fillRef idx="3">
+            <a:schemeClr val="accent1"/>
+          </a:fillRef>
+          <a:effectRef idx="2">
+            <a:schemeClr val="accent1"/>
+          </a:effectRef>
+          <a:fontRef idx="minor">
+            <a:schemeClr val="lt1"/>
+          </a:fontRef>
+        </p:style>
+        <p:txBody>
+          <a:bodyPr rtlCol="0" anchor="ctr"/>
+          <a:lstStyle/>
+          <a:p>
+            <a:pPr algn="ctr"/>
+          </a:p>
+        </p:txBody>
+      </p:sp>
+      <p:sp>
+        <p:nvSpPr>
+          <p:cNvPr id="14" name="TextBox 13"/>
           <p:cNvSpPr txBox="1"/>
           <p:nvPr/>
         </p:nvSpPr>
         <p:spPr>
           <a:xfrm>
-            <a:off x="8823731" y="1280160"/>
-            <a:ext cx="2727883" cy="2286000"/>
+            <a:off x="8915171" y="1371600"/>
+            <a:ext cx="2545003" cy="2560320"/>
+          </a:xfrm>
+          <a:prstGeom prst="rect">
+            <a:avLst/>
+          </a:prstGeom>
+          <a:noFill/>
+        </p:spPr>
+        <p:txBody>
+          <a:bodyPr wrap="none">
+            <a:spAutoFit/>
+          </a:bodyPr>
+          <a:lstStyle/>
+          <a:p>
+            <a:pPr algn="ctr"/>
+            <a:r>
+              <a:rPr sz="6400" b="1">
+                <a:solidFill>
+                  <a:srgbClr val="3A9E7A"/>
+                </a:solidFill>
+              </a:rPr>
+              <a:t>100%</a:t>
+            </a:r>
+          </a:p>
+        </p:txBody>
+      </p:sp>
+      <p:sp>
+        <p:nvSpPr>
+          <p:cNvPr id="15" name="TextBox 14"/>
+          <p:cNvSpPr txBox="1"/>
+          <p:nvPr/>
+        </p:nvSpPr>
+        <p:spPr>
+          <a:xfrm>
+            <a:off x="8960891" y="3931920"/>
+            <a:ext cx="2453563" cy="2011680"/>
           </a:xfrm>
           <a:prstGeom prst="rect">
             <a:avLst/>
@@ -8012,50 +9768,20 @@
           <a:p>
             <a:pPr algn="ctr"/>
             <a:r>
-              <a:rPr sz="6000" b="1">
-                <a:solidFill>
-                  <a:srgbClr val="7BA098"/>
-                </a:solidFill>
-              </a:rPr>
-              <a:t>79%</a:t>
-            </a:r>
-          </a:p>
-        </p:txBody>
-      </p:sp>
-      <p:sp>
-        <p:nvSpPr>
-          <p:cNvPr id="11" name="TextBox 10"/>
-          <p:cNvSpPr txBox="1"/>
-          <p:nvPr/>
-        </p:nvSpPr>
-        <p:spPr>
-          <a:xfrm>
-            <a:off x="8823731" y="3566160"/>
-            <a:ext cx="2727883" cy="1645920"/>
-          </a:xfrm>
-          <a:prstGeom prst="rect">
-            <a:avLst/>
-          </a:prstGeom>
-          <a:noFill/>
-        </p:spPr>
-        <p:txBody>
-          <a:bodyPr wrap="square">
-            <a:spAutoFit/>
-          </a:bodyPr>
-          <a:lstStyle/>
-          <a:p>
-            <a:pPr algn="ctr"/>
-            <a:r>
-              <a:rPr sz="1400" b="0">
+              <a:rPr sz="1300" b="0">
                 <a:solidFill>
                   <a:srgbClr val="4A9BBF"/>
                 </a:solidFill>
               </a:rPr>
-              <a:t>no confía en los</a:t>
+              <a:t>de los entrevistados</a:t>
             </a:r>
             <a:br/>
             <a:r>
-              <a:t>políticos como fuente</a:t>
+              <a:t>en terreno habia</a:t>
+            </a:r>
+            <a:br/>
+            <a:r>
+              <a:t>visto fake news</a:t>
             </a:r>
           </a:p>
         </p:txBody>
@@ -8069,6 +9795,584 @@
 </file>
 
 <file path=ppt/slides/slide6.xml><?xml version="1.0" encoding="utf-8"?>
+<p:sld xmlns:a="http://schemas.openxmlformats.org/drawingml/2006/main" xmlns:p="http://schemas.openxmlformats.org/presentationml/2006/main" xmlns:r="http://schemas.openxmlformats.org/officeDocument/2006/relationships">
+  <p:cSld>
+    <p:bg>
+      <p:bgPr>
+        <a:solidFill>
+          <a:srgbClr val="1C3A52"/>
+        </a:solidFill>
+        <a:effectLst/>
+      </p:bgPr>
+    </p:bg>
+    <p:spTree>
+      <p:nvGrpSpPr>
+        <p:cNvPr id="1" name=""/>
+        <p:cNvGrpSpPr/>
+        <p:nvPr/>
+      </p:nvGrpSpPr>
+      <p:grpSpPr/>
+      <p:sp>
+        <p:nvSpPr>
+          <p:cNvPr id="2" name="Rectangle 1"/>
+          <p:cNvSpPr/>
+          <p:nvPr/>
+        </p:nvSpPr>
+        <p:spPr>
+          <a:xfrm>
+            <a:off x="0" y="0"/>
+            <a:ext cx="12191695" cy="54864"/>
+          </a:xfrm>
+          <a:prstGeom prst="rect">
+            <a:avLst/>
+          </a:prstGeom>
+          <a:solidFill>
+            <a:srgbClr val="3A9E7A"/>
+          </a:solidFill>
+          <a:ln>
+            <a:noFill/>
+          </a:ln>
+        </p:spPr>
+        <p:style>
+          <a:lnRef idx="1">
+            <a:schemeClr val="accent1"/>
+          </a:lnRef>
+          <a:fillRef idx="3">
+            <a:schemeClr val="accent1"/>
+          </a:fillRef>
+          <a:effectRef idx="2">
+            <a:schemeClr val="accent1"/>
+          </a:effectRef>
+          <a:fontRef idx="minor">
+            <a:schemeClr val="lt1"/>
+          </a:fontRef>
+        </p:style>
+        <p:txBody>
+          <a:bodyPr rtlCol="0" anchor="ctr"/>
+          <a:lstStyle/>
+          <a:p>
+            <a:pPr algn="ctr"/>
+          </a:p>
+        </p:txBody>
+      </p:sp>
+      <p:sp>
+        <p:nvSpPr>
+          <p:cNvPr id="3" name="TextBox 2"/>
+          <p:cNvSpPr txBox="1"/>
+          <p:nvPr/>
+        </p:nvSpPr>
+        <p:spPr>
+          <a:xfrm>
+            <a:off x="640080" y="228600"/>
+            <a:ext cx="10911535" cy="640080"/>
+          </a:xfrm>
+          <a:prstGeom prst="rect">
+            <a:avLst/>
+          </a:prstGeom>
+          <a:noFill/>
+        </p:spPr>
+        <p:txBody>
+          <a:bodyPr wrap="none">
+            <a:spAutoFit/>
+          </a:bodyPr>
+          <a:lstStyle/>
+          <a:p>
+            <a:r>
+              <a:rPr sz="2000" b="1">
+                <a:solidFill>
+                  <a:srgbClr val="4A9BBF"/>
+                </a:solidFill>
+              </a:rPr>
+              <a:t>El costo visible -- votos nulos Municipales 2021 vs 2024 (SERVEL)</a:t>
+            </a:r>
+          </a:p>
+        </p:txBody>
+      </p:sp>
+      <p:sp>
+        <p:nvSpPr>
+          <p:cNvPr id="4" name="Rectangle 3"/>
+          <p:cNvSpPr/>
+          <p:nvPr/>
+        </p:nvSpPr>
+        <p:spPr>
+          <a:xfrm>
+            <a:off x="731520" y="1051560"/>
+            <a:ext cx="2545003" cy="5303520"/>
+          </a:xfrm>
+          <a:prstGeom prst="rect">
+            <a:avLst/>
+          </a:prstGeom>
+          <a:solidFill>
+            <a:srgbClr val="244A63"/>
+          </a:solidFill>
+          <a:ln>
+            <a:noFill/>
+          </a:ln>
+        </p:spPr>
+        <p:style>
+          <a:lnRef idx="1">
+            <a:schemeClr val="accent1"/>
+          </a:lnRef>
+          <a:fillRef idx="3">
+            <a:schemeClr val="accent1"/>
+          </a:fillRef>
+          <a:effectRef idx="2">
+            <a:schemeClr val="accent1"/>
+          </a:effectRef>
+          <a:fontRef idx="minor">
+            <a:schemeClr val="lt1"/>
+          </a:fontRef>
+        </p:style>
+        <p:txBody>
+          <a:bodyPr rtlCol="0" anchor="ctr"/>
+          <a:lstStyle/>
+          <a:p>
+            <a:pPr algn="ctr"/>
+          </a:p>
+        </p:txBody>
+      </p:sp>
+      <p:sp>
+        <p:nvSpPr>
+          <p:cNvPr id="5" name="TextBox 4"/>
+          <p:cNvSpPr txBox="1"/>
+          <p:nvPr/>
+        </p:nvSpPr>
+        <p:spPr>
+          <a:xfrm>
+            <a:off x="731520" y="1371600"/>
+            <a:ext cx="2545003" cy="2560320"/>
+          </a:xfrm>
+          <a:prstGeom prst="rect">
+            <a:avLst/>
+          </a:prstGeom>
+          <a:noFill/>
+        </p:spPr>
+        <p:txBody>
+          <a:bodyPr wrap="none">
+            <a:spAutoFit/>
+          </a:bodyPr>
+          <a:lstStyle/>
+          <a:p>
+            <a:pPr algn="ctr"/>
+            <a:r>
+              <a:rPr sz="6400" b="1">
+                <a:solidFill>
+                  <a:srgbClr val="DC2626"/>
+                </a:solidFill>
+              </a:rPr>
+              <a:t>+460%</a:t>
+            </a:r>
+          </a:p>
+        </p:txBody>
+      </p:sp>
+      <p:sp>
+        <p:nvSpPr>
+          <p:cNvPr id="6" name="TextBox 5"/>
+          <p:cNvSpPr txBox="1"/>
+          <p:nvPr/>
+        </p:nvSpPr>
+        <p:spPr>
+          <a:xfrm>
+            <a:off x="777240" y="3931920"/>
+            <a:ext cx="2453563" cy="2011680"/>
+          </a:xfrm>
+          <a:prstGeom prst="rect">
+            <a:avLst/>
+          </a:prstGeom>
+          <a:noFill/>
+        </p:spPr>
+        <p:txBody>
+          <a:bodyPr wrap="square">
+            <a:spAutoFit/>
+          </a:bodyPr>
+          <a:lstStyle/>
+          <a:p>
+            <a:pPr algn="ctr"/>
+            <a:r>
+              <a:rPr sz="1300" b="0">
+                <a:solidFill>
+                  <a:srgbClr val="4A9BBF"/>
+                </a:solidFill>
+              </a:rPr>
+              <a:t>votos nulos</a:t>
+            </a:r>
+            <a:br/>
+            <a:r>
+              <a:t>para alcalde</a:t>
+            </a:r>
+            <a:br/>
+            <a:r>
+              <a:t>1,93% -&gt; 10,80%</a:t>
+            </a:r>
+          </a:p>
+        </p:txBody>
+      </p:sp>
+      <p:sp>
+        <p:nvSpPr>
+          <p:cNvPr id="7" name="Rectangle 6"/>
+          <p:cNvSpPr/>
+          <p:nvPr/>
+        </p:nvSpPr>
+        <p:spPr>
+          <a:xfrm>
+            <a:off x="3459403" y="1051560"/>
+            <a:ext cx="2545003" cy="5303520"/>
+          </a:xfrm>
+          <a:prstGeom prst="rect">
+            <a:avLst/>
+          </a:prstGeom>
+          <a:solidFill>
+            <a:srgbClr val="244A63"/>
+          </a:solidFill>
+          <a:ln>
+            <a:noFill/>
+          </a:ln>
+        </p:spPr>
+        <p:style>
+          <a:lnRef idx="1">
+            <a:schemeClr val="accent1"/>
+          </a:lnRef>
+          <a:fillRef idx="3">
+            <a:schemeClr val="accent1"/>
+          </a:fillRef>
+          <a:effectRef idx="2">
+            <a:schemeClr val="accent1"/>
+          </a:effectRef>
+          <a:fontRef idx="minor">
+            <a:schemeClr val="lt1"/>
+          </a:fontRef>
+        </p:style>
+        <p:txBody>
+          <a:bodyPr rtlCol="0" anchor="ctr"/>
+          <a:lstStyle/>
+          <a:p>
+            <a:pPr algn="ctr"/>
+          </a:p>
+        </p:txBody>
+      </p:sp>
+      <p:sp>
+        <p:nvSpPr>
+          <p:cNvPr id="8" name="TextBox 7"/>
+          <p:cNvSpPr txBox="1"/>
+          <p:nvPr/>
+        </p:nvSpPr>
+        <p:spPr>
+          <a:xfrm>
+            <a:off x="3459403" y="1371600"/>
+            <a:ext cx="2545003" cy="2560320"/>
+          </a:xfrm>
+          <a:prstGeom prst="rect">
+            <a:avLst/>
+          </a:prstGeom>
+          <a:noFill/>
+        </p:spPr>
+        <p:txBody>
+          <a:bodyPr wrap="none">
+            <a:spAutoFit/>
+          </a:bodyPr>
+          <a:lstStyle/>
+          <a:p>
+            <a:pPr algn="ctr"/>
+            <a:r>
+              <a:rPr sz="6400" b="1">
+                <a:solidFill>
+                  <a:srgbClr val="D97706"/>
+                </a:solidFill>
+              </a:rPr>
+              <a:t>+274%</a:t>
+            </a:r>
+          </a:p>
+        </p:txBody>
+      </p:sp>
+      <p:sp>
+        <p:nvSpPr>
+          <p:cNvPr id="9" name="TextBox 8"/>
+          <p:cNvSpPr txBox="1"/>
+          <p:nvPr/>
+        </p:nvSpPr>
+        <p:spPr>
+          <a:xfrm>
+            <a:off x="3505123" y="3931920"/>
+            <a:ext cx="2453563" cy="2011680"/>
+          </a:xfrm>
+          <a:prstGeom prst="rect">
+            <a:avLst/>
+          </a:prstGeom>
+          <a:noFill/>
+        </p:spPr>
+        <p:txBody>
+          <a:bodyPr wrap="square">
+            <a:spAutoFit/>
+          </a:bodyPr>
+          <a:lstStyle/>
+          <a:p>
+            <a:pPr algn="ctr"/>
+            <a:r>
+              <a:rPr sz="1300" b="0">
+                <a:solidFill>
+                  <a:srgbClr val="4A9BBF"/>
+                </a:solidFill>
+              </a:rPr>
+              <a:t>votos nulos</a:t>
+            </a:r>
+            <a:br/>
+            <a:r>
+              <a:t>para concejal</a:t>
+            </a:r>
+            <a:br/>
+            <a:r>
+              <a:t>5,74% -&gt; 21,46%</a:t>
+            </a:r>
+          </a:p>
+        </p:txBody>
+      </p:sp>
+      <p:sp>
+        <p:nvSpPr>
+          <p:cNvPr id="10" name="Rectangle 9"/>
+          <p:cNvSpPr/>
+          <p:nvPr/>
+        </p:nvSpPr>
+        <p:spPr>
+          <a:xfrm>
+            <a:off x="6187287" y="1051560"/>
+            <a:ext cx="2545003" cy="5303520"/>
+          </a:xfrm>
+          <a:prstGeom prst="rect">
+            <a:avLst/>
+          </a:prstGeom>
+          <a:solidFill>
+            <a:srgbClr val="244A63"/>
+          </a:solidFill>
+          <a:ln>
+            <a:noFill/>
+          </a:ln>
+        </p:spPr>
+        <p:style>
+          <a:lnRef idx="1">
+            <a:schemeClr val="accent1"/>
+          </a:lnRef>
+          <a:fillRef idx="3">
+            <a:schemeClr val="accent1"/>
+          </a:fillRef>
+          <a:effectRef idx="2">
+            <a:schemeClr val="accent1"/>
+          </a:effectRef>
+          <a:fontRef idx="minor">
+            <a:schemeClr val="lt1"/>
+          </a:fontRef>
+        </p:style>
+        <p:txBody>
+          <a:bodyPr rtlCol="0" anchor="ctr"/>
+          <a:lstStyle/>
+          <a:p>
+            <a:pPr algn="ctr"/>
+          </a:p>
+        </p:txBody>
+      </p:sp>
+      <p:sp>
+        <p:nvSpPr>
+          <p:cNvPr id="11" name="TextBox 10"/>
+          <p:cNvSpPr txBox="1"/>
+          <p:nvPr/>
+        </p:nvSpPr>
+        <p:spPr>
+          <a:xfrm>
+            <a:off x="6187287" y="1371600"/>
+            <a:ext cx="2545003" cy="2560320"/>
+          </a:xfrm>
+          <a:prstGeom prst="rect">
+            <a:avLst/>
+          </a:prstGeom>
+          <a:noFill/>
+        </p:spPr>
+        <p:txBody>
+          <a:bodyPr wrap="none">
+            <a:spAutoFit/>
+          </a:bodyPr>
+          <a:lstStyle/>
+          <a:p>
+            <a:pPr algn="ctr"/>
+            <a:r>
+              <a:rPr sz="6400" b="1">
+                <a:solidFill>
+                  <a:srgbClr val="4A9BBF"/>
+                </a:solidFill>
+              </a:rPr>
+              <a:t>+190%</a:t>
+            </a:r>
+          </a:p>
+        </p:txBody>
+      </p:sp>
+      <p:sp>
+        <p:nvSpPr>
+          <p:cNvPr id="12" name="TextBox 11"/>
+          <p:cNvSpPr txBox="1"/>
+          <p:nvPr/>
+        </p:nvSpPr>
+        <p:spPr>
+          <a:xfrm>
+            <a:off x="6233007" y="3931920"/>
+            <a:ext cx="2453563" cy="2011680"/>
+          </a:xfrm>
+          <a:prstGeom prst="rect">
+            <a:avLst/>
+          </a:prstGeom>
+          <a:noFill/>
+        </p:spPr>
+        <p:txBody>
+          <a:bodyPr wrap="square">
+            <a:spAutoFit/>
+          </a:bodyPr>
+          <a:lstStyle/>
+          <a:p>
+            <a:pPr algn="ctr"/>
+            <a:r>
+              <a:rPr sz="1300" b="0">
+                <a:solidFill>
+                  <a:srgbClr val="4A9BBF"/>
+                </a:solidFill>
+              </a:rPr>
+              <a:t>votos nulos</a:t>
+            </a:r>
+            <a:br/>
+            <a:r>
+              <a:t>para gobernador</a:t>
+            </a:r>
+            <a:br/>
+            <a:r>
+              <a:t>6,13% -&gt; 17,80%</a:t>
+            </a:r>
+          </a:p>
+        </p:txBody>
+      </p:sp>
+      <p:sp>
+        <p:nvSpPr>
+          <p:cNvPr id="13" name="Rectangle 12"/>
+          <p:cNvSpPr/>
+          <p:nvPr/>
+        </p:nvSpPr>
+        <p:spPr>
+          <a:xfrm>
+            <a:off x="8915171" y="1051560"/>
+            <a:ext cx="2545003" cy="5303520"/>
+          </a:xfrm>
+          <a:prstGeom prst="rect">
+            <a:avLst/>
+          </a:prstGeom>
+          <a:solidFill>
+            <a:srgbClr val="244A63"/>
+          </a:solidFill>
+          <a:ln>
+            <a:noFill/>
+          </a:ln>
+        </p:spPr>
+        <p:style>
+          <a:lnRef idx="1">
+            <a:schemeClr val="accent1"/>
+          </a:lnRef>
+          <a:fillRef idx="3">
+            <a:schemeClr val="accent1"/>
+          </a:fillRef>
+          <a:effectRef idx="2">
+            <a:schemeClr val="accent1"/>
+          </a:effectRef>
+          <a:fontRef idx="minor">
+            <a:schemeClr val="lt1"/>
+          </a:fontRef>
+        </p:style>
+        <p:txBody>
+          <a:bodyPr rtlCol="0" anchor="ctr"/>
+          <a:lstStyle/>
+          <a:p>
+            <a:pPr algn="ctr"/>
+          </a:p>
+        </p:txBody>
+      </p:sp>
+      <p:sp>
+        <p:nvSpPr>
+          <p:cNvPr id="14" name="TextBox 13"/>
+          <p:cNvSpPr txBox="1"/>
+          <p:nvPr/>
+        </p:nvSpPr>
+        <p:spPr>
+          <a:xfrm>
+            <a:off x="8915171" y="1371600"/>
+            <a:ext cx="2545003" cy="2560320"/>
+          </a:xfrm>
+          <a:prstGeom prst="rect">
+            <a:avLst/>
+          </a:prstGeom>
+          <a:noFill/>
+        </p:spPr>
+        <p:txBody>
+          <a:bodyPr wrap="none">
+            <a:spAutoFit/>
+          </a:bodyPr>
+          <a:lstStyle/>
+          <a:p>
+            <a:pPr algn="ctr"/>
+            <a:r>
+              <a:rPr sz="6400" b="1">
+                <a:solidFill>
+                  <a:srgbClr val="7BA098"/>
+                </a:solidFill>
+              </a:rPr>
+              <a:t>2,1M</a:t>
+            </a:r>
+          </a:p>
+        </p:txBody>
+      </p:sp>
+      <p:sp>
+        <p:nvSpPr>
+          <p:cNvPr id="15" name="TextBox 14"/>
+          <p:cNvSpPr txBox="1"/>
+          <p:nvPr/>
+        </p:nvSpPr>
+        <p:spPr>
+          <a:xfrm>
+            <a:off x="8960891" y="3931920"/>
+            <a:ext cx="2453563" cy="2011680"/>
+          </a:xfrm>
+          <a:prstGeom prst="rect">
+            <a:avLst/>
+          </a:prstGeom>
+          <a:noFill/>
+        </p:spPr>
+        <p:txBody>
+          <a:bodyPr wrap="square">
+            <a:spAutoFit/>
+          </a:bodyPr>
+          <a:lstStyle/>
+          <a:p>
+            <a:pPr algn="ctr"/>
+            <a:r>
+              <a:rPr sz="1300" b="0">
+                <a:solidFill>
+                  <a:srgbClr val="4A9BBF"/>
+                </a:solidFill>
+              </a:rPr>
+              <a:t>votos nulos en</a:t>
+            </a:r>
+            <a:br/>
+            <a:r>
+              <a:t>procesos</a:t>
+            </a:r>
+            <a:br/>
+            <a:r>
+              <a:t>constitucionales</a:t>
+            </a:r>
+          </a:p>
+        </p:txBody>
+      </p:sp>
+    </p:spTree>
+  </p:cSld>
+  <p:clrMapOvr>
+    <a:masterClrMapping/>
+  </p:clrMapOvr>
+</p:sld>
+</file>
+
+<file path=ppt/slides/slide7.xml><?xml version="1.0" encoding="utf-8"?>
 <p:sld xmlns:a="http://schemas.openxmlformats.org/drawingml/2006/main" xmlns:p="http://schemas.openxmlformats.org/presentationml/2006/main" xmlns:r="http://schemas.openxmlformats.org/officeDocument/2006/relationships">
   <p:cSld>
     <p:bg>
@@ -8095,7 +10399,7 @@
         <p:spPr>
           <a:xfrm>
             <a:off x="0" y="0"/>
-            <a:ext cx="12191695" cy="73152"/>
+            <a:ext cx="12191695" cy="64008"/>
           </a:xfrm>
           <a:prstGeom prst="rect">
             <a:avLst/>
@@ -8137,8 +10441,8 @@
         </p:nvSpPr>
         <p:spPr>
           <a:xfrm>
-            <a:off x="640080" y="320040"/>
-            <a:ext cx="10911535" cy="777240"/>
+            <a:off x="640080" y="274320"/>
+            <a:ext cx="10911535" cy="749808"/>
           </a:xfrm>
           <a:prstGeom prst="rect">
             <a:avLst/>
@@ -8157,7 +10461,7 @@
                   <a:srgbClr val="1C3A52"/>
                 </a:solidFill>
               </a:rPr>
-              <a:t>El costo visible: votos nulos y en blanco</a:t>
+              <a:t>La sobrecarga: demasiada informacion, poca estructura</a:t>
             </a:r>
           </a:p>
         </p:txBody>
@@ -8170,8 +10474,8 @@
         </p:nvSpPr>
         <p:spPr>
           <a:xfrm>
-            <a:off x="640080" y="1143000"/>
-            <a:ext cx="1371600" cy="36576"/>
+            <a:off x="640080" y="1115568"/>
+            <a:ext cx="1097280" cy="36576"/>
           </a:xfrm>
           <a:prstGeom prst="rect">
             <a:avLst/>
@@ -8207,14 +10511,57 @@
       </p:sp>
       <p:sp>
         <p:nvSpPr>
-          <p:cNvPr id="5" name="TextBox 4"/>
+          <p:cNvPr id="5" name="Oval 4"/>
+          <p:cNvSpPr/>
+          <p:nvPr/>
+        </p:nvSpPr>
+        <p:spPr>
+          <a:xfrm>
+            <a:off x="640080" y="1463040"/>
+            <a:ext cx="164592" cy="164592"/>
+          </a:xfrm>
+          <a:prstGeom prst="ellipse">
+            <a:avLst/>
+          </a:prstGeom>
+          <a:solidFill>
+            <a:srgbClr val="3A9E7A"/>
+          </a:solidFill>
+          <a:ln>
+            <a:noFill/>
+          </a:ln>
+        </p:spPr>
+        <p:style>
+          <a:lnRef idx="1">
+            <a:schemeClr val="accent1"/>
+          </a:lnRef>
+          <a:fillRef idx="3">
+            <a:schemeClr val="accent1"/>
+          </a:fillRef>
+          <a:effectRef idx="2">
+            <a:schemeClr val="accent1"/>
+          </a:effectRef>
+          <a:fontRef idx="minor">
+            <a:schemeClr val="lt1"/>
+          </a:fontRef>
+        </p:style>
+        <p:txBody>
+          <a:bodyPr rtlCol="0" anchor="ctr"/>
+          <a:lstStyle/>
+          <a:p>
+            <a:pPr algn="ctr"/>
+          </a:p>
+        </p:txBody>
+      </p:sp>
+      <p:sp>
+        <p:nvSpPr>
+          <p:cNvPr id="6" name="TextBox 5"/>
           <p:cNvSpPr txBox="1"/>
           <p:nvPr/>
         </p:nvSpPr>
         <p:spPr>
           <a:xfrm>
-            <a:off x="640080" y="1371600"/>
-            <a:ext cx="10911535" cy="640080"/>
+            <a:off x="960120" y="1325880"/>
+            <a:ext cx="10591495" cy="1005840"/>
           </a:xfrm>
           <a:prstGeom prst="rect">
             <a:avLst/>
@@ -8228,279 +10575,316 @@
           <a:lstStyle/>
           <a:p>
             <a:r>
-              <a:rPr sz="1700" b="1">
-                <a:solidFill>
-                  <a:srgbClr val="2E5F7E"/>
-                </a:solidFill>
-              </a:rPr>
-              <a:t>Municipales 2021 → 2024: un salto extraordinario</a:t>
-            </a:r>
-          </a:p>
-        </p:txBody>
-      </p:sp>
-      <p:sp>
-        <p:nvSpPr>
-          <p:cNvPr id="6" name="TextBox 5"/>
-          <p:cNvSpPr txBox="1"/>
-          <p:nvPr/>
-        </p:nvSpPr>
-        <p:spPr>
-          <a:xfrm>
-            <a:off x="640080" y="2011680"/>
-            <a:ext cx="10911535" cy="4389120"/>
-          </a:xfrm>
-          <a:prstGeom prst="rect">
-            <a:avLst/>
-          </a:prstGeom>
-          <a:noFill/>
-        </p:spPr>
-        <p:txBody>
-          <a:bodyPr wrap="square">
-            <a:spAutoFit/>
-          </a:bodyPr>
-          <a:lstStyle/>
-          <a:p>
-            <a:pPr>
-              <a:spcBef>
-                <a:spcPts val="400"/>
-              </a:spcBef>
-            </a:pPr>
-            <a:r>
-              <a:rPr sz="1600">
+              <a:rPr sz="1900" b="0">
                 <a:solidFill>
                   <a:srgbClr val="1F2A35"/>
                 </a:solidFill>
               </a:rPr>
-              <a:t>Alcalde:             1,93%  →  10,80%   (+460%)</a:t>
-            </a:r>
-          </a:p>
-          <a:p>
-            <a:pPr>
-              <a:spcBef>
-                <a:spcPts val="400"/>
-              </a:spcBef>
-            </a:pPr>
-            <a:r>
-              <a:rPr sz="1600">
+              <a:t>8 procesos en 4 anos = fatiga cognitiva acumulada</a:t>
+            </a:r>
+          </a:p>
+        </p:txBody>
+      </p:sp>
+      <p:sp>
+        <p:nvSpPr>
+          <p:cNvPr id="7" name="Oval 6"/>
+          <p:cNvSpPr/>
+          <p:nvPr/>
+        </p:nvSpPr>
+        <p:spPr>
+          <a:xfrm>
+            <a:off x="640080" y="2468880"/>
+            <a:ext cx="164592" cy="164592"/>
+          </a:xfrm>
+          <a:prstGeom prst="ellipse">
+            <a:avLst/>
+          </a:prstGeom>
+          <a:solidFill>
+            <a:srgbClr val="3A9E7A"/>
+          </a:solidFill>
+          <a:ln>
+            <a:noFill/>
+          </a:ln>
+        </p:spPr>
+        <p:style>
+          <a:lnRef idx="1">
+            <a:schemeClr val="accent1"/>
+          </a:lnRef>
+          <a:fillRef idx="3">
+            <a:schemeClr val="accent1"/>
+          </a:fillRef>
+          <a:effectRef idx="2">
+            <a:schemeClr val="accent1"/>
+          </a:effectRef>
+          <a:fontRef idx="minor">
+            <a:schemeClr val="lt1"/>
+          </a:fontRef>
+        </p:style>
+        <p:txBody>
+          <a:bodyPr rtlCol="0" anchor="ctr"/>
+          <a:lstStyle/>
+          <a:p>
+            <a:pPr algn="ctr"/>
+          </a:p>
+        </p:txBody>
+      </p:sp>
+      <p:sp>
+        <p:nvSpPr>
+          <p:cNvPr id="8" name="TextBox 7"/>
+          <p:cNvSpPr txBox="1"/>
+          <p:nvPr/>
+        </p:nvSpPr>
+        <p:spPr>
+          <a:xfrm>
+            <a:off x="960120" y="2331720"/>
+            <a:ext cx="10591495" cy="1005840"/>
+          </a:xfrm>
+          <a:prstGeom prst="rect">
+            <a:avLst/>
+          </a:prstGeom>
+          <a:noFill/>
+        </p:spPr>
+        <p:txBody>
+          <a:bodyPr wrap="square">
+            <a:spAutoFit/>
+          </a:bodyPr>
+          <a:lstStyle/>
+          <a:p>
+            <a:r>
+              <a:rPr sz="1900" b="0">
                 <a:solidFill>
                   <a:srgbClr val="1F2A35"/>
                 </a:solidFill>
               </a:rPr>
-              <a:t>Gobernador:          6,13%  →  17,80%   (+190%)</a:t>
-            </a:r>
-          </a:p>
-          <a:p>
-            <a:pPr>
-              <a:spcBef>
-                <a:spcPts val="400"/>
-              </a:spcBef>
-            </a:pPr>
-            <a:r>
-              <a:rPr sz="1600">
+              <a:t>Cada eleccion tiene multiples cargos con decenas de candidatos</a:t>
+            </a:r>
+          </a:p>
+        </p:txBody>
+      </p:sp>
+      <p:sp>
+        <p:nvSpPr>
+          <p:cNvPr id="9" name="Oval 8"/>
+          <p:cNvSpPr/>
+          <p:nvPr/>
+        </p:nvSpPr>
+        <p:spPr>
+          <a:xfrm>
+            <a:off x="640080" y="3474720"/>
+            <a:ext cx="164592" cy="164592"/>
+          </a:xfrm>
+          <a:prstGeom prst="ellipse">
+            <a:avLst/>
+          </a:prstGeom>
+          <a:solidFill>
+            <a:srgbClr val="3A9E7A"/>
+          </a:solidFill>
+          <a:ln>
+            <a:noFill/>
+          </a:ln>
+        </p:spPr>
+        <p:style>
+          <a:lnRef idx="1">
+            <a:schemeClr val="accent1"/>
+          </a:lnRef>
+          <a:fillRef idx="3">
+            <a:schemeClr val="accent1"/>
+          </a:fillRef>
+          <a:effectRef idx="2">
+            <a:schemeClr val="accent1"/>
+          </a:effectRef>
+          <a:fontRef idx="minor">
+            <a:schemeClr val="lt1"/>
+          </a:fontRef>
+        </p:style>
+        <p:txBody>
+          <a:bodyPr rtlCol="0" anchor="ctr"/>
+          <a:lstStyle/>
+          <a:p>
+            <a:pPr algn="ctr"/>
+          </a:p>
+        </p:txBody>
+      </p:sp>
+      <p:sp>
+        <p:nvSpPr>
+          <p:cNvPr id="10" name="TextBox 9"/>
+          <p:cNvSpPr txBox="1"/>
+          <p:nvPr/>
+        </p:nvSpPr>
+        <p:spPr>
+          <a:xfrm>
+            <a:off x="960120" y="3337560"/>
+            <a:ext cx="10591495" cy="1005840"/>
+          </a:xfrm>
+          <a:prstGeom prst="rect">
+            <a:avLst/>
+          </a:prstGeom>
+          <a:noFill/>
+        </p:spPr>
+        <p:txBody>
+          <a:bodyPr wrap="square">
+            <a:spAutoFit/>
+          </a:bodyPr>
+          <a:lstStyle/>
+          <a:p>
+            <a:r>
+              <a:rPr sz="1900" b="0">
                 <a:solidFill>
                   <a:srgbClr val="1F2A35"/>
                 </a:solidFill>
               </a:rPr>
-              <a:t>Concejal:            5,74%  →  21,46%   (+274%)</a:t>
-            </a:r>
-          </a:p>
-          <a:p>
-            <a:pPr>
-              <a:spcBef>
-                <a:spcPts val="400"/>
-              </a:spcBef>
-            </a:pPr>
-            <a:r>
-              <a:rPr sz="1600">
+              <a:t>Las fuentes verificadas son extensas y de dificil acceso</a:t>
+            </a:r>
+          </a:p>
+        </p:txBody>
+      </p:sp>
+      <p:sp>
+        <p:nvSpPr>
+          <p:cNvPr id="11" name="Oval 10"/>
+          <p:cNvSpPr/>
+          <p:nvPr/>
+        </p:nvSpPr>
+        <p:spPr>
+          <a:xfrm>
+            <a:off x="640080" y="4480560"/>
+            <a:ext cx="164592" cy="164592"/>
+          </a:xfrm>
+          <a:prstGeom prst="ellipse">
+            <a:avLst/>
+          </a:prstGeom>
+          <a:solidFill>
+            <a:srgbClr val="3A9E7A"/>
+          </a:solidFill>
+          <a:ln>
+            <a:noFill/>
+          </a:ln>
+        </p:spPr>
+        <p:style>
+          <a:lnRef idx="1">
+            <a:schemeClr val="accent1"/>
+          </a:lnRef>
+          <a:fillRef idx="3">
+            <a:schemeClr val="accent1"/>
+          </a:fillRef>
+          <a:effectRef idx="2">
+            <a:schemeClr val="accent1"/>
+          </a:effectRef>
+          <a:fontRef idx="minor">
+            <a:schemeClr val="lt1"/>
+          </a:fontRef>
+        </p:style>
+        <p:txBody>
+          <a:bodyPr rtlCol="0" anchor="ctr"/>
+          <a:lstStyle/>
+          <a:p>
+            <a:pPr algn="ctr"/>
+          </a:p>
+        </p:txBody>
+      </p:sp>
+      <p:sp>
+        <p:nvSpPr>
+          <p:cNvPr id="12" name="TextBox 11"/>
+          <p:cNvSpPr txBox="1"/>
+          <p:nvPr/>
+        </p:nvSpPr>
+        <p:spPr>
+          <a:xfrm>
+            <a:off x="960120" y="4343400"/>
+            <a:ext cx="10591495" cy="1005840"/>
+          </a:xfrm>
+          <a:prstGeom prst="rect">
+            <a:avLst/>
+          </a:prstGeom>
+          <a:noFill/>
+        </p:spPr>
+        <p:txBody>
+          <a:bodyPr wrap="square">
+            <a:spAutoFit/>
+          </a:bodyPr>
+          <a:lstStyle/>
+          <a:p>
+            <a:r>
+              <a:rPr sz="1900" b="0">
                 <a:solidFill>
                   <a:srgbClr val="1F2A35"/>
                 </a:solidFill>
               </a:rPr>
-              <a:t>Consejero Regional: 13,10%  →  25,78%   (+97%)</a:t>
-            </a:r>
-          </a:p>
-          <a:p>
-            <a:pPr>
-              <a:spcBef>
-                <a:spcPts val="400"/>
-              </a:spcBef>
-            </a:pPr>
-          </a:p>
-          <a:p>
-            <a:pPr>
-              <a:spcBef>
-                <a:spcPts val="400"/>
-              </a:spcBef>
-            </a:pPr>
-            <a:r>
-              <a:rPr sz="1600">
+              <a:t>Las redes sociales simplifican pero desinforman</a:t>
+            </a:r>
+          </a:p>
+        </p:txBody>
+      </p:sp>
+      <p:sp>
+        <p:nvSpPr>
+          <p:cNvPr id="13" name="Oval 12"/>
+          <p:cNvSpPr/>
+          <p:nvPr/>
+        </p:nvSpPr>
+        <p:spPr>
+          <a:xfrm>
+            <a:off x="640080" y="5486400"/>
+            <a:ext cx="164592" cy="164592"/>
+          </a:xfrm>
+          <a:prstGeom prst="ellipse">
+            <a:avLst/>
+          </a:prstGeom>
+          <a:solidFill>
+            <a:srgbClr val="3A9E7A"/>
+          </a:solidFill>
+          <a:ln>
+            <a:noFill/>
+          </a:ln>
+        </p:spPr>
+        <p:style>
+          <a:lnRef idx="1">
+            <a:schemeClr val="accent1"/>
+          </a:lnRef>
+          <a:fillRef idx="3">
+            <a:schemeClr val="accent1"/>
+          </a:fillRef>
+          <a:effectRef idx="2">
+            <a:schemeClr val="accent1"/>
+          </a:effectRef>
+          <a:fontRef idx="minor">
+            <a:schemeClr val="lt1"/>
+          </a:fontRef>
+        </p:style>
+        <p:txBody>
+          <a:bodyPr rtlCol="0" anchor="ctr"/>
+          <a:lstStyle/>
+          <a:p>
+            <a:pPr algn="ctr"/>
+          </a:p>
+        </p:txBody>
+      </p:sp>
+      <p:sp>
+        <p:nvSpPr>
+          <p:cNvPr id="14" name="TextBox 13"/>
+          <p:cNvSpPr txBox="1"/>
+          <p:nvPr/>
+        </p:nvSpPr>
+        <p:spPr>
+          <a:xfrm>
+            <a:off x="960120" y="5349240"/>
+            <a:ext cx="10591495" cy="1005840"/>
+          </a:xfrm>
+          <a:prstGeom prst="rect">
+            <a:avLst/>
+          </a:prstGeom>
+          <a:noFill/>
+        </p:spPr>
+        <p:txBody>
+          <a:bodyPr wrap="square">
+            <a:spAutoFit/>
+          </a:bodyPr>
+          <a:lstStyle/>
+          <a:p>
+            <a:r>
+              <a:rPr sz="1900" b="0">
                 <a:solidFill>
                   <a:srgbClr val="1F2A35"/>
                 </a:solidFill>
               </a:rPr>
-              <a:t>Procesos constitucionales: 2.119.506 votos nulos  =  16,98% del total</a:t>
-            </a:r>
-          </a:p>
-          <a:p>
-            <a:pPr>
-              <a:spcBef>
-                <a:spcPts val="400"/>
-              </a:spcBef>
-            </a:pPr>
-          </a:p>
-          <a:p>
-            <a:pPr>
-              <a:spcBef>
-                <a:spcPts val="400"/>
-              </a:spcBef>
-            </a:pPr>
-            <a:r>
-              <a:rPr sz="1600">
-                <a:solidFill>
-                  <a:srgbClr val="1F2A35"/>
-                </a:solidFill>
-              </a:rPr>
-              <a:t>"Los votos blancos normalmente son el resultado de la desinformación."</a:t>
-            </a:r>
-          </a:p>
-          <a:p>
-            <a:pPr>
-              <a:spcBef>
-                <a:spcPts val="400"/>
-              </a:spcBef>
-            </a:pPr>
-            <a:r>
-              <a:rPr sz="1600">
-                <a:solidFill>
-                  <a:srgbClr val="1F2A35"/>
-                </a:solidFill>
-              </a:rPr>
-              <a:t>— Analistas del SERVEL</a:t>
-            </a:r>
-          </a:p>
-        </p:txBody>
-      </p:sp>
-    </p:spTree>
-  </p:cSld>
-  <p:clrMapOvr>
-    <a:masterClrMapping/>
-  </p:clrMapOvr>
-</p:sld>
-</file>
-
-<file path=ppt/slides/slide7.xml><?xml version="1.0" encoding="utf-8"?>
-<p:sld xmlns:a="http://schemas.openxmlformats.org/drawingml/2006/main" xmlns:p="http://schemas.openxmlformats.org/presentationml/2006/main" xmlns:r="http://schemas.openxmlformats.org/officeDocument/2006/relationships">
-  <p:cSld>
-    <p:bg>
-      <p:bgPr>
-        <a:solidFill>
-          <a:srgbClr val="2E5F7E"/>
-        </a:solidFill>
-        <a:effectLst/>
-      </p:bgPr>
-    </p:bg>
-    <p:spTree>
-      <p:nvGrpSpPr>
-        <p:cNvPr id="1" name=""/>
-        <p:cNvGrpSpPr/>
-        <p:nvPr/>
-      </p:nvGrpSpPr>
-      <p:grpSpPr/>
-      <p:sp>
-        <p:nvSpPr>
-          <p:cNvPr id="2" name="TextBox 1"/>
-          <p:cNvSpPr txBox="1"/>
-          <p:nvPr/>
-        </p:nvSpPr>
-        <p:spPr>
-          <a:xfrm>
-            <a:off x="640080" y="1371600"/>
-            <a:ext cx="1828800" cy="1828800"/>
-          </a:xfrm>
-          <a:prstGeom prst="rect">
-            <a:avLst/>
-          </a:prstGeom>
-          <a:noFill/>
-        </p:spPr>
-        <p:txBody>
-          <a:bodyPr wrap="none">
-            <a:spAutoFit/>
-          </a:bodyPr>
-          <a:lstStyle/>
-          <a:p>
-            <a:r>
-              <a:rPr sz="9600" b="1" i="0">
-                <a:solidFill>
-                  <a:srgbClr val="6EA2C0"/>
-                </a:solidFill>
-              </a:rPr>
-              <a:t>02</a:t>
-            </a:r>
-          </a:p>
-        </p:txBody>
-      </p:sp>
-      <p:sp>
-        <p:nvSpPr>
-          <p:cNvPr id="3" name="TextBox 2"/>
-          <p:cNvSpPr txBox="1"/>
-          <p:nvPr/>
-        </p:nvSpPr>
-        <p:spPr>
-          <a:xfrm>
-            <a:off x="640080" y="3200400"/>
-            <a:ext cx="10911535" cy="1371600"/>
-          </a:xfrm>
-          <a:prstGeom prst="rect">
-            <a:avLst/>
-          </a:prstGeom>
-          <a:noFill/>
-        </p:spPr>
-        <p:txBody>
-          <a:bodyPr wrap="square">
-            <a:spAutoFit/>
-          </a:bodyPr>
-          <a:lstStyle/>
-          <a:p>
-            <a:r>
-              <a:rPr sz="3600" b="1">
-                <a:solidFill>
-                  <a:srgbClr val="FFFFFF"/>
-                </a:solidFill>
-              </a:rPr>
-              <a:t>La Investigación Empírica</a:t>
-            </a:r>
-          </a:p>
-        </p:txBody>
-      </p:sp>
-      <p:sp>
-        <p:nvSpPr>
-          <p:cNvPr id="4" name="TextBox 3"/>
-          <p:cNvSpPr txBox="1"/>
-          <p:nvPr/>
-        </p:nvSpPr>
-        <p:spPr>
-          <a:xfrm>
-            <a:off x="640080" y="4572000"/>
-            <a:ext cx="10911535" cy="914400"/>
-          </a:xfrm>
-          <a:prstGeom prst="rect">
-            <a:avLst/>
-          </a:prstGeom>
-          <a:noFill/>
-        </p:spPr>
-        <p:txBody>
-          <a:bodyPr wrap="square">
-            <a:spAutoFit/>
-          </a:bodyPr>
-          <a:lstStyle/>
-          <a:p>
-            <a:r>
-              <a:rPr sz="1600" b="0">
-                <a:solidFill>
-                  <a:srgbClr val="4A9BBF"/>
-                </a:solidFill>
-              </a:rPr>
-              <a:t>Cómo se verificó el problema en el terreno</a:t>
+              <a:t>No existia herramienta que estructurara la comparacion</a:t>
             </a:r>
           </a:p>
         </p:txBody>
@@ -8540,7 +10924,7 @@
         <p:spPr>
           <a:xfrm>
             <a:off x="0" y="0"/>
-            <a:ext cx="12191695" cy="73152"/>
+            <a:ext cx="12191695" cy="64008"/>
           </a:xfrm>
           <a:prstGeom prst="rect">
             <a:avLst/>
@@ -8582,8 +10966,8 @@
         </p:nvSpPr>
         <p:spPr>
           <a:xfrm>
-            <a:off x="640080" y="274320"/>
-            <a:ext cx="10911535" cy="731520"/>
+            <a:off x="640080" y="256032"/>
+            <a:ext cx="10911535" cy="685800"/>
           </a:xfrm>
           <a:prstGeom prst="rect">
             <a:avLst/>
@@ -8591,7 +10975,7 @@
           <a:noFill/>
         </p:spPr>
         <p:txBody>
-          <a:bodyPr wrap="square">
+          <a:bodyPr wrap="none">
             <a:spAutoFit/>
           </a:bodyPr>
           <a:lstStyle/>
@@ -8602,7 +10986,7 @@
                   <a:srgbClr val="1C3A52"/>
                 </a:solidFill>
               </a:rPr>
-              <a:t>Investigación de campo — Emprendimiento I, 2024</a:t>
+              <a:t>Investigacion de campo -- Emprendimiento I, UTFSM 2024</a:t>
             </a:r>
           </a:p>
         </p:txBody>
@@ -8615,14 +10999,14 @@
         </p:nvSpPr>
         <p:spPr>
           <a:xfrm>
-            <a:off x="6095847" y="1188720"/>
-            <a:ext cx="18288" cy="5303520"/>
+            <a:off x="640080" y="1188720"/>
+            <a:ext cx="3515258" cy="1188720"/>
           </a:xfrm>
           <a:prstGeom prst="rect">
             <a:avLst/>
           </a:prstGeom>
           <a:solidFill>
-            <a:srgbClr val="CBD1CD"/>
+            <a:srgbClr val="2E5F7E"/>
           </a:solidFill>
           <a:ln>
             <a:noFill/>
@@ -8658,8 +11042,8 @@
         </p:nvSpPr>
         <p:spPr>
           <a:xfrm>
-            <a:off x="640080" y="1097280"/>
-            <a:ext cx="5272887" cy="457200"/>
+            <a:off x="749808" y="1325880"/>
+            <a:ext cx="3295802" cy="1051560"/>
           </a:xfrm>
           <a:prstGeom prst="rect">
             <a:avLst/>
@@ -8667,18 +11051,19 @@
           <a:noFill/>
         </p:spPr>
         <p:txBody>
-          <a:bodyPr wrap="none">
+          <a:bodyPr wrap="square">
             <a:spAutoFit/>
           </a:bodyPr>
           <a:lstStyle/>
           <a:p>
-            <a:r>
-              <a:rPr sz="1400" b="1">
+            <a:pPr algn="ctr"/>
+            <a:r>
+              <a:rPr sz="1600" b="1">
                 <a:solidFill>
-                  <a:srgbClr val="2E5F7E"/>
+                  <a:srgbClr val="FFFFFF"/>
                 </a:solidFill>
               </a:rPr>
-              <a:t>La metodología</a:t>
+              <a:t>Equipo</a:t>
             </a:r>
           </a:p>
         </p:txBody>
@@ -8691,17 +11076,19 @@
         </p:nvSpPr>
         <p:spPr>
           <a:xfrm>
-            <a:off x="640080" y="1554480"/>
-            <a:ext cx="731520" cy="36576"/>
+            <a:off x="640080" y="2377440"/>
+            <a:ext cx="3515258" cy="3749040"/>
           </a:xfrm>
           <a:prstGeom prst="rect">
             <a:avLst/>
           </a:prstGeom>
           <a:solidFill>
-            <a:srgbClr val="3A9E7A"/>
+            <a:srgbClr val="FFFFFF"/>
           </a:solidFill>
-          <a:ln>
-            <a:noFill/>
+          <a:ln w="12700">
+            <a:solidFill>
+              <a:srgbClr val="CBD1CD"/>
+            </a:solidFill>
           </a:ln>
         </p:spPr>
         <p:style>
@@ -8734,8 +11121,8 @@
         </p:nvSpPr>
         <p:spPr>
           <a:xfrm>
-            <a:off x="640080" y="1691640"/>
-            <a:ext cx="5272887" cy="4663440"/>
+            <a:off x="777240" y="2560320"/>
+            <a:ext cx="3240938" cy="3474720"/>
           </a:xfrm>
           <a:prstGeom prst="rect">
             <a:avLst/>
@@ -8748,175 +11135,51 @@
           </a:bodyPr>
           <a:lstStyle/>
           <a:p>
-            <a:pPr>
-              <a:spcBef>
-                <a:spcPts val="500"/>
-              </a:spcBef>
-            </a:pPr>
-            <a:r>
-              <a:rPr sz="1400">
+            <a:pPr algn="l"/>
+            <a:r>
+              <a:rPr sz="1300" b="0">
                 <a:solidFill>
                   <a:srgbClr val="1F2A35"/>
                 </a:solidFill>
               </a:rPr>
-              <a:t>• Curso: Emprendimiento — UTFSM</a:t>
-            </a:r>
-          </a:p>
-          <a:p>
-            <a:pPr>
-              <a:spcBef>
-                <a:spcPts val="500"/>
-              </a:spcBef>
-            </a:pPr>
-            <a:r>
-              <a:rPr sz="1400">
-                <a:solidFill>
-                  <a:srgbClr val="1F2A35"/>
-                </a:solidFill>
-              </a:rPr>
-              <a:t>• Equipo: Jenifer Castillo, Patricio De Lima, Alonso Sánchez</a:t>
-            </a:r>
-          </a:p>
-          <a:p>
-            <a:pPr>
-              <a:spcBef>
-                <a:spcPts val="500"/>
-              </a:spcBef>
-            </a:pPr>
-          </a:p>
-          <a:p>
-            <a:pPr>
-              <a:spcBef>
-                <a:spcPts val="500"/>
-              </a:spcBef>
-            </a:pPr>
-            <a:r>
-              <a:rPr sz="1400">
-                <a:solidFill>
-                  <a:srgbClr val="1F2A35"/>
-                </a:solidFill>
-              </a:rPr>
-              <a:t>• 12 entrevistas en terreno</a:t>
-            </a:r>
-          </a:p>
-          <a:p>
-            <a:pPr>
-              <a:spcBef>
-                <a:spcPts val="500"/>
-              </a:spcBef>
-            </a:pPr>
-            <a:r>
-              <a:rPr sz="1400">
-                <a:solidFill>
-                  <a:srgbClr val="1F2A35"/>
-                </a:solidFill>
-              </a:rPr>
-              <a:t>• Localidades: Playa Ancha, Viña del Mar y Quilpué</a:t>
-            </a:r>
-          </a:p>
-          <a:p>
-            <a:pPr>
-              <a:spcBef>
-                <a:spcPts val="500"/>
-              </a:spcBef>
-            </a:pPr>
-            <a:r>
-              <a:rPr sz="1400">
-                <a:solidFill>
-                  <a:srgbClr val="1F2A35"/>
-                </a:solidFill>
-              </a:rPr>
-              <a:t>• Perfiles socioeconómicos y etarios distintos</a:t>
-            </a:r>
-          </a:p>
-          <a:p>
-            <a:pPr>
-              <a:spcBef>
-                <a:spcPts val="500"/>
-              </a:spcBef>
-            </a:pPr>
-          </a:p>
-          <a:p>
-            <a:pPr>
-              <a:spcBef>
-                <a:spcPts val="500"/>
-              </a:spcBef>
-            </a:pPr>
-            <a:r>
-              <a:rPr sz="1400">
-                <a:solidFill>
-                  <a:srgbClr val="1F2A35"/>
-                </a:solidFill>
-              </a:rPr>
-              <a:t>• 7 dimensiones de análisis</a:t>
-            </a:r>
-          </a:p>
-          <a:p>
-            <a:pPr>
-              <a:spcBef>
-                <a:spcPts val="500"/>
-              </a:spcBef>
-            </a:pPr>
-            <a:r>
-              <a:rPr sz="1400">
-                <a:solidFill>
-                  <a:srgbClr val="1F2A35"/>
-                </a:solidFill>
-              </a:rPr>
-              <a:t>• Respuestas dicotómicas (sí / no)</a:t>
-            </a:r>
-          </a:p>
-        </p:txBody>
-      </p:sp>
-      <p:sp>
-        <p:nvSpPr>
-          <p:cNvPr id="8" name="TextBox 7"/>
-          <p:cNvSpPr txBox="1"/>
-          <p:nvPr/>
-        </p:nvSpPr>
-        <p:spPr>
-          <a:xfrm>
-            <a:off x="6297015" y="1097280"/>
-            <a:ext cx="5272887" cy="457200"/>
-          </a:xfrm>
-          <a:prstGeom prst="rect">
-            <a:avLst/>
-          </a:prstGeom>
-          <a:noFill/>
-        </p:spPr>
-        <p:txBody>
-          <a:bodyPr wrap="none">
-            <a:spAutoFit/>
-          </a:bodyPr>
-          <a:lstStyle/>
-          <a:p>
-            <a:r>
-              <a:rPr sz="1400" b="1">
-                <a:solidFill>
-                  <a:srgbClr val="2E5F7E"/>
-                </a:solidFill>
-              </a:rPr>
-              <a:t>Las dimensiones consultadas</a:t>
-            </a:r>
-          </a:p>
-        </p:txBody>
-      </p:sp>
-      <p:sp>
-        <p:nvSpPr>
-          <p:cNvPr id="9" name="Rectangle 8"/>
+              <a:t>Jenifer Castillo</a:t>
+            </a:r>
+            <a:br/>
+            <a:r>
+              <a:t>Patricio De Lima</a:t>
+            </a:r>
+            <a:br/>
+            <a:r>
+              <a:t>Alonso Sanchez</a:t>
+            </a:r>
+            <a:br/>
+            <a:br/>
+            <a:r>
+              <a:t>Curso:</a:t>
+            </a:r>
+            <a:br/>
+            <a:r>
+              <a:t>Emprendimiento -- UTFSM</a:t>
+            </a:r>
+          </a:p>
+        </p:txBody>
+      </p:sp>
+      <p:sp>
+        <p:nvSpPr>
+          <p:cNvPr id="8" name="Rectangle 7"/>
           <p:cNvSpPr/>
           <p:nvPr/>
         </p:nvSpPr>
         <p:spPr>
           <a:xfrm>
-            <a:off x="6297015" y="1554480"/>
-            <a:ext cx="731520" cy="36576"/>
+            <a:off x="4338218" y="1188720"/>
+            <a:ext cx="3515258" cy="1188720"/>
           </a:xfrm>
           <a:prstGeom prst="rect">
             <a:avLst/>
           </a:prstGeom>
           <a:solidFill>
-            <a:srgbClr val="3A9E7A"/>
+            <a:srgbClr val="244A63"/>
           </a:solidFill>
           <a:ln>
             <a:noFill/>
@@ -8946,14 +11209,14 @@
       </p:sp>
       <p:sp>
         <p:nvSpPr>
-          <p:cNvPr id="10" name="TextBox 9"/>
+          <p:cNvPr id="9" name="TextBox 8"/>
           <p:cNvSpPr txBox="1"/>
           <p:nvPr/>
         </p:nvSpPr>
         <p:spPr>
           <a:xfrm>
-            <a:off x="6297015" y="1691640"/>
-            <a:ext cx="5272887" cy="4663440"/>
+            <a:off x="4447946" y="1325880"/>
+            <a:ext cx="3295802" cy="1051560"/>
           </a:xfrm>
           <a:prstGeom prst="rect">
             <a:avLst/>
@@ -8966,108 +11229,288 @@
           </a:bodyPr>
           <a:lstStyle/>
           <a:p>
-            <a:pPr>
-              <a:spcBef>
-                <a:spcPts val="500"/>
-              </a:spcBef>
-            </a:pPr>
-            <a:r>
-              <a:rPr sz="1400">
+            <a:pPr algn="ctr"/>
+            <a:r>
+              <a:rPr sz="1600" b="1">
+                <a:solidFill>
+                  <a:srgbClr val="FFFFFF"/>
+                </a:solidFill>
+              </a:rPr>
+              <a:t>Metodologia</a:t>
+            </a:r>
+          </a:p>
+        </p:txBody>
+      </p:sp>
+      <p:sp>
+        <p:nvSpPr>
+          <p:cNvPr id="10" name="Rectangle 9"/>
+          <p:cNvSpPr/>
+          <p:nvPr/>
+        </p:nvSpPr>
+        <p:spPr>
+          <a:xfrm>
+            <a:off x="4338218" y="2377440"/>
+            <a:ext cx="3515258" cy="3749040"/>
+          </a:xfrm>
+          <a:prstGeom prst="rect">
+            <a:avLst/>
+          </a:prstGeom>
+          <a:solidFill>
+            <a:srgbClr val="FFFFFF"/>
+          </a:solidFill>
+          <a:ln w="12700">
+            <a:solidFill>
+              <a:srgbClr val="CBD1CD"/>
+            </a:solidFill>
+          </a:ln>
+        </p:spPr>
+        <p:style>
+          <a:lnRef idx="1">
+            <a:schemeClr val="accent1"/>
+          </a:lnRef>
+          <a:fillRef idx="3">
+            <a:schemeClr val="accent1"/>
+          </a:fillRef>
+          <a:effectRef idx="2">
+            <a:schemeClr val="accent1"/>
+          </a:effectRef>
+          <a:fontRef idx="minor">
+            <a:schemeClr val="lt1"/>
+          </a:fontRef>
+        </p:style>
+        <p:txBody>
+          <a:bodyPr rtlCol="0" anchor="ctr"/>
+          <a:lstStyle/>
+          <a:p>
+            <a:pPr algn="ctr"/>
+          </a:p>
+        </p:txBody>
+      </p:sp>
+      <p:sp>
+        <p:nvSpPr>
+          <p:cNvPr id="11" name="TextBox 10"/>
+          <p:cNvSpPr txBox="1"/>
+          <p:nvPr/>
+        </p:nvSpPr>
+        <p:spPr>
+          <a:xfrm>
+            <a:off x="4475378" y="2560320"/>
+            <a:ext cx="3240938" cy="3474720"/>
+          </a:xfrm>
+          <a:prstGeom prst="rect">
+            <a:avLst/>
+          </a:prstGeom>
+          <a:noFill/>
+        </p:spPr>
+        <p:txBody>
+          <a:bodyPr wrap="square">
+            <a:spAutoFit/>
+          </a:bodyPr>
+          <a:lstStyle/>
+          <a:p>
+            <a:pPr algn="l"/>
+            <a:r>
+              <a:rPr sz="1300" b="0">
                 <a:solidFill>
                   <a:srgbClr val="1F2A35"/>
                 </a:solidFill>
               </a:rPr>
-              <a:t>1. ¿Conocen a los candidatos?</a:t>
-            </a:r>
-          </a:p>
-          <a:p>
-            <a:pPr>
-              <a:spcBef>
-                <a:spcPts val="500"/>
-              </a:spcBef>
-            </a:pPr>
-            <a:r>
-              <a:rPr sz="1400">
+              <a:t>12 entrevistas en terreno</a:t>
+            </a:r>
+            <a:br/>
+            <a:br/>
+            <a:r>
+              <a:t>Localidades:</a:t>
+            </a:r>
+            <a:br/>
+            <a:r>
+              <a:t>Playa Ancha</a:t>
+            </a:r>
+            <a:br/>
+            <a:r>
+              <a:t>Vina del Mar</a:t>
+            </a:r>
+            <a:br/>
+            <a:r>
+              <a:t>Quilpue</a:t>
+            </a:r>
+            <a:br/>
+            <a:br/>
+            <a:r>
+              <a:t>7 dimensiones / respuestas Si-No</a:t>
+            </a:r>
+          </a:p>
+        </p:txBody>
+      </p:sp>
+      <p:sp>
+        <p:nvSpPr>
+          <p:cNvPr id="12" name="Rectangle 11"/>
+          <p:cNvSpPr/>
+          <p:nvPr/>
+        </p:nvSpPr>
+        <p:spPr>
+          <a:xfrm>
+            <a:off x="8036356" y="1188720"/>
+            <a:ext cx="3515258" cy="1188720"/>
+          </a:xfrm>
+          <a:prstGeom prst="rect">
+            <a:avLst/>
+          </a:prstGeom>
+          <a:solidFill>
+            <a:srgbClr val="DC2626"/>
+          </a:solidFill>
+          <a:ln>
+            <a:noFill/>
+          </a:ln>
+        </p:spPr>
+        <p:style>
+          <a:lnRef idx="1">
+            <a:schemeClr val="accent1"/>
+          </a:lnRef>
+          <a:fillRef idx="3">
+            <a:schemeClr val="accent1"/>
+          </a:fillRef>
+          <a:effectRef idx="2">
+            <a:schemeClr val="accent1"/>
+          </a:effectRef>
+          <a:fontRef idx="minor">
+            <a:schemeClr val="lt1"/>
+          </a:fontRef>
+        </p:style>
+        <p:txBody>
+          <a:bodyPr rtlCol="0" anchor="ctr"/>
+          <a:lstStyle/>
+          <a:p>
+            <a:pPr algn="ctr"/>
+          </a:p>
+        </p:txBody>
+      </p:sp>
+      <p:sp>
+        <p:nvSpPr>
+          <p:cNvPr id="13" name="TextBox 12"/>
+          <p:cNvSpPr txBox="1"/>
+          <p:nvPr/>
+        </p:nvSpPr>
+        <p:spPr>
+          <a:xfrm>
+            <a:off x="8146084" y="1325880"/>
+            <a:ext cx="3295802" cy="1051560"/>
+          </a:xfrm>
+          <a:prstGeom prst="rect">
+            <a:avLst/>
+          </a:prstGeom>
+          <a:noFill/>
+        </p:spPr>
+        <p:txBody>
+          <a:bodyPr wrap="square">
+            <a:spAutoFit/>
+          </a:bodyPr>
+          <a:lstStyle/>
+          <a:p>
+            <a:pPr algn="ctr"/>
+            <a:r>
+              <a:rPr sz="1600" b="1">
+                <a:solidFill>
+                  <a:srgbClr val="FFFFFF"/>
+                </a:solidFill>
+              </a:rPr>
+              <a:t>Hallazgo central</a:t>
+            </a:r>
+          </a:p>
+        </p:txBody>
+      </p:sp>
+      <p:sp>
+        <p:nvSpPr>
+          <p:cNvPr id="14" name="Rectangle 13"/>
+          <p:cNvSpPr/>
+          <p:nvPr/>
+        </p:nvSpPr>
+        <p:spPr>
+          <a:xfrm>
+            <a:off x="8036356" y="2377440"/>
+            <a:ext cx="3515258" cy="3749040"/>
+          </a:xfrm>
+          <a:prstGeom prst="rect">
+            <a:avLst/>
+          </a:prstGeom>
+          <a:solidFill>
+            <a:srgbClr val="FFFFFF"/>
+          </a:solidFill>
+          <a:ln w="12700">
+            <a:solidFill>
+              <a:srgbClr val="CBD1CD"/>
+            </a:solidFill>
+          </a:ln>
+        </p:spPr>
+        <p:style>
+          <a:lnRef idx="1">
+            <a:schemeClr val="accent1"/>
+          </a:lnRef>
+          <a:fillRef idx="3">
+            <a:schemeClr val="accent1"/>
+          </a:fillRef>
+          <a:effectRef idx="2">
+            <a:schemeClr val="accent1"/>
+          </a:effectRef>
+          <a:fontRef idx="minor">
+            <a:schemeClr val="lt1"/>
+          </a:fontRef>
+        </p:style>
+        <p:txBody>
+          <a:bodyPr rtlCol="0" anchor="ctr"/>
+          <a:lstStyle/>
+          <a:p>
+            <a:pPr algn="ctr"/>
+          </a:p>
+        </p:txBody>
+      </p:sp>
+      <p:sp>
+        <p:nvSpPr>
+          <p:cNvPr id="15" name="TextBox 14"/>
+          <p:cNvSpPr txBox="1"/>
+          <p:nvPr/>
+        </p:nvSpPr>
+        <p:spPr>
+          <a:xfrm>
+            <a:off x="8173516" y="2560320"/>
+            <a:ext cx="3240938" cy="3474720"/>
+          </a:xfrm>
+          <a:prstGeom prst="rect">
+            <a:avLst/>
+          </a:prstGeom>
+          <a:noFill/>
+        </p:spPr>
+        <p:txBody>
+          <a:bodyPr wrap="square">
+            <a:spAutoFit/>
+          </a:bodyPr>
+          <a:lstStyle/>
+          <a:p>
+            <a:pPr algn="l"/>
+            <a:r>
+              <a:rPr sz="1300" b="0">
                 <a:solidFill>
                   <a:srgbClr val="1F2A35"/>
                 </a:solidFill>
               </a:rPr>
-              <a:t>2. ¿Votan de manera informada?</a:t>
-            </a:r>
-          </a:p>
-          <a:p>
-            <a:pPr>
-              <a:spcBef>
-                <a:spcPts val="500"/>
-              </a:spcBef>
-            </a:pPr>
-            <a:r>
-              <a:rPr sz="1400">
-                <a:solidFill>
-                  <a:srgbClr val="1F2A35"/>
-                </a:solidFill>
-              </a:rPr>
-              <a:t>3. ¿Se informan por redes sociales?</a:t>
-            </a:r>
-          </a:p>
-          <a:p>
-            <a:pPr>
-              <a:spcBef>
-                <a:spcPts val="500"/>
-              </a:spcBef>
-            </a:pPr>
-            <a:r>
-              <a:rPr sz="1400">
-                <a:solidFill>
-                  <a:srgbClr val="1F2A35"/>
-                </a:solidFill>
-              </a:rPr>
-              <a:t>4. ¿Se informan por canales oficiales?</a:t>
-            </a:r>
-          </a:p>
-          <a:p>
-            <a:pPr>
-              <a:spcBef>
-                <a:spcPts val="500"/>
-              </a:spcBef>
-            </a:pPr>
-            <a:r>
-              <a:rPr sz="1400">
-                <a:solidFill>
-                  <a:srgbClr val="1F2A35"/>
-                </a:solidFill>
-              </a:rPr>
-              <a:t>5. ¿Saben qué cargos se eligen?</a:t>
-            </a:r>
-          </a:p>
-          <a:p>
-            <a:pPr>
-              <a:spcBef>
-                <a:spcPts val="500"/>
-              </a:spcBef>
-            </a:pPr>
-            <a:r>
-              <a:rPr sz="1400">
-                <a:solidFill>
-                  <a:srgbClr val="1F2A35"/>
-                </a:solidFill>
-              </a:rPr>
-              <a:t>6. ¿Creen que existe desinformación?</a:t>
-            </a:r>
-          </a:p>
-          <a:p>
-            <a:pPr>
-              <a:spcBef>
-                <a:spcPts val="500"/>
-              </a:spcBef>
-            </a:pPr>
-            <a:r>
-              <a:rPr sz="1400">
-                <a:solidFill>
-                  <a:srgbClr val="1F2A35"/>
-                </a:solidFill>
-              </a:rPr>
-              <a:t>7. ¿Han visto fake news electorales?</a:t>
+              <a:t>100% de los entrevistados</a:t>
+            </a:r>
+            <a:br/>
+            <a:r>
+              <a:t>habia tenido contacto</a:t>
+            </a:r>
+            <a:br/>
+            <a:r>
+              <a:t>con fake news electorales.</a:t>
+            </a:r>
+            <a:br/>
+            <a:br/>
+            <a:r>
+              <a:t>100% creia que existe</a:t>
+            </a:r>
+            <a:br/>
+            <a:r>
+              <a:t>desinformacion generalizada.</a:t>
             </a:r>
           </a:p>
         </p:txBody>
@@ -9150,7 +11593,117 @@
         <p:spPr>
           <a:xfrm>
             <a:off x="640080" y="228600"/>
-            <a:ext cx="10911535" cy="685800"/>
+            <a:ext cx="10911535" cy="640080"/>
+          </a:xfrm>
+          <a:prstGeom prst="rect">
+            <a:avLst/>
+          </a:prstGeom>
+          <a:noFill/>
+        </p:spPr>
+        <p:txBody>
+          <a:bodyPr wrap="none">
+            <a:spAutoFit/>
+          </a:bodyPr>
+          <a:lstStyle/>
+          <a:p>
+            <a:r>
+              <a:rPr sz="2000" b="1">
+                <a:solidFill>
+                  <a:srgbClr val="4A9BBF"/>
+                </a:solidFill>
+              </a:rPr>
+              <a:t>Hallazgos del levantamiento de campo -- N=12 entrevistados</a:t>
+            </a:r>
+          </a:p>
+        </p:txBody>
+      </p:sp>
+      <p:sp>
+        <p:nvSpPr>
+          <p:cNvPr id="4" name="Rectangle 3"/>
+          <p:cNvSpPr/>
+          <p:nvPr/>
+        </p:nvSpPr>
+        <p:spPr>
+          <a:xfrm>
+            <a:off x="731520" y="1051560"/>
+            <a:ext cx="2545003" cy="5303520"/>
+          </a:xfrm>
+          <a:prstGeom prst="rect">
+            <a:avLst/>
+          </a:prstGeom>
+          <a:solidFill>
+            <a:srgbClr val="244A63"/>
+          </a:solidFill>
+          <a:ln>
+            <a:noFill/>
+          </a:ln>
+        </p:spPr>
+        <p:style>
+          <a:lnRef idx="1">
+            <a:schemeClr val="accent1"/>
+          </a:lnRef>
+          <a:fillRef idx="3">
+            <a:schemeClr val="accent1"/>
+          </a:fillRef>
+          <a:effectRef idx="2">
+            <a:schemeClr val="accent1"/>
+          </a:effectRef>
+          <a:fontRef idx="minor">
+            <a:schemeClr val="lt1"/>
+          </a:fontRef>
+        </p:style>
+        <p:txBody>
+          <a:bodyPr rtlCol="0" anchor="ctr"/>
+          <a:lstStyle/>
+          <a:p>
+            <a:pPr algn="ctr"/>
+          </a:p>
+        </p:txBody>
+      </p:sp>
+      <p:sp>
+        <p:nvSpPr>
+          <p:cNvPr id="5" name="TextBox 4"/>
+          <p:cNvSpPr txBox="1"/>
+          <p:nvPr/>
+        </p:nvSpPr>
+        <p:spPr>
+          <a:xfrm>
+            <a:off x="731520" y="1371600"/>
+            <a:ext cx="2545003" cy="2560320"/>
+          </a:xfrm>
+          <a:prstGeom prst="rect">
+            <a:avLst/>
+          </a:prstGeom>
+          <a:noFill/>
+        </p:spPr>
+        <p:txBody>
+          <a:bodyPr wrap="none">
+            <a:spAutoFit/>
+          </a:bodyPr>
+          <a:lstStyle/>
+          <a:p>
+            <a:pPr algn="ctr"/>
+            <a:r>
+              <a:rPr sz="6400" b="1">
+                <a:solidFill>
+                  <a:srgbClr val="D97706"/>
+                </a:solidFill>
+              </a:rPr>
+              <a:t>~83%</a:t>
+            </a:r>
+          </a:p>
+        </p:txBody>
+      </p:sp>
+      <p:sp>
+        <p:nvSpPr>
+          <p:cNvPr id="6" name="TextBox 5"/>
+          <p:cNvSpPr txBox="1"/>
+          <p:nvPr/>
+        </p:nvSpPr>
+        <p:spPr>
+          <a:xfrm>
+            <a:off x="777240" y="3931920"/>
+            <a:ext cx="2453563" cy="2011680"/>
           </a:xfrm>
           <a:prstGeom prst="rect">
             <a:avLst/>
@@ -9163,27 +11716,79 @@
           </a:bodyPr>
           <a:lstStyle/>
           <a:p>
-            <a:r>
-              <a:rPr sz="2400" b="1">
+            <a:pPr algn="ctr"/>
+            <a:r>
+              <a:rPr sz="1300" b="0">
                 <a:solidFill>
-                  <a:srgbClr val="FFFFFF"/>
+                  <a:srgbClr val="4A9BBF"/>
                 </a:solidFill>
               </a:rPr>
-              <a:t>Hallazgos del levantamiento de campo — N=12 entrevistados</a:t>
-            </a:r>
-          </a:p>
-        </p:txBody>
-      </p:sp>
-      <p:sp>
-        <p:nvSpPr>
-          <p:cNvPr id="4" name="TextBox 3"/>
+              <a:t>se informa por</a:t>
+            </a:r>
+            <a:br/>
+            <a:r>
+              <a:t>redes sociales</a:t>
+            </a:r>
+            <a:br/>
+            <a:r>
+              <a:t>(no medios verificados)</a:t>
+            </a:r>
+          </a:p>
+        </p:txBody>
+      </p:sp>
+      <p:sp>
+        <p:nvSpPr>
+          <p:cNvPr id="7" name="Rectangle 6"/>
+          <p:cNvSpPr/>
+          <p:nvPr/>
+        </p:nvSpPr>
+        <p:spPr>
+          <a:xfrm>
+            <a:off x="3459403" y="1051560"/>
+            <a:ext cx="2545003" cy="5303520"/>
+          </a:xfrm>
+          <a:prstGeom prst="rect">
+            <a:avLst/>
+          </a:prstGeom>
+          <a:solidFill>
+            <a:srgbClr val="244A63"/>
+          </a:solidFill>
+          <a:ln>
+            <a:noFill/>
+          </a:ln>
+        </p:spPr>
+        <p:style>
+          <a:lnRef idx="1">
+            <a:schemeClr val="accent1"/>
+          </a:lnRef>
+          <a:fillRef idx="3">
+            <a:schemeClr val="accent1"/>
+          </a:fillRef>
+          <a:effectRef idx="2">
+            <a:schemeClr val="accent1"/>
+          </a:effectRef>
+          <a:fontRef idx="minor">
+            <a:schemeClr val="lt1"/>
+          </a:fontRef>
+        </p:style>
+        <p:txBody>
+          <a:bodyPr rtlCol="0" anchor="ctr"/>
+          <a:lstStyle/>
+          <a:p>
+            <a:pPr algn="ctr"/>
+          </a:p>
+        </p:txBody>
+      </p:sp>
+      <p:sp>
+        <p:nvSpPr>
+          <p:cNvPr id="8" name="TextBox 7"/>
           <p:cNvSpPr txBox="1"/>
           <p:nvPr/>
         </p:nvSpPr>
         <p:spPr>
           <a:xfrm>
-            <a:off x="640080" y="1280160"/>
-            <a:ext cx="2727883" cy="2286000"/>
+            <a:off x="3459403" y="1371600"/>
+            <a:ext cx="2545003" cy="2560320"/>
           </a:xfrm>
           <a:prstGeom prst="rect">
             <a:avLst/>
@@ -9191,33 +11796,33 @@
           <a:noFill/>
         </p:spPr>
         <p:txBody>
-          <a:bodyPr wrap="square">
+          <a:bodyPr wrap="none">
             <a:spAutoFit/>
           </a:bodyPr>
           <a:lstStyle/>
           <a:p>
             <a:pPr algn="ctr"/>
             <a:r>
-              <a:rPr sz="6000" b="1">
+              <a:rPr sz="6400" b="1">
                 <a:solidFill>
                   <a:srgbClr val="DC2626"/>
                 </a:solidFill>
               </a:rPr>
-              <a:t>100%</a:t>
-            </a:r>
-          </a:p>
-        </p:txBody>
-      </p:sp>
-      <p:sp>
-        <p:nvSpPr>
-          <p:cNvPr id="5" name="TextBox 4"/>
+              <a:t>~50%</a:t>
+            </a:r>
+          </a:p>
+        </p:txBody>
+      </p:sp>
+      <p:sp>
+        <p:nvSpPr>
+          <p:cNvPr id="9" name="TextBox 8"/>
           <p:cNvSpPr txBox="1"/>
           <p:nvPr/>
         </p:nvSpPr>
         <p:spPr>
           <a:xfrm>
-            <a:off x="640080" y="3566160"/>
-            <a:ext cx="2727883" cy="1645920"/>
+            <a:off x="3505123" y="3931920"/>
+            <a:ext cx="2453563" cy="2011680"/>
           </a:xfrm>
           <a:prstGeom prst="rect">
             <a:avLst/>
@@ -9232,30 +11837,111 @@
           <a:p>
             <a:pPr algn="ctr"/>
             <a:r>
-              <a:rPr sz="1400" b="0">
+              <a:rPr sz="1300" b="0">
                 <a:solidFill>
                   <a:srgbClr val="4A9BBF"/>
                 </a:solidFill>
               </a:rPr>
-              <a:t>vio o conoce</a:t>
+              <a:t>no conocia a los</a:t>
             </a:r>
             <a:br/>
             <a:r>
-              <a:t>fake news electorales</a:t>
-            </a:r>
-          </a:p>
-        </p:txBody>
-      </p:sp>
-      <p:sp>
-        <p:nvSpPr>
-          <p:cNvPr id="6" name="TextBox 5"/>
+              <a:t>candidatos en</a:t>
+            </a:r>
+            <a:br/>
+            <a:r>
+              <a:t>competencia</a:t>
+            </a:r>
+          </a:p>
+        </p:txBody>
+      </p:sp>
+      <p:sp>
+        <p:nvSpPr>
+          <p:cNvPr id="10" name="Rectangle 9"/>
+          <p:cNvSpPr/>
+          <p:nvPr/>
+        </p:nvSpPr>
+        <p:spPr>
+          <a:xfrm>
+            <a:off x="6187287" y="1051560"/>
+            <a:ext cx="2545003" cy="5303520"/>
+          </a:xfrm>
+          <a:prstGeom prst="rect">
+            <a:avLst/>
+          </a:prstGeom>
+          <a:solidFill>
+            <a:srgbClr val="244A63"/>
+          </a:solidFill>
+          <a:ln>
+            <a:noFill/>
+          </a:ln>
+        </p:spPr>
+        <p:style>
+          <a:lnRef idx="1">
+            <a:schemeClr val="accent1"/>
+          </a:lnRef>
+          <a:fillRef idx="3">
+            <a:schemeClr val="accent1"/>
+          </a:fillRef>
+          <a:effectRef idx="2">
+            <a:schemeClr val="accent1"/>
+          </a:effectRef>
+          <a:fontRef idx="minor">
+            <a:schemeClr val="lt1"/>
+          </a:fontRef>
+        </p:style>
+        <p:txBody>
+          <a:bodyPr rtlCol="0" anchor="ctr"/>
+          <a:lstStyle/>
+          <a:p>
+            <a:pPr algn="ctr"/>
+          </a:p>
+        </p:txBody>
+      </p:sp>
+      <p:sp>
+        <p:nvSpPr>
+          <p:cNvPr id="11" name="TextBox 10"/>
           <p:cNvSpPr txBox="1"/>
           <p:nvPr/>
         </p:nvSpPr>
         <p:spPr>
           <a:xfrm>
-            <a:off x="3367963" y="1280160"/>
-            <a:ext cx="2727883" cy="2286000"/>
+            <a:off x="6187287" y="1371600"/>
+            <a:ext cx="2545003" cy="2560320"/>
+          </a:xfrm>
+          <a:prstGeom prst="rect">
+            <a:avLst/>
+          </a:prstGeom>
+          <a:noFill/>
+        </p:spPr>
+        <p:txBody>
+          <a:bodyPr wrap="none">
+            <a:spAutoFit/>
+          </a:bodyPr>
+          <a:lstStyle/>
+          <a:p>
+            <a:pPr algn="ctr"/>
+            <a:r>
+              <a:rPr sz="6400" b="1">
+                <a:solidFill>
+                  <a:srgbClr val="4A9BBF"/>
+                </a:solidFill>
+              </a:rPr>
+              <a:t>~25%</a:t>
+            </a:r>
+          </a:p>
+        </p:txBody>
+      </p:sp>
+      <p:sp>
+        <p:nvSpPr>
+          <p:cNvPr id="12" name="TextBox 11"/>
+          <p:cNvSpPr txBox="1"/>
+          <p:nvPr/>
+        </p:nvSpPr>
+        <p:spPr>
+          <a:xfrm>
+            <a:off x="6233007" y="3931920"/>
+            <a:ext cx="2453563" cy="2011680"/>
           </a:xfrm>
           <a:prstGeom prst="rect">
             <a:avLst/>
@@ -9270,7 +11956,92 @@
           <a:p>
             <a:pPr algn="ctr"/>
             <a:r>
-              <a:rPr sz="6000" b="1">
+              <a:rPr sz="1300" b="0">
+                <a:solidFill>
+                  <a:srgbClr val="4A9BBF"/>
+                </a:solidFill>
+              </a:rPr>
+              <a:t>usaba canales</a:t>
+            </a:r>
+            <a:br/>
+            <a:r>
+              <a:t>oficiales como</a:t>
+            </a:r>
+            <a:br/>
+            <a:r>
+              <a:t>fuente principal</a:t>
+            </a:r>
+          </a:p>
+        </p:txBody>
+      </p:sp>
+      <p:sp>
+        <p:nvSpPr>
+          <p:cNvPr id="13" name="Rectangle 12"/>
+          <p:cNvSpPr/>
+          <p:nvPr/>
+        </p:nvSpPr>
+        <p:spPr>
+          <a:xfrm>
+            <a:off x="8915171" y="1051560"/>
+            <a:ext cx="2545003" cy="5303520"/>
+          </a:xfrm>
+          <a:prstGeom prst="rect">
+            <a:avLst/>
+          </a:prstGeom>
+          <a:solidFill>
+            <a:srgbClr val="244A63"/>
+          </a:solidFill>
+          <a:ln>
+            <a:noFill/>
+          </a:ln>
+        </p:spPr>
+        <p:style>
+          <a:lnRef idx="1">
+            <a:schemeClr val="accent1"/>
+          </a:lnRef>
+          <a:fillRef idx="3">
+            <a:schemeClr val="accent1"/>
+          </a:fillRef>
+          <a:effectRef idx="2">
+            <a:schemeClr val="accent1"/>
+          </a:effectRef>
+          <a:fontRef idx="minor">
+            <a:schemeClr val="lt1"/>
+          </a:fontRef>
+        </p:style>
+        <p:txBody>
+          <a:bodyPr rtlCol="0" anchor="ctr"/>
+          <a:lstStyle/>
+          <a:p>
+            <a:pPr algn="ctr"/>
+          </a:p>
+        </p:txBody>
+      </p:sp>
+      <p:sp>
+        <p:nvSpPr>
+          <p:cNvPr id="14" name="TextBox 13"/>
+          <p:cNvSpPr txBox="1"/>
+          <p:nvPr/>
+        </p:nvSpPr>
+        <p:spPr>
+          <a:xfrm>
+            <a:off x="8915171" y="1371600"/>
+            <a:ext cx="2545003" cy="2560320"/>
+          </a:xfrm>
+          <a:prstGeom prst="rect">
+            <a:avLst/>
+          </a:prstGeom>
+          <a:noFill/>
+        </p:spPr>
+        <p:txBody>
+          <a:bodyPr wrap="none">
+            <a:spAutoFit/>
+          </a:bodyPr>
+          <a:lstStyle/>
+          <a:p>
+            <a:pPr algn="ctr"/>
+            <a:r>
+              <a:rPr sz="6400" b="1">
                 <a:solidFill>
                   <a:srgbClr val="3A9E7A"/>
                 </a:solidFill>
@@ -9282,14 +12053,14 @@
       </p:sp>
       <p:sp>
         <p:nvSpPr>
-          <p:cNvPr id="7" name="TextBox 6"/>
+          <p:cNvPr id="15" name="TextBox 14"/>
           <p:cNvSpPr txBox="1"/>
           <p:nvPr/>
         </p:nvSpPr>
         <p:spPr>
           <a:xfrm>
-            <a:off x="3367963" y="3566160"/>
-            <a:ext cx="2727883" cy="1645920"/>
+            <a:off x="8960891" y="3931920"/>
+            <a:ext cx="2453563" cy="2011680"/>
           </a:xfrm>
           <a:prstGeom prst="rect">
             <a:avLst/>
@@ -9304,160 +12075,20 @@
           <a:p>
             <a:pPr algn="ctr"/>
             <a:r>
-              <a:rPr sz="1400" b="0">
+              <a:rPr sz="1300" b="0">
                 <a:solidFill>
                   <a:srgbClr val="4A9BBF"/>
                 </a:solidFill>
               </a:rPr>
-              <a:t>cree que existe</a:t>
+              <a:t>creia que existe</a:t>
             </a:r>
             <a:br/>
             <a:r>
-              <a:t>desinformación en Chile</a:t>
-            </a:r>
-          </a:p>
-        </p:txBody>
-      </p:sp>
-      <p:sp>
-        <p:nvSpPr>
-          <p:cNvPr id="8" name="TextBox 7"/>
-          <p:cNvSpPr txBox="1"/>
-          <p:nvPr/>
-        </p:nvSpPr>
-        <p:spPr>
-          <a:xfrm>
-            <a:off x="6095847" y="1280160"/>
-            <a:ext cx="2727883" cy="2286000"/>
-          </a:xfrm>
-          <a:prstGeom prst="rect">
-            <a:avLst/>
-          </a:prstGeom>
-          <a:noFill/>
-        </p:spPr>
-        <p:txBody>
-          <a:bodyPr wrap="square">
-            <a:spAutoFit/>
-          </a:bodyPr>
-          <a:lstStyle/>
-          <a:p>
-            <a:pPr algn="ctr"/>
-            <a:r>
-              <a:rPr sz="6000" b="1">
-                <a:solidFill>
-                  <a:srgbClr val="D97706"/>
-                </a:solidFill>
-              </a:rPr>
-              <a:t>~83%</a:t>
-            </a:r>
-          </a:p>
-        </p:txBody>
-      </p:sp>
-      <p:sp>
-        <p:nvSpPr>
-          <p:cNvPr id="9" name="TextBox 8"/>
-          <p:cNvSpPr txBox="1"/>
-          <p:nvPr/>
-        </p:nvSpPr>
-        <p:spPr>
-          <a:xfrm>
-            <a:off x="6095847" y="3566160"/>
-            <a:ext cx="2727883" cy="1645920"/>
-          </a:xfrm>
-          <a:prstGeom prst="rect">
-            <a:avLst/>
-          </a:prstGeom>
-          <a:noFill/>
-        </p:spPr>
-        <p:txBody>
-          <a:bodyPr wrap="square">
-            <a:spAutoFit/>
-          </a:bodyPr>
-          <a:lstStyle/>
-          <a:p>
-            <a:pPr algn="ctr"/>
-            <a:r>
-              <a:rPr sz="1400" b="0">
-                <a:solidFill>
-                  <a:srgbClr val="4A9BBF"/>
-                </a:solidFill>
-              </a:rPr>
-              <a:t>se informa por</a:t>
+              <a:t>desinformacion</a:t>
             </a:r>
             <a:br/>
             <a:r>
-              <a:t>redes sociales</a:t>
-            </a:r>
-          </a:p>
-        </p:txBody>
-      </p:sp>
-      <p:sp>
-        <p:nvSpPr>
-          <p:cNvPr id="10" name="TextBox 9"/>
-          <p:cNvSpPr txBox="1"/>
-          <p:nvPr/>
-        </p:nvSpPr>
-        <p:spPr>
-          <a:xfrm>
-            <a:off x="8823731" y="1280160"/>
-            <a:ext cx="2727883" cy="2286000"/>
-          </a:xfrm>
-          <a:prstGeom prst="rect">
-            <a:avLst/>
-          </a:prstGeom>
-          <a:noFill/>
-        </p:spPr>
-        <p:txBody>
-          <a:bodyPr wrap="square">
-            <a:spAutoFit/>
-          </a:bodyPr>
-          <a:lstStyle/>
-          <a:p>
-            <a:pPr algn="ctr"/>
-            <a:r>
-              <a:rPr sz="6000" b="1">
-                <a:solidFill>
-                  <a:srgbClr val="4A9BBF"/>
-                </a:solidFill>
-              </a:rPr>
-              <a:t>~25%</a:t>
-            </a:r>
-          </a:p>
-        </p:txBody>
-      </p:sp>
-      <p:sp>
-        <p:nvSpPr>
-          <p:cNvPr id="11" name="TextBox 10"/>
-          <p:cNvSpPr txBox="1"/>
-          <p:nvPr/>
-        </p:nvSpPr>
-        <p:spPr>
-          <a:xfrm>
-            <a:off x="8823731" y="3566160"/>
-            <a:ext cx="2727883" cy="1645920"/>
-          </a:xfrm>
-          <a:prstGeom prst="rect">
-            <a:avLst/>
-          </a:prstGeom>
-          <a:noFill/>
-        </p:spPr>
-        <p:txBody>
-          <a:bodyPr wrap="square">
-            <a:spAutoFit/>
-          </a:bodyPr>
-          <a:lstStyle/>
-          <a:p>
-            <a:pPr algn="ctr"/>
-            <a:r>
-              <a:rPr sz="1400" b="0">
-                <a:solidFill>
-                  <a:srgbClr val="4A9BBF"/>
-                </a:solidFill>
-              </a:rPr>
-              <a:t>usa canales</a:t>
-            </a:r>
-            <a:br/>
-            <a:r>
-              <a:t>oficiales (SERVEL)</a:t>
+              <a:t>generalizada en Chile</a:t>
             </a:r>
           </a:p>
         </p:txBody>
